--- a/report/outline_giá trị xe ô tô.pptx
+++ b/report/outline_giá trị xe ô tô.pptx
@@ -269,7 +269,7 @@
       <p15:sldGuideLst xmlns:p15="http://schemas.microsoft.com/office/powerpoint/2012/main"/>
     </p:ext>
     <p:ext uri="GoogleSlidesCustomDataVersion2">
-      <go:slidesCustomData xmlns="" xmlns:mc="http://schemas.openxmlformats.org/markup-compatibility/2006" xmlns:mv="urn:schemas-microsoft-com:mac:vml" xmlns:c="http://schemas.openxmlformats.org/drawingml/2006/chart" xmlns:dgm="http://schemas.openxmlformats.org/drawingml/2006/diagram" xmlns:o="urn:schemas-microsoft-com:office:office" xmlns:v="urn:schemas-microsoft-com:vml" xmlns:pvml="urn:schemas-microsoft-com:office:powerpoint" xmlns:com="http://schemas.openxmlformats.org/drawingml/2006/compatibility" xmlns:p14="http://schemas.microsoft.com/office/powerpoint/2010/main" xmlns:p15="http://schemas.microsoft.com/office/powerpoint/2012/main" xmlns:ahyp="http://schemas.microsoft.com/office/drawing/2018/hyperlinkcolor" xmlns:go="http://customooxmlschemas.google.com/" r:id="rId31" roundtripDataSignature="AMtx7mg/feVIVbFuoWwRTm8at7c5l2mrqQ=="/>
+      <go:slidesCustomData xmlns:go="http://customooxmlschemas.google.com/" xmlns:ahyp="http://schemas.microsoft.com/office/drawing/2018/hyperlinkcolor" xmlns:p15="http://schemas.microsoft.com/office/powerpoint/2012/main" xmlns:p14="http://schemas.microsoft.com/office/powerpoint/2010/main" xmlns:com="http://schemas.openxmlformats.org/drawingml/2006/compatibility" xmlns:pvml="urn:schemas-microsoft-com:office:powerpoint" xmlns:v="urn:schemas-microsoft-com:vml" xmlns:o="urn:schemas-microsoft-com:office:office" xmlns:dgm="http://schemas.openxmlformats.org/drawingml/2006/diagram" xmlns:c="http://schemas.openxmlformats.org/drawingml/2006/chart" xmlns:mv="urn:schemas-microsoft-com:mac:vml" xmlns:mc="http://schemas.openxmlformats.org/markup-compatibility/2006" xmlns="" r:id="rId31" roundtripDataSignature="AMtx7mg/feVIVbFuoWwRTm8at7c5l2mrqQ=="/>
     </p:ext>
   </p:extLst>
 </p:presentation>
@@ -12142,7 +12142,7 @@
               <a:t> ô </a:t>
             </a:r>
             <a:r>
-              <a:rPr sz="4000" b="1" i="0" dirty="0" err="1" smtClean="0">
+              <a:rPr sz="4000" b="1" i="0" dirty="0" err="1">
                 <a:solidFill>
                   <a:srgbClr val="2FA6FF"/>
                 </a:solidFill>
@@ -12285,7 +12285,7 @@
               <a:buNone/>
             </a:pPr>
             <a:r>
-              <a:rPr lang="en-US" sz="1600" b="0" i="0" u="sng" strike="noStrike" cap="none">
+              <a:rPr lang="en-US" sz="1600" b="0" i="0" u="sng" strike="noStrike" cap="none" dirty="0" err="1">
                 <a:solidFill>
                   <a:srgbClr val="1348F1"/>
                 </a:solidFill>
@@ -12296,14 +12296,14 @@
                 <a:hlinkClick r:id="rId3">
                   <a:extLst>
                     <a:ext uri="{A12FA001-AC4F-418D-AE19-62706E023703}">
-                      <ahyp:hlinkClr xmlns="" xmlns:mc="http://schemas.openxmlformats.org/markup-compatibility/2006" xmlns:mv="urn:schemas-microsoft-com:mac:vml" xmlns:c="http://schemas.openxmlformats.org/drawingml/2006/chart" xmlns:dgm="http://schemas.openxmlformats.org/drawingml/2006/diagram" xmlns:o="urn:schemas-microsoft-com:office:office" xmlns:v="urn:schemas-microsoft-com:vml" xmlns:pvml="urn:schemas-microsoft-com:office:powerpoint" xmlns:com="http://schemas.openxmlformats.org/drawingml/2006/compatibility" xmlns:p14="http://schemas.microsoft.com/office/powerpoint/2010/main" xmlns:p15="http://schemas.microsoft.com/office/powerpoint/2012/main" xmlns:ahyp="http://schemas.microsoft.com/office/drawing/2018/hyperlinkcolor" val="tx"/>
+                      <ahyp:hlinkClr xmlns:ahyp="http://schemas.microsoft.com/office/drawing/2018/hyperlinkcolor" val="tx"/>
                     </a:ext>
                   </a:extLst>
                 </a:hlinkClick>
               </a:rPr>
               <a:t>Data&amp;Code</a:t>
             </a:r>
-            <a:endParaRPr sz="1600">
+            <a:endParaRPr sz="1600" dirty="0">
               <a:solidFill>
                 <a:srgbClr val="1348F1"/>
               </a:solidFill>
@@ -12350,7 +12350,7 @@
               <a:buNone/>
             </a:pPr>
             <a:r>
-              <a:rPr lang="en-US" sz="2400" b="1" dirty="0" err="1" smtClean="0">
+              <a:rPr lang="en-US" sz="2400" b="1" dirty="0" err="1">
                 <a:solidFill>
                   <a:srgbClr val="BF9000"/>
                 </a:solidFill>
@@ -12362,7 +12362,7 @@
               <a:t>Trần</a:t>
             </a:r>
             <a:r>
-              <a:rPr lang="en-US" sz="2400" b="1" dirty="0" smtClean="0">
+              <a:rPr lang="en-US" sz="2400" b="1" dirty="0">
                 <a:solidFill>
                   <a:srgbClr val="BF9000"/>
                 </a:solidFill>
@@ -12374,7 +12374,7 @@
               <a:t> Quang </a:t>
             </a:r>
             <a:r>
-              <a:rPr lang="en-US" sz="2400" b="1" dirty="0" err="1" smtClean="0">
+              <a:rPr lang="en-US" sz="2400" b="1" dirty="0" err="1">
                 <a:solidFill>
                   <a:srgbClr val="BF9000"/>
                 </a:solidFill>
@@ -12633,8 +12633,20 @@
                 <a:tableStyleId>{5C22544A-7EE6-4342-B048-85BDC9FD1C3A}</a:tableStyleId>
               </a:tblPr>
               <a:tblGrid>
-                <a:gridCol w="2194560"/>
-                <a:gridCol w="4754880"/>
+                <a:gridCol w="2194560">
+                  <a:extLst>
+                    <a:ext uri="{9D8B030D-6E8A-4147-A177-3AD203B41FA5}">
+                      <a16:colId xmlns:a16="http://schemas.microsoft.com/office/drawing/2014/main" val="20000"/>
+                    </a:ext>
+                  </a:extLst>
+                </a:gridCol>
+                <a:gridCol w="4754880">
+                  <a:extLst>
+                    <a:ext uri="{9D8B030D-6E8A-4147-A177-3AD203B41FA5}">
+                      <a16:colId xmlns:a16="http://schemas.microsoft.com/office/drawing/2014/main" val="20001"/>
+                    </a:ext>
+                  </a:extLst>
+                </a:gridCol>
               </a:tblGrid>
               <a:tr h="502920">
                 <a:tc>
@@ -12681,6 +12693,11 @@
                     </a:solidFill>
                   </a:tcPr>
                 </a:tc>
+                <a:extLst>
+                  <a:ext uri="{0D108BD9-81ED-4DB2-BD59-A6C34878D82A}">
+                    <a16:rowId xmlns:a16="http://schemas.microsoft.com/office/drawing/2014/main" val="10000"/>
+                  </a:ext>
+                </a:extLst>
               </a:tr>
               <a:tr h="502920">
                 <a:tc>
@@ -12727,6 +12744,11 @@
                     </a:solidFill>
                   </a:tcPr>
                 </a:tc>
+                <a:extLst>
+                  <a:ext uri="{0D108BD9-81ED-4DB2-BD59-A6C34878D82A}">
+                    <a16:rowId xmlns:a16="http://schemas.microsoft.com/office/drawing/2014/main" val="10001"/>
+                  </a:ext>
+                </a:extLst>
               </a:tr>
               <a:tr h="502920">
                 <a:tc>
@@ -12773,6 +12795,11 @@
                     </a:solidFill>
                   </a:tcPr>
                 </a:tc>
+                <a:extLst>
+                  <a:ext uri="{0D108BD9-81ED-4DB2-BD59-A6C34878D82A}">
+                    <a16:rowId xmlns:a16="http://schemas.microsoft.com/office/drawing/2014/main" val="10002"/>
+                  </a:ext>
+                </a:extLst>
               </a:tr>
               <a:tr h="502920">
                 <a:tc>
@@ -12819,6 +12846,11 @@
                     </a:solidFill>
                   </a:tcPr>
                 </a:tc>
+                <a:extLst>
+                  <a:ext uri="{0D108BD9-81ED-4DB2-BD59-A6C34878D82A}">
+                    <a16:rowId xmlns:a16="http://schemas.microsoft.com/office/drawing/2014/main" val="10003"/>
+                  </a:ext>
+                </a:extLst>
               </a:tr>
               <a:tr h="502920">
                 <a:tc>
@@ -12865,6 +12897,11 @@
                     </a:solidFill>
                   </a:tcPr>
                 </a:tc>
+                <a:extLst>
+                  <a:ext uri="{0D108BD9-81ED-4DB2-BD59-A6C34878D82A}">
+                    <a16:rowId xmlns:a16="http://schemas.microsoft.com/office/drawing/2014/main" val="10004"/>
+                  </a:ext>
+                </a:extLst>
               </a:tr>
               <a:tr h="502920">
                 <a:tc>
@@ -12911,6 +12948,11 @@
                     </a:solidFill>
                   </a:tcPr>
                 </a:tc>
+                <a:extLst>
+                  <a:ext uri="{0D108BD9-81ED-4DB2-BD59-A6C34878D82A}">
+                    <a16:rowId xmlns:a16="http://schemas.microsoft.com/office/drawing/2014/main" val="10005"/>
+                  </a:ext>
+                </a:extLst>
               </a:tr>
             </a:tbl>
           </a:graphicData>
@@ -12962,7 +13004,7 @@
               <a:t> </a:t>
             </a:r>
             <a:r>
-              <a:rPr sz="1600" b="0" i="0" dirty="0" err="1" smtClean="0">
+              <a:rPr sz="1600" b="0" i="0" dirty="0" err="1">
                 <a:solidFill>
                   <a:srgbClr val="262626"/>
                 </a:solidFill>
@@ -12971,7 +13013,7 @@
               <a:t>tắc</a:t>
             </a:r>
             <a:r>
-              <a:rPr sz="1600" b="0" i="0" dirty="0" smtClean="0">
+              <a:rPr sz="1600" b="0" i="0" dirty="0">
                 <a:solidFill>
                   <a:srgbClr val="262626"/>
                 </a:solidFill>
@@ -13250,7 +13292,7 @@
               <a:t>đồng</a:t>
             </a:r>
             <a:r>
-              <a:rPr sz="1600" b="0" i="0" dirty="0" smtClean="0">
+              <a:rPr sz="1600" b="0" i="0" dirty="0">
                 <a:solidFill>
                   <a:srgbClr val="262626"/>
                 </a:solidFill>
@@ -13258,12 +13300,6 @@
               </a:rPr>
               <a:t>”</a:t>
             </a:r>
-            <a:endParaRPr sz="1600" b="0" i="0" dirty="0">
-              <a:solidFill>
-                <a:srgbClr val="262626"/>
-              </a:solidFill>
-              <a:latin typeface="Times New Roman"/>
-            </a:endParaRPr>
           </a:p>
         </p:txBody>
       </p:sp>
@@ -13348,7 +13384,7 @@
               </a:rPr>
               <a:t>: </a:t>
             </a:r>
-            <a:endParaRPr lang="en-US" sz="1400" b="1" i="0" dirty="0" smtClean="0">
+            <a:endParaRPr lang="en-US" sz="1400" b="1" i="0" dirty="0">
               <a:solidFill>
                 <a:srgbClr val="548235"/>
               </a:solidFill>
@@ -13357,7 +13393,7 @@
           </a:p>
           <a:p>
             <a:pPr algn="l"/>
-            <a:endParaRPr lang="en-US" sz="1400" b="1" i="0" dirty="0" smtClean="0">
+            <a:endParaRPr lang="en-US" sz="1400" b="1" i="0" dirty="0">
               <a:solidFill>
                 <a:srgbClr val="548235"/>
               </a:solidFill>
@@ -13367,7 +13403,7 @@
           <a:p>
             <a:pPr algn="l"/>
             <a:r>
-              <a:rPr sz="1400" b="1" i="0" dirty="0" smtClean="0">
+              <a:rPr sz="1400" b="1" i="0" dirty="0">
                 <a:solidFill>
                   <a:srgbClr val="262626"/>
                 </a:solidFill>
@@ -13376,7 +13412,7 @@
               <a:t>Fact</a:t>
             </a:r>
             <a:r>
-              <a:rPr sz="1400" b="0" i="0" dirty="0" smtClean="0">
+              <a:rPr sz="1400" b="0" i="0" dirty="0">
                 <a:solidFill>
                   <a:srgbClr val="262626"/>
                 </a:solidFill>
@@ -13529,7 +13565,7 @@
               <a:t> </a:t>
             </a:r>
             <a:r>
-              <a:rPr sz="1400" b="0" i="0" dirty="0" err="1" smtClean="0">
+              <a:rPr sz="1400" b="0" i="0" dirty="0" err="1">
                 <a:solidFill>
                   <a:srgbClr val="262626"/>
                 </a:solidFill>
@@ -13547,22 +13583,13 @@
               <a:t>,</a:t>
             </a:r>
             <a:r>
-              <a:rPr sz="1400" b="0" i="0" dirty="0" smtClean="0">
-                <a:solidFill>
-                  <a:srgbClr val="262626"/>
-                </a:solidFill>
-                <a:latin typeface="Times New Roman"/>
-              </a:rPr>
-              <a:t> </a:t>
-            </a:r>
-            <a:r>
               <a:rPr sz="1400" b="0" i="0" dirty="0">
                 <a:solidFill>
                   <a:srgbClr val="262626"/>
                 </a:solidFill>
                 <a:latin typeface="Times New Roman"/>
               </a:rPr>
-              <a:t>ở </a:t>
+              <a:t> ở </a:t>
             </a:r>
             <a:r>
               <a:rPr sz="1400" b="0" i="0" dirty="0" err="1">
@@ -13745,7 +13772,7 @@
               <a:t> </a:t>
             </a:r>
             <a:r>
-              <a:rPr sz="1400" b="0" i="0" dirty="0" err="1" smtClean="0">
+              <a:rPr sz="1400" b="0" i="0" dirty="0" err="1">
                 <a:solidFill>
                   <a:srgbClr val="262626"/>
                 </a:solidFill>
@@ -13763,7 +13790,7 @@
               <a:t> </a:t>
             </a:r>
             <a:r>
-              <a:rPr sz="1400" b="0" i="0" dirty="0" err="1" smtClean="0">
+              <a:rPr sz="1400" b="0" i="0" dirty="0" err="1">
                 <a:solidFill>
                   <a:srgbClr val="262626"/>
                 </a:solidFill>
@@ -13772,7 +13799,7 @@
               <a:t>và</a:t>
             </a:r>
             <a:r>
-              <a:rPr sz="1400" b="0" i="0" dirty="0" smtClean="0">
+              <a:rPr sz="1400" b="0" i="0" dirty="0">
                 <a:solidFill>
                   <a:srgbClr val="262626"/>
                 </a:solidFill>
@@ -13886,18 +13913,9 @@
                 </a:solidFill>
                 <a:latin typeface="Times New Roman"/>
               </a:rPr>
-              <a:t> (measure</a:t>
-            </a:r>
-            <a:r>
-              <a:rPr sz="1400" b="0" i="0" dirty="0" smtClean="0">
-                <a:solidFill>
-                  <a:srgbClr val="262626"/>
-                </a:solidFill>
-                <a:latin typeface="Times New Roman"/>
-              </a:rPr>
-              <a:t>).</a:t>
-            </a:r>
-            <a:endParaRPr lang="en-US" sz="1400" b="0" i="0" dirty="0" smtClean="0">
+              <a:t> (measure).</a:t>
+            </a:r>
+            <a:endParaRPr lang="en-US" sz="1400" b="0" i="0" dirty="0">
               <a:solidFill>
                 <a:srgbClr val="262626"/>
               </a:solidFill>
@@ -14168,7 +14186,7 @@
               <a:t> </a:t>
             </a:r>
             <a:r>
-              <a:rPr sz="1400" b="0" i="0" dirty="0" err="1" smtClean="0">
+              <a:rPr sz="1400" b="0" i="0" dirty="0" err="1">
                 <a:solidFill>
                   <a:srgbClr val="262626"/>
                 </a:solidFill>
@@ -14177,7 +14195,7 @@
               <a:t>dùng</a:t>
             </a:r>
             <a:r>
-              <a:rPr sz="1400" b="0" i="0" dirty="0" smtClean="0">
+              <a:rPr sz="1400" b="0" i="0" dirty="0">
                 <a:solidFill>
                   <a:srgbClr val="262626"/>
                 </a:solidFill>
@@ -14303,7 +14321,7 @@
               <a:t>tích</a:t>
             </a:r>
             <a:r>
-              <a:rPr sz="1400" b="0" i="0" dirty="0" smtClean="0">
+              <a:rPr sz="1400" b="0" i="0" dirty="0">
                 <a:solidFill>
                   <a:srgbClr val="262626"/>
                 </a:solidFill>
@@ -14311,12 +14329,6 @@
               </a:rPr>
               <a:t>.</a:t>
             </a:r>
-            <a:endParaRPr sz="1400" b="0" i="0" dirty="0">
-              <a:solidFill>
-                <a:srgbClr val="262626"/>
-              </a:solidFill>
-              <a:latin typeface="Times New Roman"/>
-            </a:endParaRPr>
           </a:p>
         </p:txBody>
       </p:sp>
@@ -14603,7 +14615,7 @@
               <a:t> </a:t>
             </a:r>
             <a:r>
-              <a:rPr sz="2600" b="0" i="0" dirty="0" err="1" smtClean="0">
+              <a:rPr sz="2600" b="0" i="0" dirty="0" err="1">
                 <a:solidFill>
                   <a:srgbClr val="C55A11"/>
                 </a:solidFill>
@@ -14612,7 +14624,7 @@
               <a:t>toá</a:t>
             </a:r>
             <a:r>
-              <a:rPr lang="en-US" sz="2600" b="0" i="0" dirty="0" err="1" smtClean="0">
+              <a:rPr lang="en-US" sz="2600" b="0" i="0" dirty="0" err="1">
                 <a:solidFill>
                   <a:srgbClr val="C55A11"/>
                 </a:solidFill>
@@ -14766,7 +14778,7 @@
               <a:t> </a:t>
             </a:r>
             <a:r>
-              <a:rPr sz="2600" b="0" i="0" dirty="0" err="1" smtClean="0">
+              <a:rPr sz="2600" b="0" i="0" dirty="0" err="1">
                 <a:solidFill>
                   <a:srgbClr val="C55A11"/>
                 </a:solidFill>
@@ -14938,7 +14950,7 @@
               <a:t> </a:t>
             </a:r>
             <a:r>
-              <a:rPr sz="3000" b="1" i="0" dirty="0" err="1" smtClean="0">
+              <a:rPr sz="3000" b="1" i="0" dirty="0" err="1">
                 <a:solidFill>
                   <a:srgbClr val="C55A11"/>
                 </a:solidFill>
@@ -15110,7 +15122,7 @@
               <a:t> </a:t>
             </a:r>
             <a:r>
-              <a:rPr sz="2600" b="0" i="0" dirty="0" err="1" smtClean="0">
+              <a:rPr sz="2600" b="0" i="0" dirty="0" err="1">
                 <a:solidFill>
                   <a:srgbClr val="C55A11"/>
                 </a:solidFill>
@@ -16204,9 +16216,27 @@
                 <a:tableStyleId>{5C22544A-7EE6-4342-B048-85BDC9FD1C3A}</a:tableStyleId>
               </a:tblPr>
               <a:tblGrid>
-                <a:gridCol w="1874519"/>
-                <a:gridCol w="2030729"/>
-                <a:gridCol w="3592829"/>
+                <a:gridCol w="1874519">
+                  <a:extLst>
+                    <a:ext uri="{9D8B030D-6E8A-4147-A177-3AD203B41FA5}">
+                      <a16:colId xmlns:a16="http://schemas.microsoft.com/office/drawing/2014/main" val="20000"/>
+                    </a:ext>
+                  </a:extLst>
+                </a:gridCol>
+                <a:gridCol w="2030729">
+                  <a:extLst>
+                    <a:ext uri="{9D8B030D-6E8A-4147-A177-3AD203B41FA5}">
+                      <a16:colId xmlns:a16="http://schemas.microsoft.com/office/drawing/2014/main" val="20001"/>
+                    </a:ext>
+                  </a:extLst>
+                </a:gridCol>
+                <a:gridCol w="3592829">
+                  <a:extLst>
+                    <a:ext uri="{9D8B030D-6E8A-4147-A177-3AD203B41FA5}">
+                      <a16:colId xmlns:a16="http://schemas.microsoft.com/office/drawing/2014/main" val="20002"/>
+                    </a:ext>
+                  </a:extLst>
+                </a:gridCol>
               </a:tblGrid>
               <a:tr h="365760">
                 <a:tc>
@@ -16281,6 +16311,11 @@
                     </a:solidFill>
                   </a:tcPr>
                 </a:tc>
+                <a:extLst>
+                  <a:ext uri="{0D108BD9-81ED-4DB2-BD59-A6C34878D82A}">
+                    <a16:rowId xmlns:a16="http://schemas.microsoft.com/office/drawing/2014/main" val="10000"/>
+                  </a:ext>
+                </a:extLst>
               </a:tr>
               <a:tr h="365760">
                 <a:tc>
@@ -16349,6 +16384,11 @@
                     </a:solidFill>
                   </a:tcPr>
                 </a:tc>
+                <a:extLst>
+                  <a:ext uri="{0D108BD9-81ED-4DB2-BD59-A6C34878D82A}">
+                    <a16:rowId xmlns:a16="http://schemas.microsoft.com/office/drawing/2014/main" val="10001"/>
+                  </a:ext>
+                </a:extLst>
               </a:tr>
               <a:tr h="365760">
                 <a:tc>
@@ -16417,6 +16457,11 @@
                     </a:solidFill>
                   </a:tcPr>
                 </a:tc>
+                <a:extLst>
+                  <a:ext uri="{0D108BD9-81ED-4DB2-BD59-A6C34878D82A}">
+                    <a16:rowId xmlns:a16="http://schemas.microsoft.com/office/drawing/2014/main" val="10002"/>
+                  </a:ext>
+                </a:extLst>
               </a:tr>
               <a:tr h="365760">
                 <a:tc>
@@ -16485,6 +16530,11 @@
                     </a:solidFill>
                   </a:tcPr>
                 </a:tc>
+                <a:extLst>
+                  <a:ext uri="{0D108BD9-81ED-4DB2-BD59-A6C34878D82A}">
+                    <a16:rowId xmlns:a16="http://schemas.microsoft.com/office/drawing/2014/main" val="10003"/>
+                  </a:ext>
+                </a:extLst>
               </a:tr>
               <a:tr h="365760">
                 <a:tc>
@@ -16553,6 +16603,11 @@
                     </a:solidFill>
                   </a:tcPr>
                 </a:tc>
+                <a:extLst>
+                  <a:ext uri="{0D108BD9-81ED-4DB2-BD59-A6C34878D82A}">
+                    <a16:rowId xmlns:a16="http://schemas.microsoft.com/office/drawing/2014/main" val="10004"/>
+                  </a:ext>
+                </a:extLst>
               </a:tr>
               <a:tr h="365760">
                 <a:tc>
@@ -16675,6 +16730,11 @@
                     </a:solidFill>
                   </a:tcPr>
                 </a:tc>
+                <a:extLst>
+                  <a:ext uri="{0D108BD9-81ED-4DB2-BD59-A6C34878D82A}">
+                    <a16:rowId xmlns:a16="http://schemas.microsoft.com/office/drawing/2014/main" val="10005"/>
+                  </a:ext>
+                </a:extLst>
               </a:tr>
             </a:tbl>
           </a:graphicData>
@@ -16940,8 +17000,20 @@
                 <a:tableStyleId>{5C22544A-7EE6-4342-B048-85BDC9FD1C3A}</a:tableStyleId>
               </a:tblPr>
               <a:tblGrid>
-                <a:gridCol w="3119196"/>
-                <a:gridCol w="5117910"/>
+                <a:gridCol w="3119196">
+                  <a:extLst>
+                    <a:ext uri="{9D8B030D-6E8A-4147-A177-3AD203B41FA5}">
+                      <a16:colId xmlns:a16="http://schemas.microsoft.com/office/drawing/2014/main" val="20000"/>
+                    </a:ext>
+                  </a:extLst>
+                </a:gridCol>
+                <a:gridCol w="5117910">
+                  <a:extLst>
+                    <a:ext uri="{9D8B030D-6E8A-4147-A177-3AD203B41FA5}">
+                      <a16:colId xmlns:a16="http://schemas.microsoft.com/office/drawing/2014/main" val="20001"/>
+                    </a:ext>
+                  </a:extLst>
+                </a:gridCol>
               </a:tblGrid>
               <a:tr h="457200">
                 <a:tc>
@@ -16994,6 +17066,11 @@
                     </a:solidFill>
                   </a:tcPr>
                 </a:tc>
+                <a:extLst>
+                  <a:ext uri="{0D108BD9-81ED-4DB2-BD59-A6C34878D82A}">
+                    <a16:rowId xmlns:a16="http://schemas.microsoft.com/office/drawing/2014/main" val="10000"/>
+                  </a:ext>
+                </a:extLst>
               </a:tr>
               <a:tr h="457200">
                 <a:tc>
@@ -17040,6 +17117,11 @@
                     </a:solidFill>
                   </a:tcPr>
                 </a:tc>
+                <a:extLst>
+                  <a:ext uri="{0D108BD9-81ED-4DB2-BD59-A6C34878D82A}">
+                    <a16:rowId xmlns:a16="http://schemas.microsoft.com/office/drawing/2014/main" val="10001"/>
+                  </a:ext>
+                </a:extLst>
               </a:tr>
               <a:tr h="457200">
                 <a:tc>
@@ -17104,6 +17186,11 @@
                     </a:solidFill>
                   </a:tcPr>
                 </a:tc>
+                <a:extLst>
+                  <a:ext uri="{0D108BD9-81ED-4DB2-BD59-A6C34878D82A}">
+                    <a16:rowId xmlns:a16="http://schemas.microsoft.com/office/drawing/2014/main" val="10002"/>
+                  </a:ext>
+                </a:extLst>
               </a:tr>
               <a:tr h="457200">
                 <a:tc>
@@ -17150,6 +17237,11 @@
                     </a:solidFill>
                   </a:tcPr>
                 </a:tc>
+                <a:extLst>
+                  <a:ext uri="{0D108BD9-81ED-4DB2-BD59-A6C34878D82A}">
+                    <a16:rowId xmlns:a16="http://schemas.microsoft.com/office/drawing/2014/main" val="10003"/>
+                  </a:ext>
+                </a:extLst>
               </a:tr>
               <a:tr h="457200">
                 <a:tc>
@@ -17196,6 +17288,11 @@
                     </a:solidFill>
                   </a:tcPr>
                 </a:tc>
+                <a:extLst>
+                  <a:ext uri="{0D108BD9-81ED-4DB2-BD59-A6C34878D82A}">
+                    <a16:rowId xmlns:a16="http://schemas.microsoft.com/office/drawing/2014/main" val="10004"/>
+                  </a:ext>
+                </a:extLst>
               </a:tr>
               <a:tr h="457200">
                 <a:tc>
@@ -17242,6 +17339,11 @@
                     </a:solidFill>
                   </a:tcPr>
                 </a:tc>
+                <a:extLst>
+                  <a:ext uri="{0D108BD9-81ED-4DB2-BD59-A6C34878D82A}">
+                    <a16:rowId xmlns:a16="http://schemas.microsoft.com/office/drawing/2014/main" val="10005"/>
+                  </a:ext>
+                </a:extLst>
               </a:tr>
             </a:tbl>
           </a:graphicData>
@@ -17308,19 +17410,10 @@
                 </a:solidFill>
                 <a:latin typeface="Times New Roman"/>
               </a:rPr>
-              <a:t>: 7 </a:t>
-            </a:r>
-            <a:r>
-              <a:rPr sz="1400" b="0" i="0" dirty="0" smtClean="0">
-                <a:solidFill>
-                  <a:srgbClr val="262626"/>
-                </a:solidFill>
-                <a:latin typeface="Times New Roman"/>
-              </a:rPr>
-              <a:t>test</a:t>
-            </a:r>
-            <a:r>
-              <a:rPr lang="en-US" sz="1400" b="0" i="0" dirty="0" smtClean="0">
+              <a:t>: 7 test</a:t>
+            </a:r>
+            <a:r>
+              <a:rPr lang="en-US" sz="1400" b="0" i="0" dirty="0">
                 <a:solidFill>
                   <a:srgbClr val="262626"/>
                 </a:solidFill>
@@ -17329,7 +17422,7 @@
               <a:t>,</a:t>
             </a:r>
             <a:r>
-              <a:rPr sz="1400" b="0" i="0" dirty="0" smtClean="0">
+              <a:rPr sz="1400" b="0" i="0" dirty="0">
                 <a:solidFill>
                   <a:srgbClr val="262626"/>
                 </a:solidFill>
@@ -18317,7 +18410,7 @@
               </a:spcAft>
             </a:pPr>
             <a:r>
-              <a:rPr sz="1300" b="0" i="1" dirty="0" err="1" smtClean="0">
+              <a:rPr sz="1300" b="0" i="1" dirty="0" err="1">
                 <a:solidFill>
                   <a:srgbClr val="595959"/>
                 </a:solidFill>
@@ -18326,7 +18419,7 @@
               <a:t>Vì</a:t>
             </a:r>
             <a:r>
-              <a:rPr sz="1300" b="0" i="1" dirty="0" smtClean="0">
+              <a:rPr sz="1300" b="0" i="1" dirty="0">
                 <a:solidFill>
                   <a:srgbClr val="595959"/>
                 </a:solidFill>
@@ -18503,9 +18596,27 @@
                 <a:tableStyleId>{5C22544A-7EE6-4342-B048-85BDC9FD1C3A}</a:tableStyleId>
               </a:tblPr>
               <a:tblGrid>
-                <a:gridCol w="1877250"/>
-                <a:gridCol w="4176214"/>
-                <a:gridCol w="4674359"/>
+                <a:gridCol w="1877250">
+                  <a:extLst>
+                    <a:ext uri="{9D8B030D-6E8A-4147-A177-3AD203B41FA5}">
+                      <a16:colId xmlns:a16="http://schemas.microsoft.com/office/drawing/2014/main" val="20000"/>
+                    </a:ext>
+                  </a:extLst>
+                </a:gridCol>
+                <a:gridCol w="4176214">
+                  <a:extLst>
+                    <a:ext uri="{9D8B030D-6E8A-4147-A177-3AD203B41FA5}">
+                      <a16:colId xmlns:a16="http://schemas.microsoft.com/office/drawing/2014/main" val="20001"/>
+                    </a:ext>
+                  </a:extLst>
+                </a:gridCol>
+                <a:gridCol w="4674359">
+                  <a:extLst>
+                    <a:ext uri="{9D8B030D-6E8A-4147-A177-3AD203B41FA5}">
+                      <a16:colId xmlns:a16="http://schemas.microsoft.com/office/drawing/2014/main" val="20002"/>
+                    </a:ext>
+                  </a:extLst>
+                </a:gridCol>
               </a:tblGrid>
               <a:tr h="566928">
                 <a:tc>
@@ -18652,6 +18763,11 @@
                     </a:solidFill>
                   </a:tcPr>
                 </a:tc>
+                <a:extLst>
+                  <a:ext uri="{0D108BD9-81ED-4DB2-BD59-A6C34878D82A}">
+                    <a16:rowId xmlns:a16="http://schemas.microsoft.com/office/drawing/2014/main" val="10000"/>
+                  </a:ext>
+                </a:extLst>
               </a:tr>
               <a:tr h="566928">
                 <a:tc>
@@ -18729,6 +18845,11 @@
                     </a:solidFill>
                   </a:tcPr>
                 </a:tc>
+                <a:extLst>
+                  <a:ext uri="{0D108BD9-81ED-4DB2-BD59-A6C34878D82A}">
+                    <a16:rowId xmlns:a16="http://schemas.microsoft.com/office/drawing/2014/main" val="10001"/>
+                  </a:ext>
+                </a:extLst>
               </a:tr>
               <a:tr h="566928">
                 <a:tc>
@@ -18896,6 +19017,11 @@
                     </a:solidFill>
                   </a:tcPr>
                 </a:tc>
+                <a:extLst>
+                  <a:ext uri="{0D108BD9-81ED-4DB2-BD59-A6C34878D82A}">
+                    <a16:rowId xmlns:a16="http://schemas.microsoft.com/office/drawing/2014/main" val="10002"/>
+                  </a:ext>
+                </a:extLst>
               </a:tr>
             </a:tbl>
           </a:graphicData>
@@ -19617,7 +19743,7 @@
           <a:p>
             <a:pPr algn="ctr"/>
             <a:r>
-              <a:rPr sz="1300" b="1" i="0" dirty="0" err="1" smtClean="0">
+              <a:rPr sz="1300" b="1" i="0" dirty="0" err="1">
                 <a:solidFill>
                   <a:srgbClr val="FFFFFF"/>
                 </a:solidFill>
@@ -19885,7 +20011,7 @@
               </a:spcAft>
             </a:pPr>
             <a:r>
-              <a:rPr sz="1300" b="0" i="1" dirty="0" smtClean="0">
+              <a:rPr sz="1300" b="0" i="1" dirty="0">
                 <a:solidFill>
                   <a:srgbClr val="595959"/>
                 </a:solidFill>
@@ -19987,9 +20113,27 @@
                 <a:tableStyleId>{5C22544A-7EE6-4342-B048-85BDC9FD1C3A}</a:tableStyleId>
               </a:tblPr>
               <a:tblGrid>
-                <a:gridCol w="1729945"/>
-                <a:gridCol w="1977081"/>
-                <a:gridCol w="864972"/>
+                <a:gridCol w="1729945">
+                  <a:extLst>
+                    <a:ext uri="{9D8B030D-6E8A-4147-A177-3AD203B41FA5}">
+                      <a16:colId xmlns:a16="http://schemas.microsoft.com/office/drawing/2014/main" val="20000"/>
+                    </a:ext>
+                  </a:extLst>
+                </a:gridCol>
+                <a:gridCol w="1977081">
+                  <a:extLst>
+                    <a:ext uri="{9D8B030D-6E8A-4147-A177-3AD203B41FA5}">
+                      <a16:colId xmlns:a16="http://schemas.microsoft.com/office/drawing/2014/main" val="20001"/>
+                    </a:ext>
+                  </a:extLst>
+                </a:gridCol>
+                <a:gridCol w="864972">
+                  <a:extLst>
+                    <a:ext uri="{9D8B030D-6E8A-4147-A177-3AD203B41FA5}">
+                      <a16:colId xmlns:a16="http://schemas.microsoft.com/office/drawing/2014/main" val="20002"/>
+                    </a:ext>
+                  </a:extLst>
+                </a:gridCol>
               </a:tblGrid>
               <a:tr h="411480">
                 <a:tc>
@@ -20058,6 +20202,11 @@
                     </a:solidFill>
                   </a:tcPr>
                 </a:tc>
+                <a:extLst>
+                  <a:ext uri="{0D108BD9-81ED-4DB2-BD59-A6C34878D82A}">
+                    <a16:rowId xmlns:a16="http://schemas.microsoft.com/office/drawing/2014/main" val="10000"/>
+                  </a:ext>
+                </a:extLst>
               </a:tr>
               <a:tr h="411480">
                 <a:tc>
@@ -20126,6 +20275,11 @@
                     </a:solidFill>
                   </a:tcPr>
                 </a:tc>
+                <a:extLst>
+                  <a:ext uri="{0D108BD9-81ED-4DB2-BD59-A6C34878D82A}">
+                    <a16:rowId xmlns:a16="http://schemas.microsoft.com/office/drawing/2014/main" val="10001"/>
+                  </a:ext>
+                </a:extLst>
               </a:tr>
               <a:tr h="411480">
                 <a:tc>
@@ -20194,6 +20348,11 @@
                     </a:solidFill>
                   </a:tcPr>
                 </a:tc>
+                <a:extLst>
+                  <a:ext uri="{0D108BD9-81ED-4DB2-BD59-A6C34878D82A}">
+                    <a16:rowId xmlns:a16="http://schemas.microsoft.com/office/drawing/2014/main" val="10002"/>
+                  </a:ext>
+                </a:extLst>
               </a:tr>
               <a:tr h="411480">
                 <a:tc>
@@ -20262,6 +20421,11 @@
                     </a:solidFill>
                   </a:tcPr>
                 </a:tc>
+                <a:extLst>
+                  <a:ext uri="{0D108BD9-81ED-4DB2-BD59-A6C34878D82A}">
+                    <a16:rowId xmlns:a16="http://schemas.microsoft.com/office/drawing/2014/main" val="10003"/>
+                  </a:ext>
+                </a:extLst>
               </a:tr>
               <a:tr h="411480">
                 <a:tc>
@@ -20330,6 +20494,11 @@
                     </a:solidFill>
                   </a:tcPr>
                 </a:tc>
+                <a:extLst>
+                  <a:ext uri="{0D108BD9-81ED-4DB2-BD59-A6C34878D82A}">
+                    <a16:rowId xmlns:a16="http://schemas.microsoft.com/office/drawing/2014/main" val="10004"/>
+                  </a:ext>
+                </a:extLst>
               </a:tr>
               <a:tr h="411480">
                 <a:tc>
@@ -20398,6 +20567,11 @@
                     </a:solidFill>
                   </a:tcPr>
                 </a:tc>
+                <a:extLst>
+                  <a:ext uri="{0D108BD9-81ED-4DB2-BD59-A6C34878D82A}">
+                    <a16:rowId xmlns:a16="http://schemas.microsoft.com/office/drawing/2014/main" val="10005"/>
+                  </a:ext>
+                </a:extLst>
               </a:tr>
             </a:tbl>
           </a:graphicData>
@@ -20801,7 +20975,7 @@
               </a:spcAft>
             </a:pPr>
             <a:r>
-              <a:rPr sz="1600" b="0" i="0" dirty="0" smtClean="0">
+              <a:rPr sz="1600" b="0" i="0" dirty="0">
                 <a:solidFill>
                   <a:srgbClr val="262626"/>
                 </a:solidFill>
@@ -21552,23 +21726,8 @@
                 </a:solidFill>
                 <a:latin typeface="Times New Roman"/>
               </a:rPr>
-              <a:t> (2026-09-29</a:t>
-            </a:r>
-            <a:r>
-              <a:rPr sz="1600" b="0" i="0" dirty="0" smtClean="0">
-                <a:solidFill>
-                  <a:srgbClr val="262626"/>
-                </a:solidFill>
-                <a:latin typeface="Times New Roman"/>
-              </a:rPr>
-              <a:t>).</a:t>
-            </a:r>
-            <a:endParaRPr sz="1600" b="0" i="0" dirty="0">
-              <a:solidFill>
-                <a:srgbClr val="262626"/>
-              </a:solidFill>
-              <a:latin typeface="Times New Roman"/>
-            </a:endParaRPr>
+              <a:t> (2026-09-29).</a:t>
+            </a:r>
           </a:p>
         </p:txBody>
       </p:sp>
@@ -22090,9 +22249,27 @@
                 <a:tableStyleId>{5C22544A-7EE6-4342-B048-85BDC9FD1C3A}</a:tableStyleId>
               </a:tblPr>
               <a:tblGrid>
-                <a:gridCol w="2159540"/>
-                <a:gridCol w="3743203"/>
-                <a:gridCol w="863816"/>
+                <a:gridCol w="2159540">
+                  <a:extLst>
+                    <a:ext uri="{9D8B030D-6E8A-4147-A177-3AD203B41FA5}">
+                      <a16:colId xmlns:a16="http://schemas.microsoft.com/office/drawing/2014/main" val="20000"/>
+                    </a:ext>
+                  </a:extLst>
+                </a:gridCol>
+                <a:gridCol w="3743203">
+                  <a:extLst>
+                    <a:ext uri="{9D8B030D-6E8A-4147-A177-3AD203B41FA5}">
+                      <a16:colId xmlns:a16="http://schemas.microsoft.com/office/drawing/2014/main" val="20001"/>
+                    </a:ext>
+                  </a:extLst>
+                </a:gridCol>
+                <a:gridCol w="863816">
+                  <a:extLst>
+                    <a:ext uri="{9D8B030D-6E8A-4147-A177-3AD203B41FA5}">
+                      <a16:colId xmlns:a16="http://schemas.microsoft.com/office/drawing/2014/main" val="20002"/>
+                    </a:ext>
+                  </a:extLst>
+                </a:gridCol>
               </a:tblGrid>
               <a:tr h="365760">
                 <a:tc>
@@ -22167,6 +22344,11 @@
                     </a:solidFill>
                   </a:tcPr>
                 </a:tc>
+                <a:extLst>
+                  <a:ext uri="{0D108BD9-81ED-4DB2-BD59-A6C34878D82A}">
+                    <a16:rowId xmlns:a16="http://schemas.microsoft.com/office/drawing/2014/main" val="10000"/>
+                  </a:ext>
+                </a:extLst>
               </a:tr>
               <a:tr h="365760">
                 <a:tc>
@@ -22233,7 +22415,7 @@
                         <a:t> </a:t>
                       </a:r>
                       <a:r>
-                        <a:rPr lang="en-US" sz="1200" b="0" i="0" dirty="0" smtClean="0">
+                        <a:rPr lang="en-US" sz="1200" b="0" i="0" dirty="0">
                           <a:solidFill>
                             <a:srgbClr val="262626"/>
                           </a:solidFill>
@@ -22242,7 +22424,7 @@
                         <a:t>,</a:t>
                       </a:r>
                       <a:r>
-                        <a:rPr sz="1200" b="0" i="0" dirty="0" smtClean="0">
+                        <a:rPr sz="1200" b="0" i="0" dirty="0">
                           <a:solidFill>
                             <a:srgbClr val="262626"/>
                           </a:solidFill>
@@ -22367,6 +22549,11 @@
                     </a:solidFill>
                   </a:tcPr>
                 </a:tc>
+                <a:extLst>
+                  <a:ext uri="{0D108BD9-81ED-4DB2-BD59-A6C34878D82A}">
+                    <a16:rowId xmlns:a16="http://schemas.microsoft.com/office/drawing/2014/main" val="10001"/>
+                  </a:ext>
+                </a:extLst>
               </a:tr>
               <a:tr h="365760">
                 <a:tc>
@@ -22435,6 +22622,11 @@
                     </a:solidFill>
                   </a:tcPr>
                 </a:tc>
+                <a:extLst>
+                  <a:ext uri="{0D108BD9-81ED-4DB2-BD59-A6C34878D82A}">
+                    <a16:rowId xmlns:a16="http://schemas.microsoft.com/office/drawing/2014/main" val="10002"/>
+                  </a:ext>
+                </a:extLst>
               </a:tr>
               <a:tr h="365760">
                 <a:tc>
@@ -22503,6 +22695,11 @@
                     </a:solidFill>
                   </a:tcPr>
                 </a:tc>
+                <a:extLst>
+                  <a:ext uri="{0D108BD9-81ED-4DB2-BD59-A6C34878D82A}">
+                    <a16:rowId xmlns:a16="http://schemas.microsoft.com/office/drawing/2014/main" val="10003"/>
+                  </a:ext>
+                </a:extLst>
               </a:tr>
               <a:tr h="365760">
                 <a:tc>
@@ -22571,6 +22768,11 @@
                     </a:solidFill>
                   </a:tcPr>
                 </a:tc>
+                <a:extLst>
+                  <a:ext uri="{0D108BD9-81ED-4DB2-BD59-A6C34878D82A}">
+                    <a16:rowId xmlns:a16="http://schemas.microsoft.com/office/drawing/2014/main" val="10004"/>
+                  </a:ext>
+                </a:extLst>
               </a:tr>
               <a:tr h="365760">
                 <a:tc>
@@ -22639,6 +22841,11 @@
                     </a:solidFill>
                   </a:tcPr>
                 </a:tc>
+                <a:extLst>
+                  <a:ext uri="{0D108BD9-81ED-4DB2-BD59-A6C34878D82A}">
+                    <a16:rowId xmlns:a16="http://schemas.microsoft.com/office/drawing/2014/main" val="10005"/>
+                  </a:ext>
+                </a:extLst>
               </a:tr>
               <a:tr h="365760">
                 <a:tc>
@@ -22707,6 +22914,11 @@
                     </a:solidFill>
                   </a:tcPr>
                 </a:tc>
+                <a:extLst>
+                  <a:ext uri="{0D108BD9-81ED-4DB2-BD59-A6C34878D82A}">
+                    <a16:rowId xmlns:a16="http://schemas.microsoft.com/office/drawing/2014/main" val="10006"/>
+                  </a:ext>
+                </a:extLst>
               </a:tr>
               <a:tr h="365760">
                 <a:tc>
@@ -22775,6 +22987,11 @@
                     </a:solidFill>
                   </a:tcPr>
                 </a:tc>
+                <a:extLst>
+                  <a:ext uri="{0D108BD9-81ED-4DB2-BD59-A6C34878D82A}">
+                    <a16:rowId xmlns:a16="http://schemas.microsoft.com/office/drawing/2014/main" val="10007"/>
+                  </a:ext>
+                </a:extLst>
               </a:tr>
             </a:tbl>
           </a:graphicData>
@@ -23348,7 +23565,7 @@
               <a:t> </a:t>
             </a:r>
             <a:r>
-              <a:rPr sz="1300" b="0" i="0" dirty="0" err="1" smtClean="0">
+              <a:rPr sz="1300" b="0" i="0" dirty="0" err="1">
                 <a:solidFill>
                   <a:srgbClr val="262626"/>
                 </a:solidFill>
@@ -23366,7 +23583,7 @@
               <a:t>,</a:t>
             </a:r>
             <a:r>
-              <a:rPr sz="1300" b="0" i="0" dirty="0" smtClean="0">
+              <a:rPr sz="1300" b="0" i="0" dirty="0">
                 <a:solidFill>
                   <a:srgbClr val="262626"/>
                 </a:solidFill>
@@ -23510,7 +23727,7 @@
               <a:t>lô</a:t>
             </a:r>
             <a:r>
-              <a:rPr sz="1300" b="0" i="0" dirty="0" smtClean="0">
+              <a:rPr sz="1300" b="0" i="0" dirty="0">
                 <a:solidFill>
                   <a:srgbClr val="262626"/>
                 </a:solidFill>
@@ -23518,12 +23735,6 @@
               </a:rPr>
               <a:t>.</a:t>
             </a:r>
-            <a:endParaRPr sz="1300" b="0" i="0" dirty="0">
-              <a:solidFill>
-                <a:srgbClr val="262626"/>
-              </a:solidFill>
-              <a:latin typeface="Times New Roman"/>
-            </a:endParaRPr>
           </a:p>
         </p:txBody>
       </p:sp>
@@ -23736,7 +23947,7 @@
               <a:t> </a:t>
             </a:r>
             <a:r>
-              <a:rPr sz="2000" b="1" i="0" dirty="0" err="1" smtClean="0">
+              <a:rPr sz="2000" b="1" i="0" dirty="0" err="1">
                 <a:solidFill>
                   <a:srgbClr val="0070C0"/>
                 </a:solidFill>
@@ -23805,7 +24016,7 @@
               </a:spcAft>
             </a:pPr>
             <a:r>
-              <a:rPr sz="1300" b="0" i="1" dirty="0" err="1" smtClean="0">
+              <a:rPr sz="1300" b="0" i="1" dirty="0" err="1">
                 <a:solidFill>
                   <a:srgbClr val="595959"/>
                 </a:solidFill>
@@ -23814,7 +24025,7 @@
               <a:t>Tỷ</a:t>
             </a:r>
             <a:r>
-              <a:rPr sz="1300" b="0" i="1" dirty="0" smtClean="0">
+              <a:rPr sz="1300" b="0" i="1" dirty="0">
                 <a:solidFill>
                   <a:srgbClr val="595959"/>
                 </a:solidFill>
@@ -23925,7 +24136,7 @@
               </a:spcAft>
             </a:pPr>
             <a:r>
-              <a:rPr sz="1300" b="0" i="1" dirty="0" err="1" smtClean="0">
+              <a:rPr sz="1300" b="0" i="1" dirty="0" err="1">
                 <a:solidFill>
                   <a:srgbClr val="595959"/>
                 </a:solidFill>
@@ -23934,22 +24145,13 @@
               <a:t>Cùng</a:t>
             </a:r>
             <a:r>
-              <a:rPr sz="1300" b="0" i="1" dirty="0" smtClean="0">
+              <a:rPr sz="1300" b="0" i="1" dirty="0">
                 <a:solidFill>
                   <a:srgbClr val="595959"/>
                 </a:solidFill>
                 <a:latin typeface="Times New Roman"/>
               </a:rPr>
-              <a:t> </a:t>
-            </a:r>
-            <a:r>
-              <a:rPr sz="1300" b="0" i="1" dirty="0">
-                <a:solidFill>
-                  <a:srgbClr val="595959"/>
-                </a:solidFill>
-                <a:latin typeface="Times New Roman"/>
-              </a:rPr>
-              <a:t>20 </a:t>
+              <a:t> 20 </a:t>
             </a:r>
             <a:r>
               <a:rPr sz="1300" b="0" i="1" dirty="0" err="1">
@@ -24045,9 +24247,27 @@
                 <a:tableStyleId>{5C22544A-7EE6-4342-B048-85BDC9FD1C3A}</a:tableStyleId>
               </a:tblPr>
               <a:tblGrid>
-                <a:gridCol w="1686697"/>
-                <a:gridCol w="1236911"/>
-                <a:gridCol w="1236911"/>
+                <a:gridCol w="1686697">
+                  <a:extLst>
+                    <a:ext uri="{9D8B030D-6E8A-4147-A177-3AD203B41FA5}">
+                      <a16:colId xmlns:a16="http://schemas.microsoft.com/office/drawing/2014/main" val="20000"/>
+                    </a:ext>
+                  </a:extLst>
+                </a:gridCol>
+                <a:gridCol w="1236911">
+                  <a:extLst>
+                    <a:ext uri="{9D8B030D-6E8A-4147-A177-3AD203B41FA5}">
+                      <a16:colId xmlns:a16="http://schemas.microsoft.com/office/drawing/2014/main" val="20001"/>
+                    </a:ext>
+                  </a:extLst>
+                </a:gridCol>
+                <a:gridCol w="1236911">
+                  <a:extLst>
+                    <a:ext uri="{9D8B030D-6E8A-4147-A177-3AD203B41FA5}">
+                      <a16:colId xmlns:a16="http://schemas.microsoft.com/office/drawing/2014/main" val="20002"/>
+                    </a:ext>
+                  </a:extLst>
+                </a:gridCol>
               </a:tblGrid>
               <a:tr h="411480">
                 <a:tc>
@@ -24108,6 +24328,11 @@
                     </a:solidFill>
                   </a:tcPr>
                 </a:tc>
+                <a:extLst>
+                  <a:ext uri="{0D108BD9-81ED-4DB2-BD59-A6C34878D82A}">
+                    <a16:rowId xmlns:a16="http://schemas.microsoft.com/office/drawing/2014/main" val="10000"/>
+                  </a:ext>
+                </a:extLst>
               </a:tr>
               <a:tr h="411480">
                 <a:tc>
@@ -24176,6 +24401,11 @@
                     </a:solidFill>
                   </a:tcPr>
                 </a:tc>
+                <a:extLst>
+                  <a:ext uri="{0D108BD9-81ED-4DB2-BD59-A6C34878D82A}">
+                    <a16:rowId xmlns:a16="http://schemas.microsoft.com/office/drawing/2014/main" val="10001"/>
+                  </a:ext>
+                </a:extLst>
               </a:tr>
               <a:tr h="411480">
                 <a:tc>
@@ -24244,6 +24474,11 @@
                     </a:solidFill>
                   </a:tcPr>
                 </a:tc>
+                <a:extLst>
+                  <a:ext uri="{0D108BD9-81ED-4DB2-BD59-A6C34878D82A}">
+                    <a16:rowId xmlns:a16="http://schemas.microsoft.com/office/drawing/2014/main" val="10002"/>
+                  </a:ext>
+                </a:extLst>
               </a:tr>
               <a:tr h="411480">
                 <a:tc>
@@ -24312,6 +24547,11 @@
                     </a:solidFill>
                   </a:tcPr>
                 </a:tc>
+                <a:extLst>
+                  <a:ext uri="{0D108BD9-81ED-4DB2-BD59-A6C34878D82A}">
+                    <a16:rowId xmlns:a16="http://schemas.microsoft.com/office/drawing/2014/main" val="10003"/>
+                  </a:ext>
+                </a:extLst>
               </a:tr>
               <a:tr h="411480">
                 <a:tc>
@@ -24380,6 +24620,11 @@
                     </a:solidFill>
                   </a:tcPr>
                 </a:tc>
+                <a:extLst>
+                  <a:ext uri="{0D108BD9-81ED-4DB2-BD59-A6C34878D82A}">
+                    <a16:rowId xmlns:a16="http://schemas.microsoft.com/office/drawing/2014/main" val="10004"/>
+                  </a:ext>
+                </a:extLst>
               </a:tr>
               <a:tr h="411480">
                 <a:tc>
@@ -24448,6 +24693,11 @@
                     </a:solidFill>
                   </a:tcPr>
                 </a:tc>
+                <a:extLst>
+                  <a:ext uri="{0D108BD9-81ED-4DB2-BD59-A6C34878D82A}">
+                    <a16:rowId xmlns:a16="http://schemas.microsoft.com/office/drawing/2014/main" val="10005"/>
+                  </a:ext>
+                </a:extLst>
               </a:tr>
             </a:tbl>
           </a:graphicData>
@@ -24562,7 +24812,7 @@
               <a:t> SHA-256 </a:t>
             </a:r>
             <a:r>
-              <a:rPr lang="en-US" sz="1300" b="0" i="0" dirty="0" smtClean="0">
+              <a:rPr lang="en-US" sz="1300" b="0" i="0" dirty="0">
                 <a:solidFill>
                   <a:srgbClr val="262626"/>
                 </a:solidFill>
@@ -24571,7 +24821,7 @@
               <a:t>,</a:t>
             </a:r>
             <a:r>
-              <a:rPr sz="1300" b="0" i="0" dirty="0" smtClean="0">
+              <a:rPr sz="1300" b="0" i="0" dirty="0">
                 <a:solidFill>
                   <a:srgbClr val="262626"/>
                 </a:solidFill>
@@ -24811,7 +25061,7 @@
               </a:rPr>
               <a:t> (restate); </a:t>
             </a:r>
-            <a:endParaRPr lang="en-US" sz="1300" b="0" i="0" dirty="0" smtClean="0">
+            <a:endParaRPr lang="en-US" sz="1300" b="0" i="0" dirty="0">
               <a:solidFill>
                 <a:srgbClr val="262626"/>
               </a:solidFill>
@@ -24825,22 +25075,13 @@
               </a:spcAft>
             </a:pPr>
             <a:r>
-              <a:rPr sz="1300" b="0" i="0" dirty="0" smtClean="0">
-                <a:solidFill>
-                  <a:srgbClr val="262626"/>
-                </a:solidFill>
-                <a:latin typeface="Times New Roman"/>
-              </a:rPr>
-              <a:t>--</a:t>
-            </a:r>
-            <a:r>
               <a:rPr sz="1300" b="0" i="0" dirty="0">
                 <a:solidFill>
                   <a:srgbClr val="262626"/>
                 </a:solidFill>
                 <a:latin typeface="Times New Roman"/>
               </a:rPr>
-              <a:t>ref-version </a:t>
+              <a:t>--ref-version </a:t>
             </a:r>
             <a:r>
               <a:rPr sz="1300" b="0" i="0" dirty="0" err="1">
@@ -25304,7 +25545,7 @@
               <a:t> </a:t>
             </a:r>
             <a:r>
-              <a:rPr lang="en-US" sz="2000" b="1" i="0" dirty="0" err="1" smtClean="0">
+              <a:rPr lang="en-US" sz="2000" b="1" i="0" dirty="0" err="1">
                 <a:solidFill>
                   <a:srgbClr val="0070C0"/>
                 </a:solidFill>
@@ -25313,7 +25554,7 @@
               <a:t>cách</a:t>
             </a:r>
             <a:r>
-              <a:rPr sz="2000" b="1" i="0" dirty="0" smtClean="0">
+              <a:rPr sz="2000" b="1" i="0" dirty="0">
                 <a:solidFill>
                   <a:srgbClr val="0070C0"/>
                 </a:solidFill>
@@ -25495,22 +25736,13 @@
               </a:spcAft>
             </a:pPr>
             <a:r>
-              <a:rPr sz="1300" b="0" i="1" dirty="0" smtClean="0">
+              <a:rPr sz="1300" b="0" i="1" dirty="0">
                 <a:solidFill>
                   <a:srgbClr val="595959"/>
                 </a:solidFill>
                 <a:latin typeface="Times New Roman"/>
               </a:rPr>
-              <a:t>Ba </a:t>
-            </a:r>
-            <a:r>
-              <a:rPr sz="1300" b="0" i="1" dirty="0">
-                <a:solidFill>
-                  <a:srgbClr val="595959"/>
-                </a:solidFill>
-                <a:latin typeface="Times New Roman"/>
-              </a:rPr>
-              <a:t>mart </a:t>
+              <a:t>Ba mart </a:t>
             </a:r>
             <a:r>
               <a:rPr sz="1300" b="0" i="1" dirty="0" err="1">
@@ -25588,9 +25820,27 @@
                 <a:tableStyleId>{5C22544A-7EE6-4342-B048-85BDC9FD1C3A}</a:tableStyleId>
               </a:tblPr>
               <a:tblGrid>
-                <a:gridCol w="2146852"/>
-                <a:gridCol w="3578086"/>
-                <a:gridCol w="858740"/>
+                <a:gridCol w="2146852">
+                  <a:extLst>
+                    <a:ext uri="{9D8B030D-6E8A-4147-A177-3AD203B41FA5}">
+                      <a16:colId xmlns:a16="http://schemas.microsoft.com/office/drawing/2014/main" val="20000"/>
+                    </a:ext>
+                  </a:extLst>
+                </a:gridCol>
+                <a:gridCol w="3578086">
+                  <a:extLst>
+                    <a:ext uri="{9D8B030D-6E8A-4147-A177-3AD203B41FA5}">
+                      <a16:colId xmlns:a16="http://schemas.microsoft.com/office/drawing/2014/main" val="20001"/>
+                    </a:ext>
+                  </a:extLst>
+                </a:gridCol>
+                <a:gridCol w="858740">
+                  <a:extLst>
+                    <a:ext uri="{9D8B030D-6E8A-4147-A177-3AD203B41FA5}">
+                      <a16:colId xmlns:a16="http://schemas.microsoft.com/office/drawing/2014/main" val="20002"/>
+                    </a:ext>
+                  </a:extLst>
+                </a:gridCol>
               </a:tblGrid>
               <a:tr h="411480">
                 <a:tc>
@@ -25659,6 +25909,11 @@
                     </a:solidFill>
                   </a:tcPr>
                 </a:tc>
+                <a:extLst>
+                  <a:ext uri="{0D108BD9-81ED-4DB2-BD59-A6C34878D82A}">
+                    <a16:rowId xmlns:a16="http://schemas.microsoft.com/office/drawing/2014/main" val="10000"/>
+                  </a:ext>
+                </a:extLst>
               </a:tr>
               <a:tr h="411480">
                 <a:tc>
@@ -25727,6 +25982,11 @@
                     </a:solidFill>
                   </a:tcPr>
                 </a:tc>
+                <a:extLst>
+                  <a:ext uri="{0D108BD9-81ED-4DB2-BD59-A6C34878D82A}">
+                    <a16:rowId xmlns:a16="http://schemas.microsoft.com/office/drawing/2014/main" val="10001"/>
+                  </a:ext>
+                </a:extLst>
               </a:tr>
               <a:tr h="411480">
                 <a:tc>
@@ -25795,6 +26055,11 @@
                     </a:solidFill>
                   </a:tcPr>
                 </a:tc>
+                <a:extLst>
+                  <a:ext uri="{0D108BD9-81ED-4DB2-BD59-A6C34878D82A}">
+                    <a16:rowId xmlns:a16="http://schemas.microsoft.com/office/drawing/2014/main" val="10002"/>
+                  </a:ext>
+                </a:extLst>
               </a:tr>
               <a:tr h="411480">
                 <a:tc>
@@ -25863,6 +26128,11 @@
                     </a:solidFill>
                   </a:tcPr>
                 </a:tc>
+                <a:extLst>
+                  <a:ext uri="{0D108BD9-81ED-4DB2-BD59-A6C34878D82A}">
+                    <a16:rowId xmlns:a16="http://schemas.microsoft.com/office/drawing/2014/main" val="10003"/>
+                  </a:ext>
+                </a:extLst>
               </a:tr>
             </a:tbl>
           </a:graphicData>
@@ -26377,7 +26647,7 @@
               <a:t>• ρ: </a:t>
             </a:r>
             <a:r>
-              <a:rPr sz="1300" b="0" i="0" dirty="0" err="1" smtClean="0">
+              <a:rPr sz="1300" b="0" i="0" dirty="0" err="1">
                 <a:solidFill>
                   <a:srgbClr val="595959"/>
                 </a:solidFill>
@@ -26392,19 +26662,10 @@
                 </a:solidFill>
                 <a:latin typeface="Times New Roman"/>
               </a:rPr>
-              <a:t> </a:t>
-            </a:r>
-            <a:r>
-              <a:rPr lang="en-US" sz="1300" dirty="0" smtClean="0">
-                <a:solidFill>
-                  <a:srgbClr val="595959"/>
-                </a:solidFill>
-                <a:latin typeface="Times New Roman"/>
-              </a:rPr>
-              <a:t>~</a:t>
-            </a:r>
-            <a:r>
-              <a:rPr sz="1300" b="0" i="0" dirty="0" smtClean="0">
+              <a:t> ~</a:t>
+            </a:r>
+            <a:r>
+              <a:rPr sz="1300" b="0" i="0" dirty="0">
                 <a:solidFill>
                   <a:srgbClr val="595959"/>
                 </a:solidFill>
@@ -26863,52 +27124,19 @@
           </a:p>
         </p:txBody>
       </p:sp>
-      <p:sp>
-        <p:nvSpPr>
-          <p:cNvPr id="8" name="TextBox 7"/>
-          <p:cNvSpPr txBox="1"/>
-          <p:nvPr/>
-        </p:nvSpPr>
-        <p:spPr>
-          <a:xfrm>
-            <a:off x="320040" y="2624328"/>
-            <a:ext cx="5852160" cy="292608"/>
-          </a:xfrm>
-          <a:prstGeom prst="rect">
-            <a:avLst/>
-          </a:prstGeom>
-          <a:noFill/>
-        </p:spPr>
-        <p:txBody>
-          <a:bodyPr wrap="square" lIns="45720" tIns="27432" rIns="45720" bIns="27432" anchor="t">
-            <a:spAutoFit/>
-          </a:bodyPr>
-          <a:lstStyle/>
-          <a:p>
-            <a:pPr algn="ctr">
-              <a:spcAft>
-                <a:spcPts val="400"/>
-              </a:spcAft>
-            </a:pPr>
-            <a:r>
-              <a:rPr sz="1300" b="0" i="1">
-                <a:solidFill>
-                  <a:srgbClr val="595959"/>
-                </a:solidFill>
-                <a:latin typeface="Times New Roman"/>
-              </a:rPr>
-              <a:t>Bảng 19: Ba quyết định của bảng ML</a:t>
-            </a:r>
-          </a:p>
-        </p:txBody>
-      </p:sp>
       <p:graphicFrame>
         <p:nvGraphicFramePr>
           <p:cNvPr id="9" name="Table 8"/>
           <p:cNvGraphicFramePr>
             <a:graphicFrameLocks noGrp="1"/>
           </p:cNvGraphicFramePr>
-          <p:nvPr/>
+          <p:nvPr>
+            <p:extLst>
+              <p:ext uri="{D42A27DB-BD31-4B8C-83A1-F6EECF244321}">
+                <p14:modId xmlns:p14="http://schemas.microsoft.com/office/powerpoint/2010/main" val="722637635"/>
+              </p:ext>
+            </p:extLst>
+          </p:nvPr>
         </p:nvGraphicFramePr>
         <p:xfrm>
           <a:off x="320040" y="2916936"/>
@@ -26921,8 +27149,20 @@
                 <a:tableStyleId>{5C22544A-7EE6-4342-B048-85BDC9FD1C3A}</a:tableStyleId>
               </a:tblPr>
               <a:tblGrid>
-                <a:gridCol w="1609344"/>
-                <a:gridCol w="4242816"/>
+                <a:gridCol w="1609344">
+                  <a:extLst>
+                    <a:ext uri="{9D8B030D-6E8A-4147-A177-3AD203B41FA5}">
+                      <a16:colId xmlns:a16="http://schemas.microsoft.com/office/drawing/2014/main" val="20000"/>
+                    </a:ext>
+                  </a:extLst>
+                </a:gridCol>
+                <a:gridCol w="4242816">
+                  <a:extLst>
+                    <a:ext uri="{9D8B030D-6E8A-4147-A177-3AD203B41FA5}">
+                      <a16:colId xmlns:a16="http://schemas.microsoft.com/office/drawing/2014/main" val="20001"/>
+                    </a:ext>
+                  </a:extLst>
+                </a:gridCol>
               </a:tblGrid>
               <a:tr h="502920">
                 <a:tc>
@@ -26969,6 +27209,11 @@
                     </a:solidFill>
                   </a:tcPr>
                 </a:tc>
+                <a:extLst>
+                  <a:ext uri="{0D108BD9-81ED-4DB2-BD59-A6C34878D82A}">
+                    <a16:rowId xmlns:a16="http://schemas.microsoft.com/office/drawing/2014/main" val="10000"/>
+                  </a:ext>
+                </a:extLst>
               </a:tr>
               <a:tr h="502920">
                 <a:tc>
@@ -27015,6 +27260,11 @@
                     </a:solidFill>
                   </a:tcPr>
                 </a:tc>
+                <a:extLst>
+                  <a:ext uri="{0D108BD9-81ED-4DB2-BD59-A6C34878D82A}">
+                    <a16:rowId xmlns:a16="http://schemas.microsoft.com/office/drawing/2014/main" val="10001"/>
+                  </a:ext>
+                </a:extLst>
               </a:tr>
               <a:tr h="502920">
                 <a:tc>
@@ -27045,13 +27295,103 @@
                     <a:lstStyle/>
                     <a:p>
                       <a:r>
-                        <a:rPr sz="1200" b="0" i="0">
+                        <a:rPr sz="1200" b="0" i="0" dirty="0">
                           <a:solidFill>
                             <a:srgbClr val="262626"/>
                           </a:solidFill>
                           <a:latin typeface="Times New Roman"/>
                         </a:rPr>
-                        <a:t>Model luôn đoán cho tháng tương lai; chia ngẫu nhiên → “đã thấy tương lai” → điểm test đẹp giả</a:t>
+                        <a:t>Model </a:t>
+                      </a:r>
+                      <a:r>
+                        <a:rPr sz="1200" b="0" i="0" dirty="0" err="1">
+                          <a:solidFill>
+                            <a:srgbClr val="262626"/>
+                          </a:solidFill>
+                          <a:latin typeface="Times New Roman"/>
+                        </a:rPr>
+                        <a:t>luôn</a:t>
+                      </a:r>
+                      <a:r>
+                        <a:rPr sz="1200" b="0" i="0" dirty="0">
+                          <a:solidFill>
+                            <a:srgbClr val="262626"/>
+                          </a:solidFill>
+                          <a:latin typeface="Times New Roman"/>
+                        </a:rPr>
+                        <a:t> </a:t>
+                      </a:r>
+                      <a:r>
+                        <a:rPr sz="1200" b="0" i="0" dirty="0" err="1">
+                          <a:solidFill>
+                            <a:srgbClr val="262626"/>
+                          </a:solidFill>
+                          <a:latin typeface="Times New Roman"/>
+                        </a:rPr>
+                        <a:t>đoán</a:t>
+                      </a:r>
+                      <a:r>
+                        <a:rPr sz="1200" b="0" i="0" dirty="0">
+                          <a:solidFill>
+                            <a:srgbClr val="262626"/>
+                          </a:solidFill>
+                          <a:latin typeface="Times New Roman"/>
+                        </a:rPr>
+                        <a:t> </a:t>
+                      </a:r>
+                      <a:r>
+                        <a:rPr sz="1200" b="0" i="0" dirty="0" err="1">
+                          <a:solidFill>
+                            <a:srgbClr val="262626"/>
+                          </a:solidFill>
+                          <a:latin typeface="Times New Roman"/>
+                        </a:rPr>
+                        <a:t>cho</a:t>
+                      </a:r>
+                      <a:r>
+                        <a:rPr sz="1200" b="0" i="0" dirty="0">
+                          <a:solidFill>
+                            <a:srgbClr val="262626"/>
+                          </a:solidFill>
+                          <a:latin typeface="Times New Roman"/>
+                        </a:rPr>
+                        <a:t> </a:t>
+                      </a:r>
+                      <a:r>
+                        <a:rPr sz="1200" b="0" i="0" dirty="0" err="1">
+                          <a:solidFill>
+                            <a:srgbClr val="262626"/>
+                          </a:solidFill>
+                          <a:latin typeface="Times New Roman"/>
+                        </a:rPr>
+                        <a:t>tháng</a:t>
+                      </a:r>
+                      <a:r>
+                        <a:rPr sz="1200" b="0" i="0" dirty="0">
+                          <a:solidFill>
+                            <a:srgbClr val="262626"/>
+                          </a:solidFill>
+                          <a:latin typeface="Times New Roman"/>
+                        </a:rPr>
+                        <a:t> </a:t>
+                      </a:r>
+                      <a:r>
+                        <a:rPr sz="1200" b="0" i="0" dirty="0" err="1">
+                          <a:solidFill>
+                            <a:srgbClr val="262626"/>
+                          </a:solidFill>
+                          <a:latin typeface="Times New Roman"/>
+                        </a:rPr>
+                        <a:t>tương</a:t>
+                      </a:r>
+                      <a:r>
+                        <a:rPr sz="1200" b="0" i="0" dirty="0">
+                          <a:solidFill>
+                            <a:srgbClr val="262626"/>
+                          </a:solidFill>
+                          <a:latin typeface="Times New Roman"/>
+                        </a:rPr>
+                        <a:t> lai</a:t>
                       </a:r>
                     </a:p>
                   </a:txBody>
@@ -27061,6 +27401,11 @@
                     </a:solidFill>
                   </a:tcPr>
                 </a:tc>
+                <a:extLst>
+                  <a:ext uri="{0D108BD9-81ED-4DB2-BD59-A6C34878D82A}">
+                    <a16:rowId xmlns:a16="http://schemas.microsoft.com/office/drawing/2014/main" val="10002"/>
+                  </a:ext>
+                </a:extLst>
               </a:tr>
               <a:tr h="502920">
                 <a:tc>
@@ -27091,13 +27436,265 @@
                     <a:lstStyle/>
                     <a:p>
                       <a:r>
-                        <a:rPr sz="1200" b="0" i="0">
+                        <a:rPr sz="1200" b="0" i="0" dirty="0">
                           <a:solidFill>
                             <a:srgbClr val="262626"/>
                           </a:solidFill>
                           <a:latin typeface="Times New Roman"/>
                         </a:rPr>
-                        <a:t>Trung vị theo dòng xe tính trên toàn bộ dữ liệu chứa giá của tập test → leakage</a:t>
+                        <a:t>Trung </a:t>
+                      </a:r>
+                      <a:r>
+                        <a:rPr sz="1200" b="0" i="0" dirty="0" err="1">
+                          <a:solidFill>
+                            <a:srgbClr val="262626"/>
+                          </a:solidFill>
+                          <a:latin typeface="Times New Roman"/>
+                        </a:rPr>
+                        <a:t>vị</a:t>
+                      </a:r>
+                      <a:r>
+                        <a:rPr sz="1200" b="0" i="0" dirty="0">
+                          <a:solidFill>
+                            <a:srgbClr val="262626"/>
+                          </a:solidFill>
+                          <a:latin typeface="Times New Roman"/>
+                        </a:rPr>
+                        <a:t> </a:t>
+                      </a:r>
+                      <a:r>
+                        <a:rPr sz="1200" b="0" i="0" dirty="0" err="1">
+                          <a:solidFill>
+                            <a:srgbClr val="262626"/>
+                          </a:solidFill>
+                          <a:latin typeface="Times New Roman"/>
+                        </a:rPr>
+                        <a:t>theo</a:t>
+                      </a:r>
+                      <a:r>
+                        <a:rPr sz="1200" b="0" i="0" dirty="0">
+                          <a:solidFill>
+                            <a:srgbClr val="262626"/>
+                          </a:solidFill>
+                          <a:latin typeface="Times New Roman"/>
+                        </a:rPr>
+                        <a:t> </a:t>
+                      </a:r>
+                      <a:r>
+                        <a:rPr sz="1200" b="0" i="0" dirty="0" err="1">
+                          <a:solidFill>
+                            <a:srgbClr val="262626"/>
+                          </a:solidFill>
+                          <a:latin typeface="Times New Roman"/>
+                        </a:rPr>
+                        <a:t>dòng</a:t>
+                      </a:r>
+                      <a:r>
+                        <a:rPr sz="1200" b="0" i="0" dirty="0">
+                          <a:solidFill>
+                            <a:srgbClr val="262626"/>
+                          </a:solidFill>
+                          <a:latin typeface="Times New Roman"/>
+                        </a:rPr>
+                        <a:t> </a:t>
+                      </a:r>
+                      <a:r>
+                        <a:rPr sz="1200" b="0" i="0" dirty="0" err="1">
+                          <a:solidFill>
+                            <a:srgbClr val="262626"/>
+                          </a:solidFill>
+                          <a:latin typeface="Times New Roman"/>
+                        </a:rPr>
+                        <a:t>xe</a:t>
+                      </a:r>
+                      <a:r>
+                        <a:rPr sz="1200" b="0" i="0" dirty="0">
+                          <a:solidFill>
+                            <a:srgbClr val="262626"/>
+                          </a:solidFill>
+                          <a:latin typeface="Times New Roman"/>
+                        </a:rPr>
+                        <a:t> </a:t>
+                      </a:r>
+                      <a:r>
+                        <a:rPr sz="1200" b="0" i="0" dirty="0" err="1">
+                          <a:solidFill>
+                            <a:srgbClr val="262626"/>
+                          </a:solidFill>
+                          <a:latin typeface="Times New Roman"/>
+                        </a:rPr>
+                        <a:t>tính</a:t>
+                      </a:r>
+                      <a:r>
+                        <a:rPr sz="1200" b="0" i="0" dirty="0">
+                          <a:solidFill>
+                            <a:srgbClr val="262626"/>
+                          </a:solidFill>
+                          <a:latin typeface="Times New Roman"/>
+                        </a:rPr>
+                        <a:t> </a:t>
+                      </a:r>
+                      <a:r>
+                        <a:rPr sz="1200" b="0" i="0" dirty="0" err="1">
+                          <a:solidFill>
+                            <a:srgbClr val="262626"/>
+                          </a:solidFill>
+                          <a:latin typeface="Times New Roman"/>
+                        </a:rPr>
+                        <a:t>trên</a:t>
+                      </a:r>
+                      <a:r>
+                        <a:rPr sz="1200" b="0" i="0" dirty="0">
+                          <a:solidFill>
+                            <a:srgbClr val="262626"/>
+                          </a:solidFill>
+                          <a:latin typeface="Times New Roman"/>
+                        </a:rPr>
+                        <a:t> </a:t>
+                      </a:r>
+                      <a:r>
+                        <a:rPr sz="1200" b="0" i="0" dirty="0" err="1">
+                          <a:solidFill>
+                            <a:srgbClr val="262626"/>
+                          </a:solidFill>
+                          <a:latin typeface="Times New Roman"/>
+                        </a:rPr>
+                        <a:t>toàn</a:t>
+                      </a:r>
+                      <a:r>
+                        <a:rPr sz="1200" b="0" i="0" dirty="0">
+                          <a:solidFill>
+                            <a:srgbClr val="262626"/>
+                          </a:solidFill>
+                          <a:latin typeface="Times New Roman"/>
+                        </a:rPr>
+                        <a:t> </a:t>
+                      </a:r>
+                      <a:r>
+                        <a:rPr sz="1200" b="0" i="0" dirty="0" err="1">
+                          <a:solidFill>
+                            <a:srgbClr val="262626"/>
+                          </a:solidFill>
+                          <a:latin typeface="Times New Roman"/>
+                        </a:rPr>
+                        <a:t>bộ</a:t>
+                      </a:r>
+                      <a:r>
+                        <a:rPr sz="1200" b="0" i="0" dirty="0">
+                          <a:solidFill>
+                            <a:srgbClr val="262626"/>
+                          </a:solidFill>
+                          <a:latin typeface="Times New Roman"/>
+                        </a:rPr>
+                        <a:t> </a:t>
+                      </a:r>
+                      <a:r>
+                        <a:rPr sz="1200" b="0" i="0" dirty="0" err="1">
+                          <a:solidFill>
+                            <a:srgbClr val="262626"/>
+                          </a:solidFill>
+                          <a:latin typeface="Times New Roman"/>
+                        </a:rPr>
+                        <a:t>dữ</a:t>
+                      </a:r>
+                      <a:r>
+                        <a:rPr sz="1200" b="0" i="0" dirty="0">
+                          <a:solidFill>
+                            <a:srgbClr val="262626"/>
+                          </a:solidFill>
+                          <a:latin typeface="Times New Roman"/>
+                        </a:rPr>
+                        <a:t> </a:t>
+                      </a:r>
+                      <a:r>
+                        <a:rPr sz="1200" b="0" i="0" dirty="0" err="1">
+                          <a:solidFill>
+                            <a:srgbClr val="262626"/>
+                          </a:solidFill>
+                          <a:latin typeface="Times New Roman"/>
+                        </a:rPr>
+                        <a:t>liệu</a:t>
+                      </a:r>
+                      <a:r>
+                        <a:rPr sz="1200" b="0" i="0" dirty="0">
+                          <a:solidFill>
+                            <a:srgbClr val="262626"/>
+                          </a:solidFill>
+                          <a:latin typeface="Times New Roman"/>
+                        </a:rPr>
+                        <a:t> </a:t>
+                      </a:r>
+                      <a:r>
+                        <a:rPr sz="1200" b="0" i="0" dirty="0" err="1">
+                          <a:solidFill>
+                            <a:srgbClr val="262626"/>
+                          </a:solidFill>
+                          <a:latin typeface="Times New Roman"/>
+                        </a:rPr>
+                        <a:t>chứa</a:t>
+                      </a:r>
+                      <a:r>
+                        <a:rPr sz="1200" b="0" i="0" dirty="0">
+                          <a:solidFill>
+                            <a:srgbClr val="262626"/>
+                          </a:solidFill>
+                          <a:latin typeface="Times New Roman"/>
+                        </a:rPr>
+                        <a:t> </a:t>
+                      </a:r>
+                      <a:r>
+                        <a:rPr sz="1200" b="0" i="0" dirty="0" err="1">
+                          <a:solidFill>
+                            <a:srgbClr val="262626"/>
+                          </a:solidFill>
+                          <a:latin typeface="Times New Roman"/>
+                        </a:rPr>
+                        <a:t>giá</a:t>
+                      </a:r>
+                      <a:r>
+                        <a:rPr sz="1200" b="0" i="0" dirty="0">
+                          <a:solidFill>
+                            <a:srgbClr val="262626"/>
+                          </a:solidFill>
+                          <a:latin typeface="Times New Roman"/>
+                        </a:rPr>
+                        <a:t> </a:t>
+                      </a:r>
+                      <a:r>
+                        <a:rPr sz="1200" b="0" i="0" dirty="0" err="1">
+                          <a:solidFill>
+                            <a:srgbClr val="262626"/>
+                          </a:solidFill>
+                          <a:latin typeface="Times New Roman"/>
+                        </a:rPr>
+                        <a:t>của</a:t>
+                      </a:r>
+                      <a:r>
+                        <a:rPr sz="1200" b="0" i="0" dirty="0">
+                          <a:solidFill>
+                            <a:srgbClr val="262626"/>
+                          </a:solidFill>
+                          <a:latin typeface="Times New Roman"/>
+                        </a:rPr>
+                        <a:t> </a:t>
+                      </a:r>
+                      <a:r>
+                        <a:rPr sz="1200" b="0" i="0" dirty="0" err="1">
+                          <a:solidFill>
+                            <a:srgbClr val="262626"/>
+                          </a:solidFill>
+                          <a:latin typeface="Times New Roman"/>
+                        </a:rPr>
+                        <a:t>tập</a:t>
+                      </a:r>
+                      <a:r>
+                        <a:rPr sz="1200" b="0" i="0" dirty="0">
+                          <a:solidFill>
+                            <a:srgbClr val="262626"/>
+                          </a:solidFill>
+                          <a:latin typeface="Times New Roman"/>
+                        </a:rPr>
+                        <a:t> test → leakage</a:t>
                       </a:r>
                     </a:p>
                   </a:txBody>
@@ -27107,6 +27704,11 @@
                     </a:solidFill>
                   </a:tcPr>
                 </a:tc>
+                <a:extLst>
+                  <a:ext uri="{0D108BD9-81ED-4DB2-BD59-A6C34878D82A}">
+                    <a16:rowId xmlns:a16="http://schemas.microsoft.com/office/drawing/2014/main" val="10003"/>
+                  </a:ext>
+                </a:extLst>
               </a:tr>
             </a:tbl>
           </a:graphicData>
@@ -27251,11 +27853,41 @@
                 <a:tableStyleId>{5C22544A-7EE6-4342-B048-85BDC9FD1C3A}</a:tableStyleId>
               </a:tblPr>
               <a:tblGrid>
-                <a:gridCol w="731520"/>
-                <a:gridCol w="1950720"/>
-                <a:gridCol w="975360"/>
-                <a:gridCol w="853439"/>
-                <a:gridCol w="975360"/>
+                <a:gridCol w="731520">
+                  <a:extLst>
+                    <a:ext uri="{9D8B030D-6E8A-4147-A177-3AD203B41FA5}">
+                      <a16:colId xmlns:a16="http://schemas.microsoft.com/office/drawing/2014/main" val="20000"/>
+                    </a:ext>
+                  </a:extLst>
+                </a:gridCol>
+                <a:gridCol w="1950720">
+                  <a:extLst>
+                    <a:ext uri="{9D8B030D-6E8A-4147-A177-3AD203B41FA5}">
+                      <a16:colId xmlns:a16="http://schemas.microsoft.com/office/drawing/2014/main" val="20001"/>
+                    </a:ext>
+                  </a:extLst>
+                </a:gridCol>
+                <a:gridCol w="975360">
+                  <a:extLst>
+                    <a:ext uri="{9D8B030D-6E8A-4147-A177-3AD203B41FA5}">
+                      <a16:colId xmlns:a16="http://schemas.microsoft.com/office/drawing/2014/main" val="20002"/>
+                    </a:ext>
+                  </a:extLst>
+                </a:gridCol>
+                <a:gridCol w="853439">
+                  <a:extLst>
+                    <a:ext uri="{9D8B030D-6E8A-4147-A177-3AD203B41FA5}">
+                      <a16:colId xmlns:a16="http://schemas.microsoft.com/office/drawing/2014/main" val="20003"/>
+                    </a:ext>
+                  </a:extLst>
+                </a:gridCol>
+                <a:gridCol w="975360">
+                  <a:extLst>
+                    <a:ext uri="{9D8B030D-6E8A-4147-A177-3AD203B41FA5}">
+                      <a16:colId xmlns:a16="http://schemas.microsoft.com/office/drawing/2014/main" val="20004"/>
+                    </a:ext>
+                  </a:extLst>
+                </a:gridCol>
               </a:tblGrid>
               <a:tr h="329184">
                 <a:tc>
@@ -27360,6 +27992,11 @@
                     </a:solidFill>
                   </a:tcPr>
                 </a:tc>
+                <a:extLst>
+                  <a:ext uri="{0D108BD9-81ED-4DB2-BD59-A6C34878D82A}">
+                    <a16:rowId xmlns:a16="http://schemas.microsoft.com/office/drawing/2014/main" val="10000"/>
+                  </a:ext>
+                </a:extLst>
               </a:tr>
               <a:tr h="329184">
                 <a:tc>
@@ -27472,6 +28109,11 @@
                     </a:solidFill>
                   </a:tcPr>
                 </a:tc>
+                <a:extLst>
+                  <a:ext uri="{0D108BD9-81ED-4DB2-BD59-A6C34878D82A}">
+                    <a16:rowId xmlns:a16="http://schemas.microsoft.com/office/drawing/2014/main" val="10001"/>
+                  </a:ext>
+                </a:extLst>
               </a:tr>
               <a:tr h="329184">
                 <a:tc>
@@ -27584,77 +28226,16 @@
                     </a:solidFill>
                   </a:tcPr>
                 </a:tc>
+                <a:extLst>
+                  <a:ext uri="{0D108BD9-81ED-4DB2-BD59-A6C34878D82A}">
+                    <a16:rowId xmlns:a16="http://schemas.microsoft.com/office/drawing/2014/main" val="10002"/>
+                  </a:ext>
+                </a:extLst>
               </a:tr>
             </a:tbl>
           </a:graphicData>
         </a:graphic>
       </p:graphicFrame>
-      <p:sp>
-        <p:nvSpPr>
-          <p:cNvPr id="14" name="Rounded Rectangle 13"/>
-          <p:cNvSpPr/>
-          <p:nvPr/>
-        </p:nvSpPr>
-        <p:spPr>
-          <a:xfrm>
-            <a:off x="6400800" y="5760720"/>
-            <a:ext cx="5486400" cy="777240"/>
-          </a:xfrm>
-          <a:prstGeom prst="roundRect">
-            <a:avLst>
-              <a:gd name="adj" fmla="val 12000"/>
-            </a:avLst>
-          </a:prstGeom>
-          <a:solidFill>
-            <a:srgbClr val="E2F0D9"/>
-          </a:solidFill>
-          <a:ln w="15875">
-            <a:solidFill>
-              <a:srgbClr val="548235"/>
-            </a:solidFill>
-          </a:ln>
-          <a:effectLst/>
-        </p:spPr>
-        <p:style>
-          <a:lnRef idx="1">
-            <a:schemeClr val="accent1"/>
-          </a:lnRef>
-          <a:fillRef idx="3">
-            <a:schemeClr val="accent1"/>
-          </a:fillRef>
-          <a:effectRef idx="2">
-            <a:schemeClr val="accent1"/>
-          </a:effectRef>
-          <a:fontRef idx="minor">
-            <a:schemeClr val="lt1"/>
-          </a:fontRef>
-        </p:style>
-        <p:txBody>
-          <a:bodyPr wrap="square" lIns="109728" rIns="109728" rtlCol="0" anchor="ctr"/>
-          <a:lstStyle/>
-          <a:p>
-            <a:pPr algn="l"/>
-            <a:r>
-              <a:rPr sz="1200" b="1" i="0">
-                <a:solidFill>
-                  <a:srgbClr val="548235"/>
-                </a:solidFill>
-                <a:latin typeface="Times New Roman"/>
-              </a:rPr>
-              <a:t>Nhận định: </a:t>
-            </a:r>
-            <a:r>
-              <a:rPr sz="1200" b="0" i="0">
-                <a:solidFill>
-                  <a:srgbClr val="262626"/>
-                </a:solidFill>
-                <a:latin typeface="Times New Roman"/>
-              </a:rPr>
-              <a:t>Không dùng được cho model cũ: thiếu so_km, hop_so, kieu_dang; target là giá thẩm định bảo hiểm, không phải giá rao bán.</a:t>
-            </a:r>
-          </a:p>
-        </p:txBody>
-      </p:sp>
     </p:spTree>
   </p:cSld>
   <p:clrMapOvr>
@@ -27833,7 +28414,7 @@
               <a:t> </a:t>
             </a:r>
             <a:r>
-              <a:rPr sz="3000" b="1" i="0" dirty="0" err="1" smtClean="0">
+              <a:rPr sz="3000" b="1" i="0" dirty="0" err="1">
                 <a:solidFill>
                   <a:srgbClr val="C55A11"/>
                 </a:solidFill>
@@ -27842,7 +28423,7 @@
               <a:t>toá</a:t>
             </a:r>
             <a:r>
-              <a:rPr lang="en-US" sz="3000" b="1" i="0" dirty="0" err="1" smtClean="0">
+              <a:rPr lang="en-US" sz="3000" b="1" i="0" dirty="0" err="1">
                 <a:solidFill>
                   <a:srgbClr val="C55A11"/>
                 </a:solidFill>
@@ -27996,7 +28577,7 @@
               <a:t> </a:t>
             </a:r>
             <a:r>
-              <a:rPr sz="2600" b="0" i="0" dirty="0" err="1" smtClean="0">
+              <a:rPr sz="2600" b="0" i="0" dirty="0" err="1">
                 <a:solidFill>
                   <a:srgbClr val="C55A11"/>
                 </a:solidFill>
@@ -28005,7 +28586,7 @@
               <a:t>nề</a:t>
             </a:r>
             <a:r>
-              <a:rPr lang="en-US" sz="2600" b="0" i="0" dirty="0" err="1" smtClean="0">
+              <a:rPr lang="en-US" sz="2600" b="0" i="0" dirty="0" err="1">
                 <a:solidFill>
                   <a:srgbClr val="C55A11"/>
                 </a:solidFill>
@@ -28177,7 +28758,7 @@
               <a:t> </a:t>
             </a:r>
             <a:r>
-              <a:rPr sz="2600" b="0" i="0" dirty="0" err="1" smtClean="0">
+              <a:rPr sz="2600" b="0" i="0" dirty="0" err="1">
                 <a:solidFill>
                   <a:srgbClr val="C55A11"/>
                 </a:solidFill>
@@ -28349,7 +28930,7 @@
               <a:t> </a:t>
             </a:r>
             <a:r>
-              <a:rPr sz="2600" b="0" i="0" dirty="0" err="1" smtClean="0">
+              <a:rPr sz="2600" b="0" i="0" dirty="0" err="1">
                 <a:solidFill>
                   <a:srgbClr val="C55A11"/>
                 </a:solidFill>
@@ -28632,7 +29213,7 @@
               <a:t> </a:t>
             </a:r>
             <a:r>
-              <a:rPr sz="2600" b="0" i="0" dirty="0" err="1" smtClean="0">
+              <a:rPr sz="2600" b="0" i="0" dirty="0" err="1">
                 <a:solidFill>
                   <a:srgbClr val="C55A11"/>
                 </a:solidFill>
@@ -28786,7 +29367,7 @@
               <a:t> </a:t>
             </a:r>
             <a:r>
-              <a:rPr sz="2600" b="0" i="0" dirty="0" err="1" smtClean="0">
+              <a:rPr sz="2600" b="0" i="0" dirty="0" err="1">
                 <a:solidFill>
                   <a:srgbClr val="C55A11"/>
                 </a:solidFill>
@@ -28958,7 +29539,7 @@
               <a:t> </a:t>
             </a:r>
             <a:r>
-              <a:rPr sz="2600" b="0" i="0" dirty="0" err="1" smtClean="0">
+              <a:rPr sz="2600" b="0" i="0" dirty="0" err="1">
                 <a:solidFill>
                   <a:srgbClr val="C55A11"/>
                 </a:solidFill>
@@ -29130,7 +29711,7 @@
               <a:t> </a:t>
             </a:r>
             <a:r>
-              <a:rPr sz="3000" b="1" i="0" dirty="0" err="1" smtClean="0">
+              <a:rPr sz="3000" b="1" i="0" dirty="0" err="1">
                 <a:solidFill>
                   <a:srgbClr val="C55A11"/>
                 </a:solidFill>
@@ -29387,9 +29968,27 @@
                 <a:tableStyleId>{5C22544A-7EE6-4342-B048-85BDC9FD1C3A}</a:tableStyleId>
               </a:tblPr>
               <a:tblGrid>
-                <a:gridCol w="1373830"/>
-                <a:gridCol w="1998298"/>
-                <a:gridCol w="1748511"/>
+                <a:gridCol w="1373830">
+                  <a:extLst>
+                    <a:ext uri="{9D8B030D-6E8A-4147-A177-3AD203B41FA5}">
+                      <a16:colId xmlns:a16="http://schemas.microsoft.com/office/drawing/2014/main" val="20000"/>
+                    </a:ext>
+                  </a:extLst>
+                </a:gridCol>
+                <a:gridCol w="1998298">
+                  <a:extLst>
+                    <a:ext uri="{9D8B030D-6E8A-4147-A177-3AD203B41FA5}">
+                      <a16:colId xmlns:a16="http://schemas.microsoft.com/office/drawing/2014/main" val="20001"/>
+                    </a:ext>
+                  </a:extLst>
+                </a:gridCol>
+                <a:gridCol w="1748511">
+                  <a:extLst>
+                    <a:ext uri="{9D8B030D-6E8A-4147-A177-3AD203B41FA5}">
+                      <a16:colId xmlns:a16="http://schemas.microsoft.com/office/drawing/2014/main" val="20002"/>
+                    </a:ext>
+                  </a:extLst>
+                </a:gridCol>
               </a:tblGrid>
               <a:tr h="457200">
                 <a:tc>
@@ -29458,6 +30057,11 @@
                     </a:solidFill>
                   </a:tcPr>
                 </a:tc>
+                <a:extLst>
+                  <a:ext uri="{0D108BD9-81ED-4DB2-BD59-A6C34878D82A}">
+                    <a16:rowId xmlns:a16="http://schemas.microsoft.com/office/drawing/2014/main" val="10000"/>
+                  </a:ext>
+                </a:extLst>
               </a:tr>
               <a:tr h="457200">
                 <a:tc>
@@ -29526,6 +30130,11 @@
                     </a:solidFill>
                   </a:tcPr>
                 </a:tc>
+                <a:extLst>
+                  <a:ext uri="{0D108BD9-81ED-4DB2-BD59-A6C34878D82A}">
+                    <a16:rowId xmlns:a16="http://schemas.microsoft.com/office/drawing/2014/main" val="10001"/>
+                  </a:ext>
+                </a:extLst>
               </a:tr>
               <a:tr h="457200">
                 <a:tc>
@@ -29594,6 +30203,11 @@
                     </a:solidFill>
                   </a:tcPr>
                 </a:tc>
+                <a:extLst>
+                  <a:ext uri="{0D108BD9-81ED-4DB2-BD59-A6C34878D82A}">
+                    <a16:rowId xmlns:a16="http://schemas.microsoft.com/office/drawing/2014/main" val="10002"/>
+                  </a:ext>
+                </a:extLst>
               </a:tr>
               <a:tr h="457200">
                 <a:tc>
@@ -29662,6 +30276,11 @@
                     </a:solidFill>
                   </a:tcPr>
                 </a:tc>
+                <a:extLst>
+                  <a:ext uri="{0D108BD9-81ED-4DB2-BD59-A6C34878D82A}">
+                    <a16:rowId xmlns:a16="http://schemas.microsoft.com/office/drawing/2014/main" val="10003"/>
+                  </a:ext>
+                </a:extLst>
               </a:tr>
             </a:tbl>
           </a:graphicData>
@@ -29909,7 +30528,7 @@
               </a:spcAft>
             </a:pPr>
             <a:r>
-              <a:rPr sz="1300" b="0" i="1" dirty="0" err="1" smtClean="0">
+              <a:rPr sz="1300" b="0" i="1" dirty="0" err="1">
                 <a:solidFill>
                   <a:srgbClr val="595959"/>
                 </a:solidFill>
@@ -29918,7 +30537,7 @@
               <a:t>Tỷ</a:t>
             </a:r>
             <a:r>
-              <a:rPr sz="1300" b="0" i="1" dirty="0" smtClean="0">
+              <a:rPr sz="1300" b="0" i="1" dirty="0">
                 <a:solidFill>
                   <a:srgbClr val="595959"/>
                 </a:solidFill>
@@ -30080,7 +30699,7 @@
           <a:p>
             <a:pPr algn="l"/>
             <a:r>
-              <a:rPr lang="en-US" sz="1200" b="1" i="0" dirty="0" err="1" smtClean="0">
+              <a:rPr lang="en-US" sz="1200" b="1" i="0" dirty="0" err="1">
                 <a:solidFill>
                   <a:srgbClr val="548235"/>
                 </a:solidFill>
@@ -30089,7 +30708,7 @@
               <a:t>B</a:t>
             </a:r>
             <a:r>
-              <a:rPr sz="1200" b="1" i="0" dirty="0" err="1" smtClean="0">
+              <a:rPr sz="1200" b="1" i="0" dirty="0" err="1">
                 <a:solidFill>
                   <a:srgbClr val="548235"/>
                 </a:solidFill>
@@ -30098,7 +30717,7 @@
               <a:t>iểu</a:t>
             </a:r>
             <a:r>
-              <a:rPr sz="1200" b="1" i="0" dirty="0" smtClean="0">
+              <a:rPr sz="1200" b="1" i="0" dirty="0">
                 <a:solidFill>
                   <a:srgbClr val="548235"/>
                 </a:solidFill>
@@ -30653,23 +31272,362 @@
           <a:p>
             <a:pPr algn="l"/>
             <a:r>
-              <a:rPr sz="1300" b="1" i="0">
+              <a:rPr lang="en-US" sz="2400" b="1" dirty="0" err="1">
                 <a:solidFill>
                   <a:srgbClr val="548235"/>
                 </a:solidFill>
                 <a:latin typeface="Times New Roman"/>
               </a:rPr>
-              <a:t>Đề xuất: </a:t>
-            </a:r>
-            <a:r>
-              <a:rPr sz="1300" b="0" i="0">
-                <a:solidFill>
-                  <a:srgbClr val="262626"/>
-                </a:solidFill>
-                <a:latin typeface="Times New Roman"/>
-              </a:rPr>
-              <a:t>Gửi Ban Nghiệp vụ Xe trước: danh sách mã xe chưa có trong ref_model_map (xếp theo số hợp đồng) để duyệt bổ sung — tác động lớn nhất, chi phí thấp nhất. Sau đó là 13 nhóm ρ &gt; 1, đề nghị kiểm tra phiên bản xe của các hợp đồng có nhiều dòng nhất.</a:t>
-            </a:r>
+              <a:t>Nhận</a:t>
+            </a:r>
+            <a:r>
+              <a:rPr lang="en-US" sz="2400" b="1" dirty="0">
+                <a:solidFill>
+                  <a:srgbClr val="548235"/>
+                </a:solidFill>
+                <a:latin typeface="Times New Roman"/>
+              </a:rPr>
+              <a:t> </a:t>
+            </a:r>
+            <a:r>
+              <a:rPr lang="en-US" sz="2400" b="1" dirty="0" err="1">
+                <a:solidFill>
+                  <a:srgbClr val="548235"/>
+                </a:solidFill>
+                <a:latin typeface="Times New Roman"/>
+              </a:rPr>
+              <a:t>định</a:t>
+            </a:r>
+            <a:r>
+              <a:rPr sz="2400" b="1" i="0" dirty="0">
+                <a:solidFill>
+                  <a:srgbClr val="548235"/>
+                </a:solidFill>
+                <a:latin typeface="Times New Roman"/>
+              </a:rPr>
+              <a:t>:</a:t>
+            </a:r>
+            <a:r>
+              <a:rPr lang="en-US" sz="2400" b="1" i="0" dirty="0">
+                <a:solidFill>
+                  <a:srgbClr val="548235"/>
+                </a:solidFill>
+                <a:latin typeface="Times New Roman"/>
+              </a:rPr>
+              <a:t> </a:t>
+            </a:r>
+            <a:r>
+              <a:rPr lang="en-US" sz="2400" dirty="0" err="1">
+                <a:solidFill>
+                  <a:srgbClr val="262626"/>
+                </a:solidFill>
+                <a:latin typeface="Times New Roman"/>
+              </a:rPr>
+              <a:t>T</a:t>
+            </a:r>
+            <a:r>
+              <a:rPr lang="en-US" sz="2400" b="0" i="0" dirty="0" err="1">
+                <a:solidFill>
+                  <a:srgbClr val="262626"/>
+                </a:solidFill>
+                <a:latin typeface="Times New Roman"/>
+              </a:rPr>
+              <a:t>ỷ</a:t>
+            </a:r>
+            <a:r>
+              <a:rPr lang="en-US" sz="2400" b="0" i="0" dirty="0">
+                <a:solidFill>
+                  <a:srgbClr val="262626"/>
+                </a:solidFill>
+                <a:latin typeface="Times New Roman"/>
+              </a:rPr>
+              <a:t> </a:t>
+            </a:r>
+            <a:r>
+              <a:rPr lang="en-US" sz="2400" b="0" i="0" dirty="0" err="1">
+                <a:solidFill>
+                  <a:srgbClr val="262626"/>
+                </a:solidFill>
+                <a:latin typeface="Times New Roman"/>
+              </a:rPr>
+              <a:t>lệ</a:t>
+            </a:r>
+            <a:r>
+              <a:rPr lang="en-US" sz="2400" b="0" i="0" dirty="0">
+                <a:solidFill>
+                  <a:srgbClr val="262626"/>
+                </a:solidFill>
+                <a:latin typeface="Times New Roman"/>
+              </a:rPr>
+              <a:t> 6%</a:t>
+            </a:r>
+            <a:r>
+              <a:rPr sz="2400" b="0" i="0" dirty="0">
+                <a:solidFill>
+                  <a:srgbClr val="262626"/>
+                </a:solidFill>
+                <a:latin typeface="Times New Roman"/>
+              </a:rPr>
+              <a:t> </a:t>
+            </a:r>
+            <a:r>
+              <a:rPr lang="en-US" sz="2400" b="0" i="0" dirty="0" err="1">
+                <a:solidFill>
+                  <a:srgbClr val="262626"/>
+                </a:solidFill>
+                <a:latin typeface="Times New Roman"/>
+              </a:rPr>
+              <a:t>theo</a:t>
+            </a:r>
+            <a:r>
+              <a:rPr lang="en-US" sz="2400" b="0" i="0" dirty="0">
+                <a:solidFill>
+                  <a:srgbClr val="262626"/>
+                </a:solidFill>
+                <a:latin typeface="Times New Roman"/>
+              </a:rPr>
+              <a:t> </a:t>
+            </a:r>
+            <a:r>
+              <a:rPr lang="en-US" sz="2400" b="0" i="0" dirty="0" err="1">
+                <a:solidFill>
+                  <a:srgbClr val="262626"/>
+                </a:solidFill>
+                <a:latin typeface="Times New Roman"/>
+              </a:rPr>
+              <a:t>nhận</a:t>
+            </a:r>
+            <a:r>
+              <a:rPr lang="en-US" sz="2400" b="0" i="0" dirty="0">
+                <a:solidFill>
+                  <a:srgbClr val="262626"/>
+                </a:solidFill>
+                <a:latin typeface="Times New Roman"/>
+              </a:rPr>
+              <a:t> </a:t>
+            </a:r>
+            <a:r>
+              <a:rPr lang="en-US" sz="2400" dirty="0" err="1">
+                <a:solidFill>
+                  <a:srgbClr val="262626"/>
+                </a:solidFill>
+                <a:latin typeface="Times New Roman"/>
+              </a:rPr>
+              <a:t>định</a:t>
+            </a:r>
+            <a:r>
+              <a:rPr sz="2400" b="0" i="0" dirty="0">
+                <a:solidFill>
+                  <a:srgbClr val="262626"/>
+                </a:solidFill>
+                <a:latin typeface="Times New Roman"/>
+              </a:rPr>
+              <a:t> </a:t>
+            </a:r>
+            <a:r>
+              <a:rPr sz="2400" b="0" i="0" dirty="0" err="1">
+                <a:solidFill>
+                  <a:srgbClr val="262626"/>
+                </a:solidFill>
+                <a:latin typeface="Times New Roman"/>
+              </a:rPr>
+              <a:t>Nghiệp</a:t>
+            </a:r>
+            <a:r>
+              <a:rPr sz="2400" b="0" i="0" dirty="0">
+                <a:solidFill>
+                  <a:srgbClr val="262626"/>
+                </a:solidFill>
+                <a:latin typeface="Times New Roman"/>
+              </a:rPr>
+              <a:t> </a:t>
+            </a:r>
+            <a:r>
+              <a:rPr sz="2400" b="0" i="0" dirty="0" err="1">
+                <a:solidFill>
+                  <a:srgbClr val="262626"/>
+                </a:solidFill>
+                <a:latin typeface="Times New Roman"/>
+              </a:rPr>
+              <a:t>vụ</a:t>
+            </a:r>
+            <a:r>
+              <a:rPr sz="2400" b="0" i="0" dirty="0">
+                <a:solidFill>
+                  <a:srgbClr val="262626"/>
+                </a:solidFill>
+                <a:latin typeface="Times New Roman"/>
+              </a:rPr>
+              <a:t> Xe</a:t>
+            </a:r>
+            <a:r>
+              <a:rPr lang="en-US" sz="2400" b="0" i="0" dirty="0">
+                <a:solidFill>
+                  <a:srgbClr val="262626"/>
+                </a:solidFill>
+                <a:latin typeface="Times New Roman"/>
+              </a:rPr>
+              <a:t> </a:t>
+            </a:r>
+            <a:r>
+              <a:rPr lang="en-US" sz="2400" b="0" i="0" dirty="0" err="1">
+                <a:solidFill>
+                  <a:srgbClr val="262626"/>
+                </a:solidFill>
+                <a:latin typeface="Times New Roman"/>
+              </a:rPr>
+              <a:t>là</a:t>
+            </a:r>
+            <a:r>
+              <a:rPr lang="en-US" sz="2400" b="0" i="0" dirty="0">
+                <a:solidFill>
+                  <a:srgbClr val="262626"/>
+                </a:solidFill>
+                <a:latin typeface="Times New Roman"/>
+              </a:rPr>
+              <a:t> </a:t>
+            </a:r>
+            <a:r>
+              <a:rPr lang="en-US" sz="2400" b="0" i="0" dirty="0" err="1">
+                <a:solidFill>
+                  <a:srgbClr val="262626"/>
+                </a:solidFill>
+                <a:latin typeface="Times New Roman"/>
+              </a:rPr>
+              <a:t>khá</a:t>
+            </a:r>
+            <a:r>
+              <a:rPr lang="en-US" sz="2400" b="0" i="0" dirty="0">
+                <a:solidFill>
+                  <a:srgbClr val="262626"/>
+                </a:solidFill>
+                <a:latin typeface="Times New Roman"/>
+              </a:rPr>
+              <a:t> </a:t>
+            </a:r>
+            <a:r>
+              <a:rPr lang="en-US" sz="2400" b="0" i="0" dirty="0" err="1">
+                <a:solidFill>
+                  <a:srgbClr val="262626"/>
+                </a:solidFill>
+                <a:latin typeface="Times New Roman"/>
+              </a:rPr>
+              <a:t>thấp</a:t>
+            </a:r>
+            <a:r>
+              <a:rPr lang="en-US" sz="2400" b="0" i="0" dirty="0">
+                <a:solidFill>
+                  <a:srgbClr val="262626"/>
+                </a:solidFill>
+                <a:latin typeface="Times New Roman"/>
+              </a:rPr>
+              <a:t>, </a:t>
+            </a:r>
+            <a:r>
+              <a:rPr lang="en-US" sz="2400" b="0" i="0" dirty="0" err="1">
+                <a:solidFill>
+                  <a:srgbClr val="262626"/>
+                </a:solidFill>
+                <a:latin typeface="Times New Roman"/>
+              </a:rPr>
+              <a:t>ước</a:t>
+            </a:r>
+            <a:r>
+              <a:rPr lang="en-US" sz="2400" b="0" i="0" dirty="0">
+                <a:solidFill>
+                  <a:srgbClr val="262626"/>
+                </a:solidFill>
+                <a:latin typeface="Times New Roman"/>
+              </a:rPr>
+              <a:t> </a:t>
+            </a:r>
+            <a:r>
+              <a:rPr lang="en-US" sz="2400" b="0" i="0" dirty="0" err="1">
+                <a:solidFill>
+                  <a:srgbClr val="262626"/>
+                </a:solidFill>
+                <a:latin typeface="Times New Roman"/>
+              </a:rPr>
+              <a:t>tính</a:t>
+            </a:r>
+            <a:r>
+              <a:rPr lang="en-US" sz="2400" b="0" i="0" dirty="0">
+                <a:solidFill>
+                  <a:srgbClr val="262626"/>
+                </a:solidFill>
+                <a:latin typeface="Times New Roman"/>
+              </a:rPr>
+              <a:t> </a:t>
+            </a:r>
+            <a:r>
+              <a:rPr lang="en-US" sz="2400" b="0" i="0" dirty="0" err="1">
+                <a:solidFill>
+                  <a:srgbClr val="262626"/>
+                </a:solidFill>
+                <a:latin typeface="Times New Roman"/>
+              </a:rPr>
+              <a:t>khấu</a:t>
+            </a:r>
+            <a:r>
+              <a:rPr lang="en-US" sz="2400" b="0" i="0" dirty="0">
+                <a:solidFill>
+                  <a:srgbClr val="262626"/>
+                </a:solidFill>
+                <a:latin typeface="Times New Roman"/>
+              </a:rPr>
+              <a:t> hao </a:t>
+            </a:r>
+            <a:r>
+              <a:rPr lang="en-US" sz="2400" b="0" i="0" dirty="0" err="1">
+                <a:solidFill>
+                  <a:srgbClr val="262626"/>
+                </a:solidFill>
+                <a:latin typeface="Times New Roman"/>
+              </a:rPr>
+              <a:t>trung</a:t>
+            </a:r>
+            <a:r>
+              <a:rPr lang="en-US" sz="2400" b="0" i="0" dirty="0">
+                <a:solidFill>
+                  <a:srgbClr val="262626"/>
+                </a:solidFill>
+                <a:latin typeface="Times New Roman"/>
+              </a:rPr>
+              <a:t> </a:t>
+            </a:r>
+            <a:r>
+              <a:rPr lang="en-US" sz="2400" b="0" i="0" dirty="0" err="1">
+                <a:solidFill>
+                  <a:srgbClr val="262626"/>
+                </a:solidFill>
+                <a:latin typeface="Times New Roman"/>
+              </a:rPr>
+              <a:t>bình</a:t>
+            </a:r>
+            <a:r>
+              <a:rPr lang="en-US" sz="2400" b="0" i="0" dirty="0">
+                <a:solidFill>
+                  <a:srgbClr val="262626"/>
+                </a:solidFill>
+                <a:latin typeface="Times New Roman"/>
+              </a:rPr>
+              <a:t> 15%/ </a:t>
+            </a:r>
+            <a:r>
+              <a:rPr lang="en-US" sz="2400" b="0" i="0" dirty="0" err="1">
+                <a:solidFill>
+                  <a:srgbClr val="262626"/>
+                </a:solidFill>
+                <a:latin typeface="Times New Roman"/>
+              </a:rPr>
+              <a:t>năm</a:t>
+            </a:r>
+            <a:endParaRPr sz="2400" b="0" i="0" dirty="0">
+              <a:solidFill>
+                <a:srgbClr val="262626"/>
+              </a:solidFill>
+              <a:latin typeface="Times New Roman"/>
+            </a:endParaRPr>
           </a:p>
         </p:txBody>
       </p:sp>
@@ -30801,9 +31759,27 @@
                 <a:tableStyleId>{5C22544A-7EE6-4342-B048-85BDC9FD1C3A}</a:tableStyleId>
               </a:tblPr>
               <a:tblGrid>
-                <a:gridCol w="2279904"/>
-                <a:gridCol w="1207008"/>
-                <a:gridCol w="2548128"/>
+                <a:gridCol w="2279904">
+                  <a:extLst>
+                    <a:ext uri="{9D8B030D-6E8A-4147-A177-3AD203B41FA5}">
+                      <a16:colId xmlns:a16="http://schemas.microsoft.com/office/drawing/2014/main" val="20000"/>
+                    </a:ext>
+                  </a:extLst>
+                </a:gridCol>
+                <a:gridCol w="1207008">
+                  <a:extLst>
+                    <a:ext uri="{9D8B030D-6E8A-4147-A177-3AD203B41FA5}">
+                      <a16:colId xmlns:a16="http://schemas.microsoft.com/office/drawing/2014/main" val="20001"/>
+                    </a:ext>
+                  </a:extLst>
+                </a:gridCol>
+                <a:gridCol w="2548128">
+                  <a:extLst>
+                    <a:ext uri="{9D8B030D-6E8A-4147-A177-3AD203B41FA5}">
+                      <a16:colId xmlns:a16="http://schemas.microsoft.com/office/drawing/2014/main" val="20002"/>
+                    </a:ext>
+                  </a:extLst>
+                </a:gridCol>
               </a:tblGrid>
               <a:tr h="402336">
                 <a:tc>
@@ -30896,6 +31872,11 @@
                     </a:solidFill>
                   </a:tcPr>
                 </a:tc>
+                <a:extLst>
+                  <a:ext uri="{0D108BD9-81ED-4DB2-BD59-A6C34878D82A}">
+                    <a16:rowId xmlns:a16="http://schemas.microsoft.com/office/drawing/2014/main" val="10000"/>
+                  </a:ext>
+                </a:extLst>
               </a:tr>
               <a:tr h="402336">
                 <a:tc>
@@ -30964,6 +31945,11 @@
                     </a:solidFill>
                   </a:tcPr>
                 </a:tc>
+                <a:extLst>
+                  <a:ext uri="{0D108BD9-81ED-4DB2-BD59-A6C34878D82A}">
+                    <a16:rowId xmlns:a16="http://schemas.microsoft.com/office/drawing/2014/main" val="10001"/>
+                  </a:ext>
+                </a:extLst>
               </a:tr>
               <a:tr h="402336">
                 <a:tc>
@@ -31032,6 +32018,11 @@
                     </a:solidFill>
                   </a:tcPr>
                 </a:tc>
+                <a:extLst>
+                  <a:ext uri="{0D108BD9-81ED-4DB2-BD59-A6C34878D82A}">
+                    <a16:rowId xmlns:a16="http://schemas.microsoft.com/office/drawing/2014/main" val="10002"/>
+                  </a:ext>
+                </a:extLst>
               </a:tr>
               <a:tr h="402336">
                 <a:tc>
@@ -31100,6 +32091,11 @@
                     </a:solidFill>
                   </a:tcPr>
                 </a:tc>
+                <a:extLst>
+                  <a:ext uri="{0D108BD9-81ED-4DB2-BD59-A6C34878D82A}">
+                    <a16:rowId xmlns:a16="http://schemas.microsoft.com/office/drawing/2014/main" val="10003"/>
+                  </a:ext>
+                </a:extLst>
               </a:tr>
               <a:tr h="402336">
                 <a:tc>
@@ -31168,6 +32164,11 @@
                     </a:solidFill>
                   </a:tcPr>
                 </a:tc>
+                <a:extLst>
+                  <a:ext uri="{0D108BD9-81ED-4DB2-BD59-A6C34878D82A}">
+                    <a16:rowId xmlns:a16="http://schemas.microsoft.com/office/drawing/2014/main" val="10004"/>
+                  </a:ext>
+                </a:extLst>
               </a:tr>
               <a:tr h="402336">
                 <a:tc>
@@ -31251,6 +32252,11 @@
                     </a:solidFill>
                   </a:tcPr>
                 </a:tc>
+                <a:extLst>
+                  <a:ext uri="{0D108BD9-81ED-4DB2-BD59-A6C34878D82A}">
+                    <a16:rowId xmlns:a16="http://schemas.microsoft.com/office/drawing/2014/main" val="10005"/>
+                  </a:ext>
+                </a:extLst>
               </a:tr>
             </a:tbl>
           </a:graphicData>
@@ -31462,7 +32468,7 @@
               </a:spcAft>
             </a:pPr>
             <a:r>
-              <a:rPr sz="1300" b="0" i="0" dirty="0" smtClean="0">
+              <a:rPr sz="1300" b="0" i="0" dirty="0">
                 <a:solidFill>
                   <a:srgbClr val="262626"/>
                 </a:solidFill>
@@ -32119,22 +33125,13 @@
               </a:spcAft>
             </a:pPr>
             <a:r>
-              <a:rPr sz="1300" b="0" i="0" dirty="0" smtClean="0">
-                <a:solidFill>
-                  <a:srgbClr val="262626"/>
-                </a:solidFill>
-                <a:latin typeface="Times New Roman"/>
-              </a:rPr>
-              <a:t>• </a:t>
-            </a:r>
-            <a:r>
               <a:rPr sz="1300" b="0" i="0" dirty="0">
                 <a:solidFill>
                   <a:srgbClr val="262626"/>
                 </a:solidFill>
                 <a:latin typeface="Times New Roman"/>
               </a:rPr>
-              <a:t>Parquet </a:t>
+              <a:t>• Parquet </a:t>
             </a:r>
             <a:r>
               <a:rPr sz="1300" b="0" i="0" dirty="0" err="1">
@@ -32770,7 +33767,7 @@
               </a:spcAft>
             </a:pPr>
             <a:r>
-              <a:rPr sz="1500" b="0" i="0" dirty="0" smtClean="0">
+              <a:rPr sz="1500" b="0" i="0" dirty="0">
                 <a:solidFill>
                   <a:srgbClr val="262626"/>
                 </a:solidFill>
@@ -33029,7 +34026,7 @@
               <a:t> </a:t>
             </a:r>
             <a:r>
-              <a:rPr lang="en-US" sz="1500" b="0" i="0" dirty="0" err="1" smtClean="0">
+              <a:rPr lang="en-US" sz="1500" b="0" i="0" dirty="0" err="1">
                 <a:solidFill>
                   <a:srgbClr val="262626"/>
                 </a:solidFill>
@@ -33038,7 +34035,7 @@
               <a:t>thêm</a:t>
             </a:r>
             <a:r>
-              <a:rPr sz="1500" b="0" i="0" dirty="0" smtClean="0">
+              <a:rPr sz="1500" b="0" i="0" dirty="0">
                 <a:solidFill>
                   <a:srgbClr val="262626"/>
                 </a:solidFill>
@@ -33062,28 +34059,19 @@
                 </a:solidFill>
                 <a:latin typeface="Times New Roman"/>
               </a:rPr>
-              <a:t> </a:t>
-            </a:r>
-            <a:r>
-              <a:rPr sz="1500" b="0" i="0" dirty="0" smtClean="0">
-                <a:solidFill>
-                  <a:srgbClr val="262626"/>
-                </a:solidFill>
-                <a:latin typeface="Times New Roman"/>
-              </a:rPr>
-              <a:t>crawl</a:t>
-            </a:r>
-            <a:r>
-              <a:rPr lang="en-US" sz="1500" b="0" i="0" dirty="0" smtClean="0">
-                <a:solidFill>
-                  <a:srgbClr val="262626"/>
-                </a:solidFill>
-                <a:latin typeface="Times New Roman"/>
-              </a:rPr>
-              <a:t> </a:t>
-            </a:r>
-            <a:r>
-              <a:rPr lang="en-US" sz="1500" b="0" i="0" dirty="0" err="1" smtClean="0">
+              <a:t> crawl</a:t>
+            </a:r>
+            <a:r>
+              <a:rPr lang="en-US" sz="1500" b="0" i="0" dirty="0">
+                <a:solidFill>
+                  <a:srgbClr val="262626"/>
+                </a:solidFill>
+                <a:latin typeface="Times New Roman"/>
+              </a:rPr>
+              <a:t> </a:t>
+            </a:r>
+            <a:r>
+              <a:rPr lang="en-US" sz="1500" b="0" i="0" dirty="0" err="1">
                 <a:solidFill>
                   <a:srgbClr val="262626"/>
                 </a:solidFill>
@@ -33092,7 +34080,7 @@
               <a:t>từ</a:t>
             </a:r>
             <a:r>
-              <a:rPr lang="en-US" sz="1500" b="0" i="0" dirty="0" smtClean="0">
+              <a:rPr lang="en-US" sz="1500" b="0" i="0" dirty="0">
                 <a:solidFill>
                   <a:srgbClr val="262626"/>
                 </a:solidFill>
@@ -33101,7 +34089,7 @@
               <a:t> bonbanh.com</a:t>
             </a:r>
             <a:r>
-              <a:rPr sz="1500" b="0" i="0" dirty="0" smtClean="0">
+              <a:rPr sz="1500" b="0" i="0" dirty="0">
                 <a:solidFill>
                   <a:srgbClr val="262626"/>
                 </a:solidFill>
@@ -33164,7 +34152,7 @@
               <a:t> </a:t>
             </a:r>
             <a:r>
-              <a:rPr sz="1500" b="0" i="0" dirty="0" err="1" smtClean="0">
+              <a:rPr sz="1500" b="0" i="0" dirty="0" err="1">
                 <a:solidFill>
                   <a:srgbClr val="262626"/>
                 </a:solidFill>
@@ -33173,7 +34161,7 @@
               <a:t>phủ</a:t>
             </a:r>
             <a:r>
-              <a:rPr lang="en-US" sz="1500" b="0" i="0" dirty="0" smtClean="0">
+              <a:rPr lang="en-US" sz="1500" b="0" i="0" dirty="0">
                 <a:solidFill>
                   <a:srgbClr val="262626"/>
                 </a:solidFill>
@@ -33182,7 +34170,7 @@
               <a:t>, </a:t>
             </a:r>
             <a:r>
-              <a:rPr sz="1500" b="0" i="0" dirty="0" err="1" smtClean="0">
+              <a:rPr sz="1500" b="0" i="0" dirty="0" err="1">
                 <a:solidFill>
                   <a:srgbClr val="262626"/>
                 </a:solidFill>
@@ -33191,7 +34179,7 @@
               <a:t>gắn</a:t>
             </a:r>
             <a:r>
-              <a:rPr sz="1500" b="0" i="0" dirty="0" smtClean="0">
+              <a:rPr sz="1500" b="0" i="0" dirty="0">
                 <a:solidFill>
                   <a:srgbClr val="262626"/>
                 </a:solidFill>
@@ -34049,7 +35037,7 @@
               <a:t>lời</a:t>
             </a:r>
             <a:r>
-              <a:rPr sz="1400" b="0" i="0" dirty="0" smtClean="0">
+              <a:rPr sz="1400" b="0" i="0" dirty="0">
                 <a:solidFill>
                   <a:srgbClr val="262626"/>
                 </a:solidFill>
@@ -34057,7 +35045,7 @@
               </a:rPr>
               <a:t>.</a:t>
             </a:r>
-            <a:endParaRPr lang="en-US" sz="1400" b="0" i="0" dirty="0" smtClean="0">
+            <a:endParaRPr lang="en-US" sz="1400" b="0" i="0" dirty="0">
               <a:solidFill>
                 <a:srgbClr val="262626"/>
               </a:solidFill>
@@ -34781,7 +35769,7 @@
               <a:t> </a:t>
             </a:r>
             <a:r>
-              <a:rPr sz="1400" b="0" i="0" dirty="0" err="1" smtClean="0">
+              <a:rPr sz="1400" b="0" i="0" dirty="0" err="1">
                 <a:solidFill>
                   <a:srgbClr val="262626"/>
                 </a:solidFill>
@@ -34799,7 +35787,7 @@
               <a:t>,</a:t>
             </a:r>
             <a:r>
-              <a:rPr sz="1400" b="0" i="0" dirty="0" smtClean="0">
+              <a:rPr sz="1400" b="0" i="0" dirty="0">
                 <a:solidFill>
                   <a:srgbClr val="262626"/>
                 </a:solidFill>
@@ -35052,7 +36040,7 @@
           <a:p>
             <a:pPr algn="ctr"/>
             <a:r>
-              <a:rPr lang="en-US" sz="2400" b="1" i="0" dirty="0" smtClean="0">
+              <a:rPr lang="en-US" sz="2400" b="1" i="0" dirty="0">
                 <a:solidFill>
                   <a:srgbClr val="FFFFFF"/>
                 </a:solidFill>
@@ -35332,7 +36320,7 @@
               <a:t> </a:t>
             </a:r>
             <a:r>
-              <a:rPr lang="en-US" sz="2000" b="1" i="0" dirty="0" err="1" smtClean="0">
+              <a:rPr lang="en-US" sz="2000" b="1" i="0" dirty="0" err="1">
                 <a:solidFill>
                   <a:srgbClr val="0070C0"/>
                 </a:solidFill>
@@ -35341,7 +36329,7 @@
               <a:t>yếu</a:t>
             </a:r>
             <a:r>
-              <a:rPr lang="en-US" sz="2000" b="1" i="0" dirty="0" smtClean="0">
+              <a:rPr lang="en-US" sz="2000" b="1" i="0" dirty="0">
                 <a:solidFill>
                   <a:srgbClr val="0070C0"/>
                 </a:solidFill>
@@ -35350,7 +36338,7 @@
               <a:t> </a:t>
             </a:r>
             <a:r>
-              <a:rPr lang="en-US" sz="2000" b="1" i="0" dirty="0" err="1" smtClean="0">
+              <a:rPr lang="en-US" sz="2000" b="1" i="0" dirty="0" err="1">
                 <a:solidFill>
                   <a:srgbClr val="0070C0"/>
                 </a:solidFill>
@@ -35359,7 +36347,7 @@
               <a:t>tố</a:t>
             </a:r>
             <a:r>
-              <a:rPr lang="en-US" sz="2000" b="1" i="0" dirty="0" smtClean="0">
+              <a:rPr lang="en-US" sz="2000" b="1" i="0" dirty="0">
                 <a:solidFill>
                   <a:srgbClr val="0070C0"/>
                 </a:solidFill>
@@ -35368,7 +36356,7 @@
               <a:t> </a:t>
             </a:r>
             <a:r>
-              <a:rPr lang="en-US" sz="2000" b="1" i="0" dirty="0" err="1" smtClean="0">
+              <a:rPr lang="en-US" sz="2000" b="1" i="0" dirty="0" err="1">
                 <a:solidFill>
                   <a:srgbClr val="0070C0"/>
                 </a:solidFill>
@@ -35377,7 +36365,7 @@
               <a:t>quyết</a:t>
             </a:r>
             <a:r>
-              <a:rPr lang="en-US" sz="2000" b="1" i="0" dirty="0" smtClean="0">
+              <a:rPr lang="en-US" sz="2000" b="1" i="0" dirty="0">
                 <a:solidFill>
                   <a:srgbClr val="0070C0"/>
                 </a:solidFill>
@@ -35386,7 +36374,7 @@
               <a:t> </a:t>
             </a:r>
             <a:r>
-              <a:rPr lang="en-US" sz="2000" b="1" i="0" dirty="0" err="1" smtClean="0">
+              <a:rPr lang="en-US" sz="2000" b="1" i="0" dirty="0" err="1">
                 <a:solidFill>
                   <a:srgbClr val="0070C0"/>
                 </a:solidFill>
@@ -35395,7 +36383,7 @@
               <a:t>định</a:t>
             </a:r>
             <a:r>
-              <a:rPr lang="en-US" sz="2000" b="1" i="0" dirty="0" smtClean="0">
+              <a:rPr lang="en-US" sz="2000" b="1" i="0" dirty="0">
                 <a:solidFill>
                   <a:srgbClr val="0070C0"/>
                 </a:solidFill>
@@ -35404,7 +36392,7 @@
               <a:t> </a:t>
             </a:r>
             <a:r>
-              <a:rPr lang="en-US" sz="2000" b="1" i="0" dirty="0" err="1" smtClean="0">
+              <a:rPr lang="en-US" sz="2000" b="1" i="0" dirty="0" err="1">
                 <a:solidFill>
                   <a:srgbClr val="0070C0"/>
                 </a:solidFill>
@@ -35413,7 +36401,7 @@
               <a:t>cả</a:t>
             </a:r>
             <a:r>
-              <a:rPr sz="2000" b="1" i="0" dirty="0" smtClean="0">
+              <a:rPr sz="2000" b="1" i="0" dirty="0">
                 <a:solidFill>
                   <a:srgbClr val="0070C0"/>
                 </a:solidFill>
@@ -35422,7 +36410,7 @@
               <a:t> </a:t>
             </a:r>
             <a:r>
-              <a:rPr sz="2000" b="1" i="0" dirty="0" err="1" smtClean="0">
+              <a:rPr sz="2000" b="1" i="0" dirty="0" err="1">
                 <a:solidFill>
                   <a:srgbClr val="0070C0"/>
                 </a:solidFill>
@@ -35431,7 +36419,7 @@
               <a:t>phí</a:t>
             </a:r>
             <a:r>
-              <a:rPr lang="en-US" sz="2000" b="1" i="0" dirty="0" smtClean="0">
+              <a:rPr lang="en-US" sz="2000" b="1" i="0" dirty="0">
                 <a:solidFill>
                   <a:srgbClr val="0070C0"/>
                 </a:solidFill>
@@ -35440,7 +36428,7 @@
               <a:t> </a:t>
             </a:r>
             <a:r>
-              <a:rPr lang="en-US" sz="2000" b="1" i="0" dirty="0" err="1" smtClean="0">
+              <a:rPr lang="en-US" sz="2000" b="1" i="0" dirty="0" err="1">
                 <a:solidFill>
                   <a:srgbClr val="0070C0"/>
                 </a:solidFill>
@@ -35449,7 +36437,7 @@
               <a:t>bảo</a:t>
             </a:r>
             <a:r>
-              <a:rPr lang="en-US" sz="2000" b="1" i="0" dirty="0" smtClean="0">
+              <a:rPr lang="en-US" sz="2000" b="1" i="0" dirty="0">
                 <a:solidFill>
                   <a:srgbClr val="0070C0"/>
                 </a:solidFill>
@@ -35458,7 +36446,7 @@
               <a:t> </a:t>
             </a:r>
             <a:r>
-              <a:rPr lang="en-US" sz="2000" b="1" i="0" dirty="0" err="1" smtClean="0">
+              <a:rPr lang="en-US" sz="2000" b="1" i="0" dirty="0" err="1">
                 <a:solidFill>
                   <a:srgbClr val="0070C0"/>
                 </a:solidFill>
@@ -35467,7 +36455,7 @@
               <a:t>hiểm</a:t>
             </a:r>
             <a:r>
-              <a:rPr sz="2000" b="1" i="0" dirty="0" smtClean="0">
+              <a:rPr sz="2000" b="1" i="0" dirty="0">
                 <a:solidFill>
                   <a:srgbClr val="0070C0"/>
                 </a:solidFill>
@@ -36033,7 +37021,7 @@
           <p:nvPr>
             <p:extLst>
               <p:ext uri="{D42A27DB-BD31-4B8C-83A1-F6EECF244321}">
-                <p14:modId xmlns:p14="http://schemas.microsoft.com/office/powerpoint/2010/main" val="156790171"/>
+                <p14:modId xmlns:p14="http://schemas.microsoft.com/office/powerpoint/2010/main" val="1812638765"/>
               </p:ext>
             </p:extLst>
           </p:nvPr>
@@ -36049,9 +37037,27 @@
                 <a:tableStyleId>{5C22544A-7EE6-4342-B048-85BDC9FD1C3A}</a:tableStyleId>
               </a:tblPr>
               <a:tblGrid>
-                <a:gridCol w="2555578"/>
-                <a:gridCol w="4043797"/>
-                <a:gridCol w="4817660"/>
+                <a:gridCol w="2555578">
+                  <a:extLst>
+                    <a:ext uri="{9D8B030D-6E8A-4147-A177-3AD203B41FA5}">
+                      <a16:colId xmlns:a16="http://schemas.microsoft.com/office/drawing/2014/main" val="20000"/>
+                    </a:ext>
+                  </a:extLst>
+                </a:gridCol>
+                <a:gridCol w="4043797">
+                  <a:extLst>
+                    <a:ext uri="{9D8B030D-6E8A-4147-A177-3AD203B41FA5}">
+                      <a16:colId xmlns:a16="http://schemas.microsoft.com/office/drawing/2014/main" val="20001"/>
+                    </a:ext>
+                  </a:extLst>
+                </a:gridCol>
+                <a:gridCol w="4817660">
+                  <a:extLst>
+                    <a:ext uri="{9D8B030D-6E8A-4147-A177-3AD203B41FA5}">
+                      <a16:colId xmlns:a16="http://schemas.microsoft.com/office/drawing/2014/main" val="20002"/>
+                    </a:ext>
+                  </a:extLst>
+                </a:gridCol>
               </a:tblGrid>
               <a:tr h="457200">
                 <a:tc>
@@ -36144,6 +37150,11 @@
                     </a:solidFill>
                   </a:tcPr>
                 </a:tc>
+                <a:extLst>
+                  <a:ext uri="{0D108BD9-81ED-4DB2-BD59-A6C34878D82A}">
+                    <a16:rowId xmlns:a16="http://schemas.microsoft.com/office/drawing/2014/main" val="10000"/>
+                  </a:ext>
+                </a:extLst>
               </a:tr>
               <a:tr h="457200">
                 <a:tc>
@@ -36377,6 +37388,11 @@
                     </a:solidFill>
                   </a:tcPr>
                 </a:tc>
+                <a:extLst>
+                  <a:ext uri="{0D108BD9-81ED-4DB2-BD59-A6C34878D82A}">
+                    <a16:rowId xmlns:a16="http://schemas.microsoft.com/office/drawing/2014/main" val="10001"/>
+                  </a:ext>
+                </a:extLst>
               </a:tr>
               <a:tr h="457200">
                 <a:tc>
@@ -36496,78 +37512,6 @@
                         </a:rPr>
                         <a:t> </a:t>
                       </a:r>
-                      <a:r>
-                        <a:rPr lang="en-US" sz="1500" b="0" i="0" dirty="0" smtClean="0">
-                          <a:solidFill>
-                            <a:srgbClr val="262626"/>
-                          </a:solidFill>
-                          <a:latin typeface="Times New Roman"/>
-                        </a:rPr>
-                        <a:t>, </a:t>
-                      </a:r>
-                      <a:r>
-                        <a:rPr sz="1500" b="1" i="0" dirty="0" err="1" smtClean="0">
-                          <a:solidFill>
-                            <a:srgbClr val="262626"/>
-                          </a:solidFill>
-                          <a:latin typeface="Times New Roman"/>
-                        </a:rPr>
-                        <a:t>không</a:t>
-                      </a:r>
-                      <a:r>
-                        <a:rPr sz="1500" b="1" i="0" dirty="0" smtClean="0">
-                          <a:solidFill>
-                            <a:srgbClr val="262626"/>
-                          </a:solidFill>
-                          <a:latin typeface="Times New Roman"/>
-                        </a:rPr>
-                        <a:t> </a:t>
-                      </a:r>
-                      <a:r>
-                        <a:rPr sz="1500" b="1" i="0" dirty="0" err="1">
-                          <a:solidFill>
-                            <a:srgbClr val="262626"/>
-                          </a:solidFill>
-                          <a:latin typeface="Times New Roman"/>
-                        </a:rPr>
-                        <a:t>được</a:t>
-                      </a:r>
-                      <a:r>
-                        <a:rPr sz="1500" b="1" i="0" dirty="0">
-                          <a:solidFill>
-                            <a:srgbClr val="262626"/>
-                          </a:solidFill>
-                          <a:latin typeface="Times New Roman"/>
-                        </a:rPr>
-                        <a:t> </a:t>
-                      </a:r>
-                      <a:r>
-                        <a:rPr sz="1500" b="1" i="0" dirty="0" err="1">
-                          <a:solidFill>
-                            <a:srgbClr val="262626"/>
-                          </a:solidFill>
-                          <a:latin typeface="Times New Roman"/>
-                        </a:rPr>
-                        <a:t>đền</a:t>
-                      </a:r>
-                      <a:r>
-                        <a:rPr sz="1500" b="1" i="0" dirty="0">
-                          <a:solidFill>
-                            <a:srgbClr val="262626"/>
-                          </a:solidFill>
-                          <a:latin typeface="Times New Roman"/>
-                        </a:rPr>
-                        <a:t> </a:t>
-                      </a:r>
-                      <a:r>
-                        <a:rPr sz="1500" b="1" i="0" dirty="0" err="1">
-                          <a:solidFill>
-                            <a:srgbClr val="262626"/>
-                          </a:solidFill>
-                          <a:latin typeface="Times New Roman"/>
-                        </a:rPr>
-                        <a:t>đủ</a:t>
-                      </a:r>
                       <a:endParaRPr sz="1500" b="1" i="0" dirty="0">
                         <a:solidFill>
                           <a:srgbClr val="262626"/>
@@ -36624,7 +37568,7 @@
                         <a:t>; </a:t>
                       </a:r>
                       <a:r>
-                        <a:rPr lang="en-US" sz="1500" b="0" i="0" dirty="0" err="1" smtClean="0">
+                        <a:rPr lang="en-US" sz="1500" b="0" i="0" dirty="0" err="1">
                           <a:solidFill>
                             <a:srgbClr val="262626"/>
                           </a:solidFill>
@@ -36633,7 +37577,7 @@
                         <a:t>khả</a:t>
                       </a:r>
                       <a:r>
-                        <a:rPr lang="en-US" sz="1500" b="0" i="0" baseline="0" dirty="0" smtClean="0">
+                        <a:rPr lang="en-US" sz="1500" b="0" i="0" baseline="0" dirty="0">
                           <a:solidFill>
                             <a:srgbClr val="262626"/>
                           </a:solidFill>
@@ -36642,7 +37586,7 @@
                         <a:t> </a:t>
                       </a:r>
                       <a:r>
-                        <a:rPr lang="en-US" sz="1500" b="0" i="0" baseline="0" dirty="0" err="1" smtClean="0">
+                        <a:rPr lang="en-US" sz="1500" b="0" i="0" baseline="0" dirty="0" err="1">
                           <a:solidFill>
                             <a:srgbClr val="262626"/>
                           </a:solidFill>
@@ -36651,7 +37595,7 @@
                         <a:t>năng</a:t>
                       </a:r>
                       <a:r>
-                        <a:rPr lang="en-US" sz="1500" b="0" i="0" baseline="0" dirty="0" smtClean="0">
+                        <a:rPr lang="en-US" sz="1500" b="0" i="0" baseline="0" dirty="0">
                           <a:solidFill>
                             <a:srgbClr val="262626"/>
                           </a:solidFill>
@@ -36660,7 +37604,7 @@
                         <a:t> </a:t>
                       </a:r>
                       <a:r>
-                        <a:rPr sz="1500" b="0" i="0" dirty="0" err="1" smtClean="0">
+                        <a:rPr sz="1500" b="0" i="0" dirty="0" err="1">
                           <a:solidFill>
                             <a:srgbClr val="262626"/>
                           </a:solidFill>
@@ -36669,7 +37613,7 @@
                         <a:t>phí</a:t>
                       </a:r>
                       <a:r>
-                        <a:rPr sz="1500" b="0" i="0" dirty="0" smtClean="0">
+                        <a:rPr sz="1500" b="0" i="0" dirty="0">
                           <a:solidFill>
                             <a:srgbClr val="262626"/>
                           </a:solidFill>
@@ -36696,7 +37640,7 @@
                         <a:t> </a:t>
                       </a:r>
                       <a:r>
-                        <a:rPr lang="en-US" sz="1500" b="0" i="0" dirty="0" err="1" smtClean="0">
+                        <a:rPr lang="en-US" sz="1500" b="0" i="0" dirty="0" err="1">
                           <a:solidFill>
                             <a:srgbClr val="262626"/>
                           </a:solidFill>
@@ -36705,7 +37649,7 @@
                         <a:t>không</a:t>
                       </a:r>
                       <a:r>
-                        <a:rPr lang="en-US" sz="1500" b="0" i="0" baseline="0" dirty="0" smtClean="0">
+                        <a:rPr lang="en-US" sz="1500" b="0" i="0" baseline="0" dirty="0">
                           <a:solidFill>
                             <a:srgbClr val="262626"/>
                           </a:solidFill>
@@ -36714,7 +37658,7 @@
                         <a:t> </a:t>
                       </a:r>
                       <a:r>
-                        <a:rPr lang="en-US" sz="1500" b="0" i="0" baseline="0" dirty="0" err="1" smtClean="0">
+                        <a:rPr lang="en-US" sz="1500" b="0" i="0" baseline="0" dirty="0" err="1">
                           <a:solidFill>
                             <a:srgbClr val="262626"/>
                           </a:solidFill>
@@ -36723,7 +37667,7 @@
                         <a:t>đủ</a:t>
                       </a:r>
                       <a:r>
-                        <a:rPr lang="en-US" sz="1500" b="0" i="0" baseline="0" dirty="0" smtClean="0">
+                        <a:rPr lang="en-US" sz="1500" b="0" i="0" baseline="0" dirty="0">
                           <a:solidFill>
                             <a:srgbClr val="262626"/>
                           </a:solidFill>
@@ -36732,7 +37676,7 @@
                         <a:t> </a:t>
                       </a:r>
                       <a:r>
-                        <a:rPr lang="en-US" sz="1500" b="0" i="0" baseline="0" dirty="0" err="1" smtClean="0">
+                        <a:rPr lang="en-US" sz="1500" b="0" i="0" baseline="0" dirty="0" err="1">
                           <a:solidFill>
                             <a:srgbClr val="262626"/>
                           </a:solidFill>
@@ -36741,7 +37685,7 @@
                         <a:t>bù</a:t>
                       </a:r>
                       <a:r>
-                        <a:rPr sz="1500" b="0" i="0" dirty="0" smtClean="0">
+                        <a:rPr sz="1500" b="0" i="0" dirty="0">
                           <a:solidFill>
                             <a:srgbClr val="262626"/>
                           </a:solidFill>
@@ -36790,6 +37734,11 @@
                     </a:solidFill>
                   </a:tcPr>
                 </a:tc>
+                <a:extLst>
+                  <a:ext uri="{0D108BD9-81ED-4DB2-BD59-A6C34878D82A}">
+                    <a16:rowId xmlns:a16="http://schemas.microsoft.com/office/drawing/2014/main" val="10002"/>
+                  </a:ext>
+                </a:extLst>
               </a:tr>
             </a:tbl>
           </a:graphicData>
@@ -36823,7 +37772,7 @@
               </a:spcAft>
             </a:pPr>
             <a:r>
-              <a:rPr sz="1700" b="0" i="0" dirty="0" err="1" smtClean="0">
+              <a:rPr sz="1700" b="0" i="0" dirty="0" err="1">
                 <a:solidFill>
                   <a:srgbClr val="262626"/>
                 </a:solidFill>
@@ -36832,7 +37781,7 @@
               <a:t>Mỗi</a:t>
             </a:r>
             <a:r>
-              <a:rPr sz="1700" b="0" i="0" dirty="0" smtClean="0">
+              <a:rPr sz="1700" b="0" i="0" dirty="0">
                 <a:solidFill>
                   <a:srgbClr val="262626"/>
                 </a:solidFill>
@@ -36985,7 +37934,7 @@
               <a:t> </a:t>
             </a:r>
             <a:r>
-              <a:rPr sz="1700" b="1" i="0" dirty="0" err="1" smtClean="0">
+              <a:rPr sz="1700" b="1" i="0" dirty="0" err="1">
                 <a:solidFill>
                   <a:srgbClr val="262626"/>
                 </a:solidFill>
@@ -36994,16 +37943,16 @@
               <a:t>giá</a:t>
             </a:r>
             <a:r>
-              <a:rPr lang="en-US" sz="1700" b="1" i="0" dirty="0" smtClean="0">
-                <a:solidFill>
-                  <a:srgbClr val="262626"/>
-                </a:solidFill>
-                <a:latin typeface="Times New Roman"/>
-              </a:rPr>
-              <a:t> </a:t>
-            </a:r>
-            <a:r>
-              <a:rPr lang="en-US" sz="1700" b="1" i="0" dirty="0" err="1" smtClean="0">
+              <a:rPr lang="en-US" sz="1700" b="1" i="0" dirty="0">
+                <a:solidFill>
+                  <a:srgbClr val="262626"/>
+                </a:solidFill>
+                <a:latin typeface="Times New Roman"/>
+              </a:rPr>
+              <a:t> </a:t>
+            </a:r>
+            <a:r>
+              <a:rPr lang="en-US" sz="1700" b="1" i="0" dirty="0" err="1">
                 <a:solidFill>
                   <a:srgbClr val="262626"/>
                 </a:solidFill>
@@ -37012,7 +37961,7 @@
               <a:t>trị</a:t>
             </a:r>
             <a:r>
-              <a:rPr sz="1700" b="1" i="0" dirty="0" smtClean="0">
+              <a:rPr sz="1700" b="1" i="0" dirty="0">
                 <a:solidFill>
                   <a:srgbClr val="262626"/>
                 </a:solidFill>
@@ -37111,7 +38060,7 @@
               <a:t> </a:t>
             </a:r>
             <a:r>
-              <a:rPr sz="1700" b="0" i="0" dirty="0" err="1" smtClean="0">
+              <a:rPr sz="1700" b="0" i="0" dirty="0" err="1">
                 <a:solidFill>
                   <a:srgbClr val="262626"/>
                 </a:solidFill>
@@ -37120,16 +38069,16 @@
               <a:t>chốt</a:t>
             </a:r>
             <a:r>
-              <a:rPr lang="en-US" sz="1700" b="0" i="0" dirty="0" smtClean="0">
-                <a:solidFill>
-                  <a:srgbClr val="262626"/>
-                </a:solidFill>
-                <a:latin typeface="Times New Roman"/>
-              </a:rPr>
-              <a:t> </a:t>
-            </a:r>
-            <a:r>
-              <a:rPr lang="en-US" sz="1700" b="0" i="0" dirty="0" err="1" smtClean="0">
+              <a:rPr lang="en-US" sz="1700" b="0" i="0" dirty="0">
+                <a:solidFill>
+                  <a:srgbClr val="262626"/>
+                </a:solidFill>
+                <a:latin typeface="Times New Roman"/>
+              </a:rPr>
+              <a:t> </a:t>
+            </a:r>
+            <a:r>
+              <a:rPr lang="en-US" sz="1700" b="0" i="0" dirty="0" err="1">
                 <a:solidFill>
                   <a:srgbClr val="262626"/>
                 </a:solidFill>
@@ -37138,16 +38087,16 @@
               <a:t>khi</a:t>
             </a:r>
             <a:r>
-              <a:rPr lang="en-US" sz="1700" b="0" i="0" dirty="0" smtClean="0">
-                <a:solidFill>
-                  <a:srgbClr val="262626"/>
-                </a:solidFill>
-                <a:latin typeface="Times New Roman"/>
-              </a:rPr>
-              <a:t> </a:t>
-            </a:r>
-            <a:r>
-              <a:rPr lang="en-US" sz="1700" b="0" i="0" dirty="0" err="1" smtClean="0">
+              <a:rPr lang="en-US" sz="1700" b="0" i="0" dirty="0">
+                <a:solidFill>
+                  <a:srgbClr val="262626"/>
+                </a:solidFill>
+                <a:latin typeface="Times New Roman"/>
+              </a:rPr>
+              <a:t> </a:t>
+            </a:r>
+            <a:r>
+              <a:rPr lang="en-US" sz="1700" b="0" i="0" dirty="0" err="1">
                 <a:solidFill>
                   <a:srgbClr val="262626"/>
                 </a:solidFill>
@@ -37156,16 +38105,16 @@
               <a:t>cấp</a:t>
             </a:r>
             <a:r>
-              <a:rPr lang="en-US" sz="1700" b="0" i="0" dirty="0" smtClean="0">
-                <a:solidFill>
-                  <a:srgbClr val="262626"/>
-                </a:solidFill>
-                <a:latin typeface="Times New Roman"/>
-              </a:rPr>
-              <a:t> </a:t>
-            </a:r>
-            <a:r>
-              <a:rPr lang="en-US" sz="1700" b="0" i="0" dirty="0" err="1" smtClean="0">
+              <a:rPr lang="en-US" sz="1700" b="0" i="0" dirty="0">
+                <a:solidFill>
+                  <a:srgbClr val="262626"/>
+                </a:solidFill>
+                <a:latin typeface="Times New Roman"/>
+              </a:rPr>
+              <a:t> </a:t>
+            </a:r>
+            <a:r>
+              <a:rPr lang="en-US" sz="1700" b="0" i="0" dirty="0" err="1">
                 <a:solidFill>
                   <a:srgbClr val="262626"/>
                 </a:solidFill>
@@ -37174,7 +38123,7 @@
               <a:t>đơn</a:t>
             </a:r>
             <a:r>
-              <a:rPr sz="1700" b="0" i="0" dirty="0" smtClean="0">
+              <a:rPr sz="1700" b="0" i="0" dirty="0">
                 <a:solidFill>
                   <a:srgbClr val="262626"/>
                 </a:solidFill>
@@ -37412,14 +38361,605 @@
           <a:p>
             <a:pPr algn="l"/>
             <a:r>
-              <a:rPr sz="1400" b="0" i="0">
+              <a:rPr lang="en-US" sz="1800" dirty="0" err="1">
                 <a:solidFill>
                   <a:srgbClr val="7F6000"/>
                 </a:solidFill>
                 <a:latin typeface="Times New Roman"/>
               </a:rPr>
-              <a:t>【Bạn điền: 2–3 câu từ thực tế công việc — sai lệch định giá thường gặp theo phía nào, ai chịu hậu quả trước】</a:t>
-            </a:r>
+              <a:t>Hiện</a:t>
+            </a:r>
+            <a:r>
+              <a:rPr lang="en-US" sz="1800" dirty="0">
+                <a:solidFill>
+                  <a:srgbClr val="7F6000"/>
+                </a:solidFill>
+                <a:latin typeface="Times New Roman"/>
+              </a:rPr>
+              <a:t> </a:t>
+            </a:r>
+            <a:r>
+              <a:rPr lang="en-US" sz="1800" dirty="0" err="1">
+                <a:solidFill>
+                  <a:srgbClr val="7F6000"/>
+                </a:solidFill>
+                <a:latin typeface="Times New Roman"/>
+              </a:rPr>
+              <a:t>tại</a:t>
+            </a:r>
+            <a:r>
+              <a:rPr lang="en-US" sz="1800" dirty="0">
+                <a:solidFill>
+                  <a:srgbClr val="7F6000"/>
+                </a:solidFill>
+                <a:latin typeface="Times New Roman"/>
+              </a:rPr>
+              <a:t> </a:t>
+            </a:r>
+            <a:r>
+              <a:rPr lang="en-US" sz="1800" dirty="0" err="1">
+                <a:solidFill>
+                  <a:srgbClr val="7F6000"/>
+                </a:solidFill>
+                <a:latin typeface="Times New Roman"/>
+              </a:rPr>
+              <a:t>đa</a:t>
+            </a:r>
+            <a:r>
+              <a:rPr lang="en-US" sz="1800" dirty="0">
+                <a:solidFill>
+                  <a:srgbClr val="7F6000"/>
+                </a:solidFill>
+                <a:latin typeface="Times New Roman"/>
+              </a:rPr>
+              <a:t> </a:t>
+            </a:r>
+            <a:r>
+              <a:rPr lang="en-US" sz="1800" dirty="0" err="1">
+                <a:solidFill>
+                  <a:srgbClr val="7F6000"/>
+                </a:solidFill>
+                <a:latin typeface="Times New Roman"/>
+              </a:rPr>
+              <a:t>số</a:t>
+            </a:r>
+            <a:r>
+              <a:rPr lang="en-US" sz="1800" dirty="0">
+                <a:solidFill>
+                  <a:srgbClr val="7F6000"/>
+                </a:solidFill>
+                <a:latin typeface="Times New Roman"/>
+              </a:rPr>
+              <a:t> </a:t>
+            </a:r>
+            <a:r>
+              <a:rPr lang="en-US" sz="1800" dirty="0" err="1">
+                <a:solidFill>
+                  <a:srgbClr val="7F6000"/>
+                </a:solidFill>
+                <a:latin typeface="Times New Roman"/>
+              </a:rPr>
+              <a:t>giá</a:t>
+            </a:r>
+            <a:r>
+              <a:rPr lang="en-US" sz="1800" dirty="0">
+                <a:solidFill>
+                  <a:srgbClr val="7F6000"/>
+                </a:solidFill>
+                <a:latin typeface="Times New Roman"/>
+              </a:rPr>
+              <a:t> </a:t>
+            </a:r>
+            <a:r>
+              <a:rPr lang="en-US" sz="1800" dirty="0" err="1">
+                <a:solidFill>
+                  <a:srgbClr val="7F6000"/>
+                </a:solidFill>
+                <a:latin typeface="Times New Roman"/>
+              </a:rPr>
+              <a:t>trị</a:t>
+            </a:r>
+            <a:r>
+              <a:rPr lang="en-US" sz="1800" dirty="0">
+                <a:solidFill>
+                  <a:srgbClr val="7F6000"/>
+                </a:solidFill>
+                <a:latin typeface="Times New Roman"/>
+              </a:rPr>
+              <a:t> </a:t>
+            </a:r>
+            <a:r>
+              <a:rPr lang="en-US" sz="1800" dirty="0" err="1">
+                <a:solidFill>
+                  <a:srgbClr val="7F6000"/>
+                </a:solidFill>
+                <a:latin typeface="Times New Roman"/>
+              </a:rPr>
+              <a:t>xe</a:t>
+            </a:r>
+            <a:r>
+              <a:rPr lang="en-US" sz="1800" dirty="0">
+                <a:solidFill>
+                  <a:srgbClr val="7F6000"/>
+                </a:solidFill>
+                <a:latin typeface="Times New Roman"/>
+              </a:rPr>
+              <a:t> </a:t>
+            </a:r>
+            <a:r>
+              <a:rPr lang="en-US" sz="1800" dirty="0" err="1">
+                <a:solidFill>
+                  <a:srgbClr val="7F6000"/>
+                </a:solidFill>
+                <a:latin typeface="Times New Roman"/>
+              </a:rPr>
+              <a:t>bị</a:t>
+            </a:r>
+            <a:r>
+              <a:rPr lang="en-US" sz="1800" dirty="0">
+                <a:solidFill>
+                  <a:srgbClr val="7F6000"/>
+                </a:solidFill>
+                <a:latin typeface="Times New Roman"/>
+              </a:rPr>
+              <a:t> </a:t>
+            </a:r>
+            <a:r>
+              <a:rPr lang="en-US" sz="1800" dirty="0" err="1">
+                <a:solidFill>
+                  <a:srgbClr val="7F6000"/>
+                </a:solidFill>
+                <a:latin typeface="Times New Roman"/>
+              </a:rPr>
+              <a:t>định</a:t>
+            </a:r>
+            <a:r>
+              <a:rPr lang="en-US" sz="1800" dirty="0">
+                <a:solidFill>
+                  <a:srgbClr val="7F6000"/>
+                </a:solidFill>
+                <a:latin typeface="Times New Roman"/>
+              </a:rPr>
+              <a:t> </a:t>
+            </a:r>
+            <a:r>
+              <a:rPr lang="en-US" sz="1800" dirty="0" err="1">
+                <a:solidFill>
+                  <a:srgbClr val="7F6000"/>
+                </a:solidFill>
+                <a:latin typeface="Times New Roman"/>
+              </a:rPr>
+              <a:t>giá</a:t>
+            </a:r>
+            <a:r>
+              <a:rPr lang="en-US" sz="1800" dirty="0">
+                <a:solidFill>
+                  <a:srgbClr val="7F6000"/>
+                </a:solidFill>
+                <a:latin typeface="Times New Roman"/>
+              </a:rPr>
+              <a:t> </a:t>
+            </a:r>
+            <a:r>
+              <a:rPr lang="en-US" sz="1800" dirty="0" err="1">
+                <a:solidFill>
+                  <a:srgbClr val="7F6000"/>
+                </a:solidFill>
+                <a:latin typeface="Times New Roman"/>
+              </a:rPr>
+              <a:t>cao</a:t>
+            </a:r>
+            <a:r>
+              <a:rPr lang="en-US" sz="1800" dirty="0">
+                <a:solidFill>
+                  <a:srgbClr val="7F6000"/>
+                </a:solidFill>
+                <a:latin typeface="Times New Roman"/>
+              </a:rPr>
+              <a:t> </a:t>
+            </a:r>
+            <a:r>
+              <a:rPr lang="en-US" sz="1800" dirty="0" err="1">
+                <a:solidFill>
+                  <a:srgbClr val="7F6000"/>
+                </a:solidFill>
+                <a:latin typeface="Times New Roman"/>
+              </a:rPr>
+              <a:t>hơn</a:t>
+            </a:r>
+            <a:r>
+              <a:rPr lang="en-US" sz="1800" dirty="0">
+                <a:solidFill>
+                  <a:srgbClr val="7F6000"/>
+                </a:solidFill>
+                <a:latin typeface="Times New Roman"/>
+              </a:rPr>
+              <a:t> </a:t>
+            </a:r>
+            <a:r>
+              <a:rPr lang="en-US" sz="1800" dirty="0" err="1">
+                <a:solidFill>
+                  <a:srgbClr val="7F6000"/>
+                </a:solidFill>
+                <a:latin typeface="Times New Roman"/>
+              </a:rPr>
+              <a:t>giá</a:t>
+            </a:r>
+            <a:r>
+              <a:rPr lang="en-US" sz="1800" dirty="0">
+                <a:solidFill>
+                  <a:srgbClr val="7F6000"/>
+                </a:solidFill>
+                <a:latin typeface="Times New Roman"/>
+              </a:rPr>
+              <a:t> </a:t>
+            </a:r>
+            <a:r>
+              <a:rPr lang="en-US" sz="1800" dirty="0" err="1">
+                <a:solidFill>
+                  <a:srgbClr val="7F6000"/>
+                </a:solidFill>
+                <a:latin typeface="Times New Roman"/>
+              </a:rPr>
+              <a:t>trị</a:t>
+            </a:r>
+            <a:r>
+              <a:rPr lang="en-US" sz="1800" dirty="0">
+                <a:solidFill>
+                  <a:srgbClr val="7F6000"/>
+                </a:solidFill>
+                <a:latin typeface="Times New Roman"/>
+              </a:rPr>
+              <a:t> </a:t>
+            </a:r>
+            <a:r>
+              <a:rPr lang="en-US" sz="1800" dirty="0" err="1">
+                <a:solidFill>
+                  <a:srgbClr val="7F6000"/>
+                </a:solidFill>
+                <a:latin typeface="Times New Roman"/>
+              </a:rPr>
+              <a:t>thị</a:t>
+            </a:r>
+            <a:r>
+              <a:rPr lang="en-US" sz="1800" dirty="0">
+                <a:solidFill>
+                  <a:srgbClr val="7F6000"/>
+                </a:solidFill>
+                <a:latin typeface="Times New Roman"/>
+              </a:rPr>
+              <a:t> </a:t>
+            </a:r>
+            <a:r>
+              <a:rPr lang="en-US" sz="1800" dirty="0" err="1">
+                <a:solidFill>
+                  <a:srgbClr val="7F6000"/>
+                </a:solidFill>
+                <a:latin typeface="Times New Roman"/>
+              </a:rPr>
+              <a:t>trường</a:t>
+            </a:r>
+            <a:r>
+              <a:rPr lang="en-US" sz="1800" dirty="0">
+                <a:solidFill>
+                  <a:srgbClr val="7F6000"/>
+                </a:solidFill>
+                <a:latin typeface="Times New Roman"/>
+              </a:rPr>
+              <a:t> </a:t>
+            </a:r>
+            <a:r>
+              <a:rPr lang="en-US" sz="1800" dirty="0" err="1">
+                <a:solidFill>
+                  <a:srgbClr val="7F6000"/>
+                </a:solidFill>
+                <a:latin typeface="Times New Roman"/>
+              </a:rPr>
+              <a:t>dẫn</a:t>
+            </a:r>
+            <a:r>
+              <a:rPr lang="en-US" sz="1800" dirty="0">
+                <a:solidFill>
+                  <a:srgbClr val="7F6000"/>
+                </a:solidFill>
+                <a:latin typeface="Times New Roman"/>
+              </a:rPr>
+              <a:t> </a:t>
+            </a:r>
+            <a:r>
+              <a:rPr lang="en-US" sz="1800" dirty="0" err="1">
+                <a:solidFill>
+                  <a:srgbClr val="7F6000"/>
+                </a:solidFill>
+                <a:latin typeface="Times New Roman"/>
+              </a:rPr>
+              <a:t>đến</a:t>
+            </a:r>
+            <a:r>
+              <a:rPr lang="en-US" sz="1800" dirty="0">
+                <a:solidFill>
+                  <a:srgbClr val="7F6000"/>
+                </a:solidFill>
+                <a:latin typeface="Times New Roman"/>
+              </a:rPr>
+              <a:t> </a:t>
+            </a:r>
+            <a:r>
+              <a:rPr lang="en-US" sz="1800" dirty="0" err="1">
+                <a:solidFill>
+                  <a:srgbClr val="7F6000"/>
+                </a:solidFill>
+                <a:latin typeface="Times New Roman"/>
+              </a:rPr>
+              <a:t>khó</a:t>
+            </a:r>
+            <a:r>
+              <a:rPr lang="en-US" sz="1800" dirty="0">
+                <a:solidFill>
+                  <a:srgbClr val="7F6000"/>
+                </a:solidFill>
+                <a:latin typeface="Times New Roman"/>
+              </a:rPr>
+              <a:t> </a:t>
+            </a:r>
+            <a:r>
+              <a:rPr lang="en-US" sz="1800" dirty="0" err="1">
+                <a:solidFill>
+                  <a:srgbClr val="7F6000"/>
+                </a:solidFill>
+                <a:latin typeface="Times New Roman"/>
+              </a:rPr>
+              <a:t>cạnh</a:t>
+            </a:r>
+            <a:r>
+              <a:rPr lang="en-US" sz="1800" dirty="0">
+                <a:solidFill>
+                  <a:srgbClr val="7F6000"/>
+                </a:solidFill>
+                <a:latin typeface="Times New Roman"/>
+              </a:rPr>
+              <a:t> </a:t>
+            </a:r>
+            <a:r>
+              <a:rPr lang="en-US" sz="1800" dirty="0" err="1">
+                <a:solidFill>
+                  <a:srgbClr val="7F6000"/>
+                </a:solidFill>
+                <a:latin typeface="Times New Roman"/>
+              </a:rPr>
+              <a:t>tranh</a:t>
+            </a:r>
+            <a:r>
+              <a:rPr lang="en-US" sz="1800" dirty="0">
+                <a:solidFill>
+                  <a:srgbClr val="7F6000"/>
+                </a:solidFill>
+                <a:latin typeface="Times New Roman"/>
+              </a:rPr>
+              <a:t> </a:t>
+            </a:r>
+            <a:r>
+              <a:rPr lang="en-US" sz="1800" dirty="0" err="1">
+                <a:solidFill>
+                  <a:srgbClr val="7F6000"/>
+                </a:solidFill>
+                <a:latin typeface="Times New Roman"/>
+              </a:rPr>
+              <a:t>vì</a:t>
+            </a:r>
+            <a:r>
+              <a:rPr lang="en-US" sz="1800" dirty="0">
+                <a:solidFill>
+                  <a:srgbClr val="7F6000"/>
+                </a:solidFill>
+                <a:latin typeface="Times New Roman"/>
+              </a:rPr>
+              <a:t> </a:t>
+            </a:r>
+            <a:r>
+              <a:rPr lang="en-US" sz="1800" dirty="0" err="1">
+                <a:solidFill>
+                  <a:srgbClr val="7F6000"/>
+                </a:solidFill>
+                <a:latin typeface="Times New Roman"/>
+              </a:rPr>
+              <a:t>phí</a:t>
+            </a:r>
+            <a:r>
+              <a:rPr lang="en-US" sz="1800" dirty="0">
+                <a:solidFill>
+                  <a:srgbClr val="7F6000"/>
+                </a:solidFill>
+                <a:latin typeface="Times New Roman"/>
+              </a:rPr>
+              <a:t> </a:t>
+            </a:r>
+            <a:r>
+              <a:rPr lang="en-US" sz="1800" dirty="0" err="1">
+                <a:solidFill>
+                  <a:srgbClr val="7F6000"/>
+                </a:solidFill>
+                <a:latin typeface="Times New Roman"/>
+              </a:rPr>
+              <a:t>cao</a:t>
+            </a:r>
+            <a:r>
+              <a:rPr lang="en-US" sz="1800" dirty="0">
+                <a:solidFill>
+                  <a:srgbClr val="7F6000"/>
+                </a:solidFill>
+                <a:latin typeface="Times New Roman"/>
+              </a:rPr>
+              <a:t>, </a:t>
+            </a:r>
+            <a:r>
+              <a:rPr lang="en-US" sz="1800" dirty="0" err="1">
+                <a:solidFill>
+                  <a:srgbClr val="7F6000"/>
+                </a:solidFill>
+                <a:latin typeface="Times New Roman"/>
+              </a:rPr>
+              <a:t>và</a:t>
+            </a:r>
+            <a:r>
+              <a:rPr lang="en-US" sz="1800" dirty="0">
+                <a:solidFill>
+                  <a:srgbClr val="7F6000"/>
+                </a:solidFill>
+                <a:latin typeface="Times New Roman"/>
+              </a:rPr>
+              <a:t> 1 </a:t>
+            </a:r>
+            <a:r>
+              <a:rPr lang="en-US" sz="1800" dirty="0" err="1">
+                <a:solidFill>
+                  <a:srgbClr val="7F6000"/>
+                </a:solidFill>
+                <a:latin typeface="Times New Roman"/>
+              </a:rPr>
+              <a:t>phần</a:t>
+            </a:r>
+            <a:r>
+              <a:rPr lang="en-US" sz="1800" dirty="0">
+                <a:solidFill>
+                  <a:srgbClr val="7F6000"/>
+                </a:solidFill>
+                <a:latin typeface="Times New Roman"/>
+              </a:rPr>
+              <a:t> </a:t>
+            </a:r>
+            <a:r>
+              <a:rPr lang="en-US" sz="1800" dirty="0" err="1">
+                <a:solidFill>
+                  <a:srgbClr val="7F6000"/>
+                </a:solidFill>
+                <a:latin typeface="Times New Roman"/>
+              </a:rPr>
+              <a:t>khả</a:t>
+            </a:r>
+            <a:r>
+              <a:rPr lang="en-US" sz="1800" dirty="0">
+                <a:solidFill>
+                  <a:srgbClr val="7F6000"/>
+                </a:solidFill>
+                <a:latin typeface="Times New Roman"/>
+              </a:rPr>
+              <a:t> </a:t>
+            </a:r>
+            <a:r>
+              <a:rPr lang="en-US" sz="1800" dirty="0" err="1">
+                <a:solidFill>
+                  <a:srgbClr val="7F6000"/>
+                </a:solidFill>
+                <a:latin typeface="Times New Roman"/>
+              </a:rPr>
+              <a:t>năng</a:t>
+            </a:r>
+            <a:r>
+              <a:rPr lang="en-US" sz="1800" dirty="0">
+                <a:solidFill>
+                  <a:srgbClr val="7F6000"/>
+                </a:solidFill>
+                <a:latin typeface="Times New Roman"/>
+              </a:rPr>
+              <a:t> sale </a:t>
+            </a:r>
+            <a:r>
+              <a:rPr lang="en-US" sz="1800" dirty="0" err="1">
+                <a:solidFill>
+                  <a:srgbClr val="7F6000"/>
+                </a:solidFill>
+                <a:latin typeface="Times New Roman"/>
+              </a:rPr>
+              <a:t>muốn</a:t>
+            </a:r>
+            <a:r>
+              <a:rPr lang="en-US" sz="1800" dirty="0">
+                <a:solidFill>
+                  <a:srgbClr val="7F6000"/>
+                </a:solidFill>
+                <a:latin typeface="Times New Roman"/>
+              </a:rPr>
+              <a:t> </a:t>
+            </a:r>
+            <a:r>
+              <a:rPr lang="en-US" sz="1800" dirty="0" err="1">
+                <a:solidFill>
+                  <a:srgbClr val="7F6000"/>
+                </a:solidFill>
+                <a:latin typeface="Times New Roman"/>
+              </a:rPr>
+              <a:t>hưởng</a:t>
+            </a:r>
+            <a:r>
+              <a:rPr lang="en-US" sz="1800" dirty="0">
+                <a:solidFill>
+                  <a:srgbClr val="7F6000"/>
+                </a:solidFill>
+                <a:latin typeface="Times New Roman"/>
+              </a:rPr>
+              <a:t> </a:t>
+            </a:r>
+            <a:r>
+              <a:rPr lang="en-US" sz="1800" dirty="0" err="1">
+                <a:solidFill>
+                  <a:srgbClr val="7F6000"/>
+                </a:solidFill>
+                <a:latin typeface="Times New Roman"/>
+              </a:rPr>
+              <a:t>hoa</a:t>
+            </a:r>
+            <a:r>
+              <a:rPr lang="en-US" sz="1800" dirty="0">
+                <a:solidFill>
+                  <a:srgbClr val="7F6000"/>
+                </a:solidFill>
+                <a:latin typeface="Times New Roman"/>
+              </a:rPr>
+              <a:t> </a:t>
+            </a:r>
+            <a:r>
+              <a:rPr lang="en-US" sz="1800" dirty="0" err="1">
+                <a:solidFill>
+                  <a:srgbClr val="7F6000"/>
+                </a:solidFill>
+                <a:latin typeface="Times New Roman"/>
+              </a:rPr>
+              <a:t>hồng</a:t>
+            </a:r>
+            <a:r>
+              <a:rPr lang="en-US" sz="1800" dirty="0">
+                <a:solidFill>
+                  <a:srgbClr val="7F6000"/>
+                </a:solidFill>
+                <a:latin typeface="Times New Roman"/>
+              </a:rPr>
+              <a:t> </a:t>
+            </a:r>
+            <a:r>
+              <a:rPr lang="en-US" sz="1800" dirty="0" err="1">
+                <a:solidFill>
+                  <a:srgbClr val="7F6000"/>
+                </a:solidFill>
+                <a:latin typeface="Times New Roman"/>
+              </a:rPr>
+              <a:t>cao</a:t>
+            </a:r>
+            <a:r>
+              <a:rPr lang="en-US" sz="1800" dirty="0">
+                <a:solidFill>
+                  <a:srgbClr val="7F6000"/>
+                </a:solidFill>
+                <a:latin typeface="Times New Roman"/>
+              </a:rPr>
+              <a:t>.</a:t>
+            </a:r>
+            <a:endParaRPr sz="1800" b="0" i="0" dirty="0">
+              <a:solidFill>
+                <a:srgbClr val="7F6000"/>
+              </a:solidFill>
+              <a:latin typeface="Times New Roman"/>
+            </a:endParaRPr>
           </a:p>
         </p:txBody>
       </p:sp>
@@ -37515,7 +39055,7 @@
               </a:spcAft>
             </a:pPr>
             <a:r>
-              <a:rPr sz="2000" b="1" i="0" dirty="0" smtClean="0">
+              <a:rPr sz="2000" b="1" i="0" dirty="0">
                 <a:solidFill>
                   <a:srgbClr val="0070C0"/>
                 </a:solidFill>
@@ -37524,7 +39064,7 @@
               <a:t>❖</a:t>
             </a:r>
             <a:r>
-              <a:rPr lang="en-US" sz="2000" b="1" i="0" dirty="0" smtClean="0">
+              <a:rPr lang="en-US" sz="2000" b="1" i="0" dirty="0">
                 <a:solidFill>
                   <a:srgbClr val="0070C0"/>
                 </a:solidFill>
@@ -37533,7 +39073,7 @@
               <a:t> </a:t>
             </a:r>
             <a:r>
-              <a:rPr lang="en-US" sz="2000" b="1" i="0" dirty="0" err="1" smtClean="0">
+              <a:rPr lang="en-US" sz="2000" b="1" i="0" dirty="0" err="1">
                 <a:solidFill>
                   <a:srgbClr val="0070C0"/>
                 </a:solidFill>
@@ -37542,7 +39082,7 @@
               <a:t>Nhu</a:t>
             </a:r>
             <a:r>
-              <a:rPr lang="en-US" sz="2000" b="1" i="0" dirty="0" smtClean="0">
+              <a:rPr lang="en-US" sz="2000" b="1" i="0" dirty="0">
                 <a:solidFill>
                   <a:srgbClr val="0070C0"/>
                 </a:solidFill>
@@ -37551,7 +39091,7 @@
               <a:t> </a:t>
             </a:r>
             <a:r>
-              <a:rPr lang="en-US" sz="2000" b="1" i="0" dirty="0" err="1" smtClean="0">
+              <a:rPr lang="en-US" sz="2000" b="1" i="0" dirty="0" err="1">
                 <a:solidFill>
                   <a:srgbClr val="0070C0"/>
                 </a:solidFill>
@@ -37560,7 +39100,7 @@
               <a:t>cầu</a:t>
             </a:r>
             <a:r>
-              <a:rPr lang="en-US" sz="2000" b="1" i="0" dirty="0" smtClean="0">
+              <a:rPr lang="en-US" sz="2000" b="1" i="0" dirty="0">
                 <a:solidFill>
                   <a:srgbClr val="0070C0"/>
                 </a:solidFill>
@@ -37569,7 +39109,7 @@
               <a:t> </a:t>
             </a:r>
             <a:r>
-              <a:rPr lang="en-US" sz="2000" b="1" i="0" dirty="0" err="1" smtClean="0">
+              <a:rPr lang="en-US" sz="2000" b="1" i="0" dirty="0" err="1">
                 <a:solidFill>
                   <a:srgbClr val="0070C0"/>
                 </a:solidFill>
@@ -37578,7 +39118,7 @@
               <a:t>từ</a:t>
             </a:r>
             <a:r>
-              <a:rPr lang="en-US" sz="2000" b="1" i="0" dirty="0" smtClean="0">
+              <a:rPr lang="en-US" sz="2000" b="1" i="0" dirty="0">
                 <a:solidFill>
                   <a:srgbClr val="0070C0"/>
                 </a:solidFill>
@@ -37587,7 +39127,7 @@
               <a:t> </a:t>
             </a:r>
             <a:r>
-              <a:rPr lang="en-US" sz="2000" b="1" i="0" dirty="0" err="1" smtClean="0">
+              <a:rPr lang="en-US" sz="2000" b="1" i="0" dirty="0" err="1">
                 <a:solidFill>
                   <a:srgbClr val="0070C0"/>
                 </a:solidFill>
@@ -37596,7 +39136,7 @@
               <a:t>người</a:t>
             </a:r>
             <a:r>
-              <a:rPr lang="en-US" sz="2000" b="1" i="0" dirty="0" smtClean="0">
+              <a:rPr lang="en-US" sz="2000" b="1" i="0" dirty="0">
                 <a:solidFill>
                   <a:srgbClr val="0070C0"/>
                 </a:solidFill>
@@ -37605,7 +39145,7 @@
               <a:t> </a:t>
             </a:r>
             <a:r>
-              <a:rPr lang="en-US" sz="2000" b="1" i="0" dirty="0" err="1" smtClean="0">
+              <a:rPr lang="en-US" sz="2000" b="1" i="0" dirty="0" err="1">
                 <a:solidFill>
                   <a:srgbClr val="0070C0"/>
                 </a:solidFill>
@@ -37647,10 +39187,34 @@
                 <a:tableStyleId>{5C22544A-7EE6-4342-B048-85BDC9FD1C3A}</a:tableStyleId>
               </a:tblPr>
               <a:tblGrid>
-                <a:gridCol w="495082"/>
-                <a:gridCol w="3875750"/>
-                <a:gridCol w="1580274"/>
-                <a:gridCol w="1753738"/>
+                <a:gridCol w="495082">
+                  <a:extLst>
+                    <a:ext uri="{9D8B030D-6E8A-4147-A177-3AD203B41FA5}">
+                      <a16:colId xmlns:a16="http://schemas.microsoft.com/office/drawing/2014/main" val="20000"/>
+                    </a:ext>
+                  </a:extLst>
+                </a:gridCol>
+                <a:gridCol w="3875750">
+                  <a:extLst>
+                    <a:ext uri="{9D8B030D-6E8A-4147-A177-3AD203B41FA5}">
+                      <a16:colId xmlns:a16="http://schemas.microsoft.com/office/drawing/2014/main" val="20001"/>
+                    </a:ext>
+                  </a:extLst>
+                </a:gridCol>
+                <a:gridCol w="1580274">
+                  <a:extLst>
+                    <a:ext uri="{9D8B030D-6E8A-4147-A177-3AD203B41FA5}">
+                      <a16:colId xmlns:a16="http://schemas.microsoft.com/office/drawing/2014/main" val="20002"/>
+                    </a:ext>
+                  </a:extLst>
+                </a:gridCol>
+                <a:gridCol w="1753738">
+                  <a:extLst>
+                    <a:ext uri="{9D8B030D-6E8A-4147-A177-3AD203B41FA5}">
+                      <a16:colId xmlns:a16="http://schemas.microsoft.com/office/drawing/2014/main" val="20003"/>
+                    </a:ext>
+                  </a:extLst>
+                </a:gridCol>
               </a:tblGrid>
               <a:tr h="566928">
                 <a:tc>
@@ -37683,7 +39247,7 @@
                     <a:p>
                       <a:pPr algn="ctr"/>
                       <a:r>
-                        <a:rPr lang="en-US" sz="1400" b="1" i="0" dirty="0" err="1" smtClean="0">
+                        <a:rPr lang="en-US" sz="1400" b="1" i="0" dirty="0" err="1">
                           <a:solidFill>
                             <a:srgbClr val="FFFFFF"/>
                           </a:solidFill>
@@ -37692,7 +39256,7 @@
                         <a:t>Nhu</a:t>
                       </a:r>
                       <a:r>
-                        <a:rPr lang="en-US" sz="1400" b="1" i="0" dirty="0" smtClean="0">
+                        <a:rPr lang="en-US" sz="1400" b="1" i="0" dirty="0">
                           <a:solidFill>
                             <a:srgbClr val="FFFFFF"/>
                           </a:solidFill>
@@ -37701,7 +39265,7 @@
                         <a:t> </a:t>
                       </a:r>
                       <a:r>
-                        <a:rPr lang="en-US" sz="1400" b="1" i="0" dirty="0" err="1" smtClean="0">
+                        <a:rPr lang="en-US" sz="1400" b="1" i="0" dirty="0" err="1">
                           <a:solidFill>
                             <a:srgbClr val="FFFFFF"/>
                           </a:solidFill>
@@ -37802,6 +39366,11 @@
                     </a:solidFill>
                   </a:tcPr>
                 </a:tc>
+                <a:extLst>
+                  <a:ext uri="{0D108BD9-81ED-4DB2-BD59-A6C34878D82A}">
+                    <a16:rowId xmlns:a16="http://schemas.microsoft.com/office/drawing/2014/main" val="10000"/>
+                  </a:ext>
+                </a:extLst>
               </a:tr>
               <a:tr h="566928">
                 <a:tc>
@@ -37892,7 +39461,7 @@
                     <a:p>
                       <a:pPr algn="ctr"/>
                       <a:r>
-                        <a:rPr lang="en-US" sz="1400" b="0" i="0" dirty="0" err="1" smtClean="0">
+                        <a:rPr lang="en-US" sz="1400" b="0" i="0" dirty="0" err="1">
                           <a:solidFill>
                             <a:srgbClr val="262626"/>
                           </a:solidFill>
@@ -37901,7 +39470,7 @@
                         <a:t>Nghiệp</a:t>
                       </a:r>
                       <a:r>
-                        <a:rPr lang="en-US" sz="1400" b="0" i="0" baseline="0" dirty="0" smtClean="0">
+                        <a:rPr lang="en-US" sz="1400" b="0" i="0" baseline="0" dirty="0">
                           <a:solidFill>
                             <a:srgbClr val="262626"/>
                           </a:solidFill>
@@ -37910,7 +39479,7 @@
                         <a:t> </a:t>
                       </a:r>
                       <a:r>
-                        <a:rPr lang="en-US" sz="1400" b="0" i="0" baseline="0" dirty="0" err="1" smtClean="0">
+                        <a:rPr lang="en-US" sz="1400" b="0" i="0" baseline="0" dirty="0" err="1">
                           <a:solidFill>
                             <a:srgbClr val="262626"/>
                           </a:solidFill>
@@ -37919,7 +39488,7 @@
                         <a:t>vụ</a:t>
                       </a:r>
                       <a:r>
-                        <a:rPr lang="en-US" sz="1400" b="0" i="0" baseline="0" dirty="0" smtClean="0">
+                        <a:rPr lang="en-US" sz="1400" b="0" i="0" baseline="0" dirty="0">
                           <a:solidFill>
                             <a:srgbClr val="262626"/>
                           </a:solidFill>
@@ -37928,7 +39497,7 @@
                         <a:t> </a:t>
                       </a:r>
                       <a:r>
-                        <a:rPr lang="en-US" sz="1400" b="0" i="0" baseline="0" dirty="0" err="1" smtClean="0">
+                        <a:rPr lang="en-US" sz="1400" b="0" i="0" baseline="0" dirty="0" err="1">
                           <a:solidFill>
                             <a:srgbClr val="262626"/>
                           </a:solidFill>
@@ -37972,6 +39541,11 @@
                     </a:solidFill>
                   </a:tcPr>
                 </a:tc>
+                <a:extLst>
+                  <a:ext uri="{0D108BD9-81ED-4DB2-BD59-A6C34878D82A}">
+                    <a16:rowId xmlns:a16="http://schemas.microsoft.com/office/drawing/2014/main" val="10001"/>
+                  </a:ext>
+                </a:extLst>
               </a:tr>
               <a:tr h="566928">
                 <a:tc>
@@ -38044,7 +39618,7 @@
                     <a:p>
                       <a:pPr algn="ctr"/>
                       <a:r>
-                        <a:rPr lang="en-US" sz="1400" b="0" i="0" dirty="0" err="1" smtClean="0">
+                        <a:rPr lang="en-US" sz="1400" b="0" i="0" dirty="0" err="1">
                           <a:solidFill>
                             <a:srgbClr val="262626"/>
                           </a:solidFill>
@@ -38053,7 +39627,7 @@
                         <a:t>Nghiệp</a:t>
                       </a:r>
                       <a:r>
-                        <a:rPr lang="en-US" sz="1400" b="0" i="0" baseline="0" dirty="0" smtClean="0">
+                        <a:rPr lang="en-US" sz="1400" b="0" i="0" baseline="0" dirty="0">
                           <a:solidFill>
                             <a:srgbClr val="262626"/>
                           </a:solidFill>
@@ -38062,7 +39636,7 @@
                         <a:t> </a:t>
                       </a:r>
                       <a:r>
-                        <a:rPr lang="en-US" sz="1400" b="0" i="0" baseline="0" dirty="0" err="1" smtClean="0">
+                        <a:rPr lang="en-US" sz="1400" b="0" i="0" baseline="0" dirty="0" err="1">
                           <a:solidFill>
                             <a:srgbClr val="262626"/>
                           </a:solidFill>
@@ -38071,7 +39645,7 @@
                         <a:t>vụ</a:t>
                       </a:r>
                       <a:r>
-                        <a:rPr lang="en-US" sz="1400" b="0" i="0" baseline="0" dirty="0" smtClean="0">
+                        <a:rPr lang="en-US" sz="1400" b="0" i="0" baseline="0" dirty="0">
                           <a:solidFill>
                             <a:srgbClr val="262626"/>
                           </a:solidFill>
@@ -38080,7 +39654,7 @@
                         <a:t> </a:t>
                       </a:r>
                       <a:r>
-                        <a:rPr lang="en-US" sz="1400" b="0" i="0" baseline="0" dirty="0" err="1" smtClean="0">
+                        <a:rPr lang="en-US" sz="1400" b="0" i="0" baseline="0" dirty="0" err="1">
                           <a:solidFill>
                             <a:srgbClr val="262626"/>
                           </a:solidFill>
@@ -38124,6 +39698,11 @@
                     </a:solidFill>
                   </a:tcPr>
                 </a:tc>
+                <a:extLst>
+                  <a:ext uri="{0D108BD9-81ED-4DB2-BD59-A6C34878D82A}">
+                    <a16:rowId xmlns:a16="http://schemas.microsoft.com/office/drawing/2014/main" val="10002"/>
+                  </a:ext>
+                </a:extLst>
               </a:tr>
               <a:tr h="566928">
                 <a:tc>
@@ -38196,7 +39775,7 @@
                     <a:p>
                       <a:pPr algn="ctr"/>
                       <a:r>
-                        <a:rPr lang="en-US" sz="1400" b="0" i="0" dirty="0" err="1" smtClean="0">
+                        <a:rPr lang="en-US" sz="1400" b="0" i="0" dirty="0" err="1">
                           <a:solidFill>
                             <a:srgbClr val="262626"/>
                           </a:solidFill>
@@ -38205,7 +39784,7 @@
                         <a:t>Nghiệp</a:t>
                       </a:r>
                       <a:r>
-                        <a:rPr lang="en-US" sz="1400" b="0" i="0" baseline="0" dirty="0" smtClean="0">
+                        <a:rPr lang="en-US" sz="1400" b="0" i="0" baseline="0" dirty="0">
                           <a:solidFill>
                             <a:srgbClr val="262626"/>
                           </a:solidFill>
@@ -38214,7 +39793,7 @@
                         <a:t> </a:t>
                       </a:r>
                       <a:r>
-                        <a:rPr lang="en-US" sz="1400" b="0" i="0" baseline="0" dirty="0" err="1" smtClean="0">
+                        <a:rPr lang="en-US" sz="1400" b="0" i="0" baseline="0" dirty="0" err="1">
                           <a:solidFill>
                             <a:srgbClr val="262626"/>
                           </a:solidFill>
@@ -38223,7 +39802,7 @@
                         <a:t>vụ</a:t>
                       </a:r>
                       <a:r>
-                        <a:rPr lang="en-US" sz="1400" b="0" i="0" baseline="0" dirty="0" smtClean="0">
+                        <a:rPr lang="en-US" sz="1400" b="0" i="0" baseline="0" dirty="0">
                           <a:solidFill>
                             <a:srgbClr val="262626"/>
                           </a:solidFill>
@@ -38232,7 +39811,7 @@
                         <a:t> </a:t>
                       </a:r>
                       <a:r>
-                        <a:rPr lang="en-US" sz="1400" b="0" i="0" baseline="0" dirty="0" err="1" smtClean="0">
+                        <a:rPr lang="en-US" sz="1400" b="0" i="0" baseline="0" dirty="0" err="1">
                           <a:solidFill>
                             <a:srgbClr val="262626"/>
                           </a:solidFill>
@@ -38276,6 +39855,11 @@
                     </a:solidFill>
                   </a:tcPr>
                 </a:tc>
+                <a:extLst>
+                  <a:ext uri="{0D108BD9-81ED-4DB2-BD59-A6C34878D82A}">
+                    <a16:rowId xmlns:a16="http://schemas.microsoft.com/office/drawing/2014/main" val="10003"/>
+                  </a:ext>
+                </a:extLst>
               </a:tr>
               <a:tr h="566928">
                 <a:tc>
@@ -38537,7 +40121,7 @@
                     <a:p>
                       <a:pPr algn="ctr"/>
                       <a:r>
-                        <a:rPr lang="en-US" sz="1400" b="0" i="0" dirty="0" err="1" smtClean="0">
+                        <a:rPr lang="en-US" sz="1400" b="0" i="0" dirty="0" err="1">
                           <a:solidFill>
                             <a:srgbClr val="262626"/>
                           </a:solidFill>
@@ -38546,7 +40130,7 @@
                         <a:t>Định</a:t>
                       </a:r>
                       <a:r>
-                        <a:rPr lang="en-US" sz="1400" b="0" i="0" baseline="0" dirty="0" smtClean="0">
+                        <a:rPr lang="en-US" sz="1400" b="0" i="0" baseline="0" dirty="0">
                           <a:solidFill>
                             <a:srgbClr val="262626"/>
                           </a:solidFill>
@@ -38555,7 +40139,7 @@
                         <a:t> </a:t>
                       </a:r>
                       <a:r>
-                        <a:rPr lang="en-US" sz="1400" b="0" i="0" baseline="0" dirty="0" err="1" smtClean="0">
+                        <a:rPr lang="en-US" sz="1400" b="0" i="0" baseline="0" dirty="0" err="1">
                           <a:solidFill>
                             <a:srgbClr val="262626"/>
                           </a:solidFill>
@@ -38605,6 +40189,11 @@
                     </a:solidFill>
                   </a:tcPr>
                 </a:tc>
+                <a:extLst>
+                  <a:ext uri="{0D108BD9-81ED-4DB2-BD59-A6C34878D82A}">
+                    <a16:rowId xmlns:a16="http://schemas.microsoft.com/office/drawing/2014/main" val="10004"/>
+                  </a:ext>
+                </a:extLst>
               </a:tr>
             </a:tbl>
           </a:graphicData>
@@ -38657,7 +40246,7 @@
           <a:p>
             <a:pPr algn="ctr"/>
             <a:r>
-              <a:rPr lang="en-US" sz="1600" dirty="0" err="1" smtClean="0">
+              <a:rPr lang="en-US" sz="1600" dirty="0" err="1">
                 <a:solidFill>
                   <a:srgbClr val="7F6000"/>
                 </a:solidFill>
@@ -38666,7 +40255,7 @@
               <a:t>Bộ</a:t>
             </a:r>
             <a:r>
-              <a:rPr lang="en-US" sz="1600" dirty="0" smtClean="0">
+              <a:rPr lang="en-US" sz="1600" dirty="0">
                 <a:solidFill>
                   <a:srgbClr val="7F6000"/>
                 </a:solidFill>
@@ -38675,7 +40264,7 @@
               <a:t> </a:t>
             </a:r>
             <a:r>
-              <a:rPr lang="en-US" sz="1600" dirty="0" err="1" smtClean="0">
+              <a:rPr lang="en-US" sz="1600" dirty="0" err="1">
                 <a:solidFill>
                   <a:srgbClr val="7F6000"/>
                 </a:solidFill>
@@ -38684,7 +40273,7 @@
               <a:t>phận</a:t>
             </a:r>
             <a:r>
-              <a:rPr lang="en-US" sz="1600" dirty="0" smtClean="0">
+              <a:rPr lang="en-US" sz="1600" dirty="0">
                 <a:solidFill>
                   <a:srgbClr val="7F6000"/>
                 </a:solidFill>
@@ -38693,7 +40282,7 @@
               <a:t> </a:t>
             </a:r>
             <a:r>
-              <a:rPr lang="en-US" sz="1600" dirty="0" err="1" smtClean="0">
+              <a:rPr lang="en-US" sz="1600" dirty="0" err="1">
                 <a:solidFill>
                   <a:srgbClr val="7F6000"/>
                 </a:solidFill>
@@ -38702,7 +40291,7 @@
               <a:t>định</a:t>
             </a:r>
             <a:r>
-              <a:rPr lang="en-US" sz="1600" dirty="0" smtClean="0">
+              <a:rPr lang="en-US" sz="1600" dirty="0">
                 <a:solidFill>
                   <a:srgbClr val="7F6000"/>
                 </a:solidFill>
@@ -38711,7 +40300,7 @@
               <a:t> </a:t>
             </a:r>
             <a:r>
-              <a:rPr lang="en-US" sz="1600" dirty="0" err="1" smtClean="0">
+              <a:rPr lang="en-US" sz="1600" dirty="0" err="1">
                 <a:solidFill>
                   <a:srgbClr val="7F6000"/>
                 </a:solidFill>
@@ -38720,7 +40309,7 @@
               <a:t>phí</a:t>
             </a:r>
             <a:r>
-              <a:rPr lang="en-US" sz="1600" dirty="0" smtClean="0">
+              <a:rPr lang="en-US" sz="1600" dirty="0">
                 <a:solidFill>
                   <a:srgbClr val="7F6000"/>
                 </a:solidFill>
@@ -38729,7 +40318,7 @@
               <a:t> </a:t>
             </a:r>
             <a:r>
-              <a:rPr lang="en-US" sz="1600" dirty="0" err="1" smtClean="0">
+              <a:rPr lang="en-US" sz="1600" dirty="0" err="1">
                 <a:solidFill>
                   <a:srgbClr val="7F6000"/>
                 </a:solidFill>
@@ -38738,7 +40327,7 @@
               <a:t>cần</a:t>
             </a:r>
             <a:r>
-              <a:rPr lang="en-US" sz="1600" dirty="0" smtClean="0">
+              <a:rPr lang="en-US" sz="1600" dirty="0">
                 <a:solidFill>
                   <a:srgbClr val="7F6000"/>
                 </a:solidFill>
@@ -38747,7 +40336,7 @@
               <a:t> </a:t>
             </a:r>
             <a:r>
-              <a:rPr lang="en-US" sz="1600" dirty="0" err="1" smtClean="0">
+              <a:rPr lang="en-US" sz="1600" dirty="0" err="1">
                 <a:solidFill>
                   <a:srgbClr val="7F6000"/>
                 </a:solidFill>
@@ -38756,7 +40345,7 @@
               <a:t>dữ</a:t>
             </a:r>
             <a:r>
-              <a:rPr lang="en-US" sz="1600" dirty="0" smtClean="0">
+              <a:rPr lang="en-US" sz="1600" dirty="0">
                 <a:solidFill>
                   <a:srgbClr val="7F6000"/>
                 </a:solidFill>
@@ -38765,7 +40354,7 @@
               <a:t> </a:t>
             </a:r>
             <a:r>
-              <a:rPr lang="en-US" sz="1600" dirty="0" err="1" smtClean="0">
+              <a:rPr lang="en-US" sz="1600" dirty="0" err="1">
                 <a:solidFill>
                   <a:srgbClr val="7F6000"/>
                 </a:solidFill>
@@ -38774,7 +40363,7 @@
               <a:t>liệu</a:t>
             </a:r>
             <a:r>
-              <a:rPr lang="en-US" sz="1600" dirty="0" smtClean="0">
+              <a:rPr lang="en-US" sz="1600" dirty="0">
                 <a:solidFill>
                   <a:srgbClr val="7F6000"/>
                 </a:solidFill>
@@ -38783,7 +40372,7 @@
               <a:t> </a:t>
             </a:r>
             <a:r>
-              <a:rPr lang="en-US" sz="1600" dirty="0" err="1" smtClean="0">
+              <a:rPr lang="en-US" sz="1600" dirty="0" err="1">
                 <a:solidFill>
                   <a:srgbClr val="7F6000"/>
                 </a:solidFill>
@@ -38792,7 +40381,7 @@
               <a:t>sạch</a:t>
             </a:r>
             <a:r>
-              <a:rPr lang="en-US" sz="1600" dirty="0" smtClean="0">
+              <a:rPr lang="en-US" sz="1600" dirty="0">
                 <a:solidFill>
                   <a:srgbClr val="7F6000"/>
                 </a:solidFill>
@@ -38801,7 +40390,7 @@
               <a:t> </a:t>
             </a:r>
             <a:r>
-              <a:rPr lang="en-US" sz="1600" dirty="0" err="1" smtClean="0">
+              <a:rPr lang="en-US" sz="1600" dirty="0" err="1">
                 <a:solidFill>
                   <a:srgbClr val="7F6000"/>
                 </a:solidFill>
@@ -38810,7 +40399,7 @@
               <a:t>để</a:t>
             </a:r>
             <a:r>
-              <a:rPr lang="en-US" sz="1600" dirty="0" smtClean="0">
+              <a:rPr lang="en-US" sz="1600" dirty="0">
                 <a:solidFill>
                   <a:srgbClr val="7F6000"/>
                 </a:solidFill>
@@ -38819,7 +40408,7 @@
               <a:t> </a:t>
             </a:r>
             <a:r>
-              <a:rPr lang="en-US" sz="1600" dirty="0" err="1" smtClean="0">
+              <a:rPr lang="en-US" sz="1600" dirty="0" err="1">
                 <a:solidFill>
                   <a:srgbClr val="7F6000"/>
                 </a:solidFill>
@@ -38828,7 +40417,7 @@
               <a:t>đưa</a:t>
             </a:r>
             <a:r>
-              <a:rPr lang="en-US" sz="1600" dirty="0" smtClean="0">
+              <a:rPr lang="en-US" sz="1600" dirty="0">
                 <a:solidFill>
                   <a:srgbClr val="7F6000"/>
                 </a:solidFill>
@@ -38837,7 +40426,7 @@
               <a:t> </a:t>
             </a:r>
             <a:r>
-              <a:rPr lang="en-US" sz="1600" dirty="0" err="1" smtClean="0">
+              <a:rPr lang="en-US" sz="1600" dirty="0" err="1">
                 <a:solidFill>
                   <a:srgbClr val="7F6000"/>
                 </a:solidFill>
@@ -38846,7 +40435,7 @@
               <a:t>vào</a:t>
             </a:r>
             <a:r>
-              <a:rPr lang="en-US" sz="1600" dirty="0" smtClean="0">
+              <a:rPr lang="en-US" sz="1600" dirty="0">
                 <a:solidFill>
                   <a:srgbClr val="7F6000"/>
                 </a:solidFill>
@@ -38855,7 +40444,7 @@
               <a:t> model </a:t>
             </a:r>
             <a:r>
-              <a:rPr lang="en-US" sz="1600" dirty="0" err="1" smtClean="0">
+              <a:rPr lang="en-US" sz="1600" dirty="0" err="1">
                 <a:solidFill>
                   <a:srgbClr val="7F6000"/>
                 </a:solidFill>
@@ -38864,7 +40453,7 @@
               <a:t>dự</a:t>
             </a:r>
             <a:r>
-              <a:rPr lang="en-US" sz="1600" dirty="0" smtClean="0">
+              <a:rPr lang="en-US" sz="1600" dirty="0">
                 <a:solidFill>
                   <a:srgbClr val="7F6000"/>
                 </a:solidFill>
@@ -38873,7 +40462,7 @@
               <a:t> </a:t>
             </a:r>
             <a:r>
-              <a:rPr lang="en-US" sz="1600" dirty="0" err="1" smtClean="0">
+              <a:rPr lang="en-US" sz="1600" dirty="0" err="1">
                 <a:solidFill>
                   <a:srgbClr val="7F6000"/>
                 </a:solidFill>
@@ -38882,7 +40471,7 @@
               <a:t>đoán</a:t>
             </a:r>
             <a:r>
-              <a:rPr lang="en-US" sz="1600" dirty="0" smtClean="0">
+              <a:rPr lang="en-US" sz="1600" dirty="0">
                 <a:solidFill>
                   <a:srgbClr val="7F6000"/>
                 </a:solidFill>
@@ -38891,7 +40480,7 @@
               <a:t> </a:t>
             </a:r>
             <a:r>
-              <a:rPr lang="en-US" sz="1600" dirty="0" err="1" smtClean="0">
+              <a:rPr lang="en-US" sz="1600" dirty="0" err="1">
                 <a:solidFill>
                   <a:srgbClr val="7F6000"/>
                 </a:solidFill>
@@ -38900,7 +40489,7 @@
               <a:t>giá</a:t>
             </a:r>
             <a:r>
-              <a:rPr lang="en-US" sz="1600" dirty="0" smtClean="0">
+              <a:rPr lang="en-US" sz="1600" dirty="0">
                 <a:solidFill>
                   <a:srgbClr val="7F6000"/>
                 </a:solidFill>
@@ -38909,7 +40498,7 @@
               <a:t> </a:t>
             </a:r>
             <a:r>
-              <a:rPr lang="en-US" sz="1600" dirty="0" err="1" smtClean="0">
+              <a:rPr lang="en-US" sz="1600" dirty="0" err="1">
                 <a:solidFill>
                   <a:srgbClr val="7F6000"/>
                 </a:solidFill>
@@ -38918,7 +40507,7 @@
               <a:t>trị</a:t>
             </a:r>
             <a:r>
-              <a:rPr lang="en-US" sz="1600" dirty="0" smtClean="0">
+              <a:rPr lang="en-US" sz="1600" dirty="0">
                 <a:solidFill>
                   <a:srgbClr val="7F6000"/>
                 </a:solidFill>
@@ -38927,7 +40516,7 @@
               <a:t> </a:t>
             </a:r>
             <a:r>
-              <a:rPr lang="en-US" sz="1600" dirty="0" err="1" smtClean="0">
+              <a:rPr lang="en-US" sz="1600" dirty="0" err="1">
                 <a:solidFill>
                   <a:srgbClr val="7F6000"/>
                 </a:solidFill>
@@ -38936,7 +40525,7 @@
               <a:t>xe</a:t>
             </a:r>
             <a:r>
-              <a:rPr lang="en-US" sz="1600" dirty="0" smtClean="0">
+              <a:rPr lang="en-US" sz="1600" dirty="0">
                 <a:solidFill>
                   <a:srgbClr val="7F6000"/>
                 </a:solidFill>
@@ -38945,7 +40534,7 @@
               <a:t>. </a:t>
             </a:r>
             <a:r>
-              <a:rPr lang="en-US" sz="1600" dirty="0" err="1" smtClean="0">
+              <a:rPr lang="en-US" sz="1600" dirty="0" err="1">
                 <a:solidFill>
                   <a:srgbClr val="7F6000"/>
                 </a:solidFill>
@@ -38954,7 +40543,7 @@
               <a:t>Độ</a:t>
             </a:r>
             <a:r>
-              <a:rPr lang="en-US" sz="1600" dirty="0" smtClean="0">
+              <a:rPr lang="en-US" sz="1600" dirty="0">
                 <a:solidFill>
                   <a:srgbClr val="7F6000"/>
                 </a:solidFill>
@@ -38963,7 +40552,7 @@
               <a:t> </a:t>
             </a:r>
             <a:r>
-              <a:rPr lang="en-US" sz="1600" dirty="0" err="1" smtClean="0">
+              <a:rPr lang="en-US" sz="1600" dirty="0" err="1">
                 <a:solidFill>
                   <a:srgbClr val="7F6000"/>
                 </a:solidFill>
@@ -38972,7 +40561,7 @@
               <a:t>trễ</a:t>
             </a:r>
             <a:r>
-              <a:rPr lang="en-US" sz="1600" dirty="0" smtClean="0">
+              <a:rPr lang="en-US" sz="1600" dirty="0">
                 <a:solidFill>
                   <a:srgbClr val="7F6000"/>
                 </a:solidFill>
@@ -38981,7 +40570,7 @@
               <a:t> </a:t>
             </a:r>
             <a:r>
-              <a:rPr lang="en-US" sz="1600" dirty="0" err="1" smtClean="0">
+              <a:rPr lang="en-US" sz="1600" dirty="0" err="1">
                 <a:solidFill>
                   <a:srgbClr val="7F6000"/>
                 </a:solidFill>
@@ -38990,7 +40579,7 @@
               <a:t>cho</a:t>
             </a:r>
             <a:r>
-              <a:rPr lang="en-US" sz="1600" dirty="0" smtClean="0">
+              <a:rPr lang="en-US" sz="1600" dirty="0">
                 <a:solidFill>
                   <a:srgbClr val="7F6000"/>
                 </a:solidFill>
@@ -38999,7 +40588,7 @@
               <a:t> </a:t>
             </a:r>
             <a:r>
-              <a:rPr lang="en-US" sz="1600" dirty="0" err="1" smtClean="0">
+              <a:rPr lang="en-US" sz="1600" dirty="0" err="1">
                 <a:solidFill>
                   <a:srgbClr val="7F6000"/>
                 </a:solidFill>
@@ -39008,7 +40597,7 @@
               <a:t>phép</a:t>
             </a:r>
             <a:r>
-              <a:rPr lang="en-US" sz="1600" dirty="0" smtClean="0">
+              <a:rPr lang="en-US" sz="1600" dirty="0">
                 <a:solidFill>
                   <a:srgbClr val="7F6000"/>
                 </a:solidFill>
@@ -39017,7 +40606,7 @@
               <a:t> 1 </a:t>
             </a:r>
             <a:r>
-              <a:rPr lang="en-US" sz="1600" dirty="0" err="1" smtClean="0">
+              <a:rPr lang="en-US" sz="1600" dirty="0" err="1">
                 <a:solidFill>
                   <a:srgbClr val="7F6000"/>
                 </a:solidFill>
@@ -39035,7 +40624,7 @@
               <a:t> </a:t>
             </a:r>
             <a:r>
-              <a:rPr lang="en-US" sz="1600" dirty="0" err="1" smtClean="0">
+              <a:rPr lang="en-US" sz="1600" dirty="0" err="1">
                 <a:solidFill>
                   <a:srgbClr val="7F6000"/>
                 </a:solidFill>
@@ -39044,7 +40633,7 @@
               <a:t>và</a:t>
             </a:r>
             <a:r>
-              <a:rPr lang="en-US" sz="1600" dirty="0" smtClean="0">
+              <a:rPr lang="en-US" sz="1600" dirty="0">
                 <a:solidFill>
                   <a:srgbClr val="7F6000"/>
                 </a:solidFill>
@@ -39053,7 +40642,7 @@
               <a:t> +/- so </a:t>
             </a:r>
             <a:r>
-              <a:rPr lang="en-US" sz="1600" dirty="0" err="1" smtClean="0">
+              <a:rPr lang="en-US" sz="1600" dirty="0" err="1">
                 <a:solidFill>
                   <a:srgbClr val="7F6000"/>
                 </a:solidFill>
@@ -39062,7 +40651,7 @@
               <a:t>với</a:t>
             </a:r>
             <a:r>
-              <a:rPr lang="en-US" sz="1600" dirty="0" smtClean="0">
+              <a:rPr lang="en-US" sz="1600" dirty="0">
                 <a:solidFill>
                   <a:srgbClr val="7F6000"/>
                 </a:solidFill>
@@ -39071,7 +40660,7 @@
               <a:t> </a:t>
             </a:r>
             <a:r>
-              <a:rPr lang="en-US" sz="1600" dirty="0" err="1" smtClean="0">
+              <a:rPr lang="en-US" sz="1600" dirty="0" err="1">
                 <a:solidFill>
                   <a:srgbClr val="7F6000"/>
                 </a:solidFill>
@@ -39080,7 +40669,7 @@
               <a:t>thị</a:t>
             </a:r>
             <a:r>
-              <a:rPr lang="en-US" sz="1600" dirty="0" smtClean="0">
+              <a:rPr lang="en-US" sz="1600" dirty="0">
                 <a:solidFill>
                   <a:srgbClr val="7F6000"/>
                 </a:solidFill>
@@ -39089,7 +40678,7 @@
               <a:t> </a:t>
             </a:r>
             <a:r>
-              <a:rPr lang="en-US" sz="1600" dirty="0" err="1" smtClean="0">
+              <a:rPr lang="en-US" sz="1600" dirty="0" err="1">
                 <a:solidFill>
                   <a:srgbClr val="7F6000"/>
                 </a:solidFill>
@@ -39098,7 +40687,7 @@
               <a:t>trường</a:t>
             </a:r>
             <a:r>
-              <a:rPr lang="en-US" sz="1600" dirty="0" smtClean="0">
+              <a:rPr lang="en-US" sz="1600" dirty="0">
                 <a:solidFill>
                   <a:srgbClr val="7F6000"/>
                 </a:solidFill>
@@ -39107,7 +40696,7 @@
               <a:t> </a:t>
             </a:r>
             <a:r>
-              <a:rPr lang="en-US" sz="1600" dirty="0" err="1" smtClean="0">
+              <a:rPr lang="en-US" sz="1600" dirty="0" err="1">
                 <a:solidFill>
                   <a:srgbClr val="7F6000"/>
                 </a:solidFill>
@@ -39116,7 +40705,7 @@
               <a:t>khoảng</a:t>
             </a:r>
             <a:r>
-              <a:rPr lang="en-US" sz="1600" dirty="0" smtClean="0">
+              <a:rPr lang="en-US" sz="1600" dirty="0">
                 <a:solidFill>
                   <a:srgbClr val="7F6000"/>
                 </a:solidFill>
@@ -39425,7 +41014,7 @@
                   </a:rPr>
                   <a:t>Pipeline </a:t>
                 </a:r>
-                <a:endParaRPr lang="en-US" sz="1500" b="1" i="0" dirty="0" smtClean="0">
+                <a:endParaRPr lang="en-US" sz="1500" b="1" i="0" dirty="0">
                   <a:solidFill>
                     <a:srgbClr val="262626"/>
                   </a:solidFill>
@@ -39435,22 +41024,13 @@
               <a:p>
                 <a:pPr algn="ctr"/>
                 <a:r>
-                  <a:rPr sz="1300" b="0" i="0" dirty="0" smtClean="0">
-                    <a:solidFill>
-                      <a:srgbClr val="262626"/>
-                    </a:solidFill>
-                    <a:latin typeface="Times New Roman"/>
-                  </a:rPr>
-                  <a:t>Landing </a:t>
-                </a:r>
-                <a:r>
                   <a:rPr sz="1300" b="0" i="0" dirty="0">
                     <a:solidFill>
                       <a:srgbClr val="262626"/>
                     </a:solidFill>
                     <a:latin typeface="Times New Roman"/>
                   </a:rPr>
-                  <a:t>→ Bronze → Silver → Gold</a:t>
+                  <a:t>Landing → Bronze → Silver → Gold</a:t>
                 </a:r>
               </a:p>
             </p:txBody>
@@ -39594,7 +41174,7 @@
               <a:t> </a:t>
             </a:r>
             <a:r>
-              <a:rPr sz="2000" b="1" i="0" dirty="0" err="1" smtClean="0">
+              <a:rPr sz="2000" b="1" i="0" dirty="0" err="1">
                 <a:solidFill>
                   <a:srgbClr val="0070C0"/>
                 </a:solidFill>
@@ -39603,7 +41183,7 @@
               <a:t>địn</a:t>
             </a:r>
             <a:r>
-              <a:rPr lang="en-US" sz="2000" b="1" i="0" dirty="0" err="1" smtClean="0">
+              <a:rPr lang="en-US" sz="2000" b="1" i="0" dirty="0" err="1">
                 <a:solidFill>
                   <a:srgbClr val="0070C0"/>
                 </a:solidFill>
@@ -39759,7 +41339,7 @@
               <a:t> </a:t>
             </a:r>
             <a:r>
-              <a:rPr lang="en-US" sz="1600" b="0" i="0" dirty="0" smtClean="0">
+              <a:rPr lang="en-US" sz="1600" b="0" i="0" dirty="0">
                 <a:solidFill>
                   <a:srgbClr val="262626"/>
                 </a:solidFill>
@@ -39768,7 +41348,7 @@
               <a:t>(</a:t>
             </a:r>
             <a:r>
-              <a:rPr sz="1600" b="0" i="0" dirty="0" smtClean="0">
+              <a:rPr sz="1600" b="0" i="0" dirty="0">
                 <a:solidFill>
                   <a:srgbClr val="262626"/>
                 </a:solidFill>
@@ -39777,7 +41357,7 @@
               <a:t>data contract</a:t>
             </a:r>
             <a:r>
-              <a:rPr lang="en-US" sz="1600" b="0" i="0" dirty="0" smtClean="0">
+              <a:rPr lang="en-US" sz="1600" b="0" i="0" dirty="0">
                 <a:solidFill>
                   <a:srgbClr val="262626"/>
                 </a:solidFill>
@@ -39786,7 +41366,7 @@
               <a:t>)</a:t>
             </a:r>
             <a:r>
-              <a:rPr sz="1600" b="0" i="0" dirty="0" smtClean="0">
+              <a:rPr sz="1600" b="0" i="0" dirty="0">
                 <a:solidFill>
                   <a:srgbClr val="262626"/>
                 </a:solidFill>
@@ -40275,7 +41855,7 @@
               <a:t> </a:t>
             </a:r>
             <a:r>
-              <a:rPr lang="en-US" sz="1600" b="0" i="0" dirty="0" smtClean="0">
+              <a:rPr lang="en-US" sz="1600" b="0" i="0" dirty="0">
                 <a:solidFill>
                   <a:srgbClr val="262626"/>
                 </a:solidFill>
@@ -40284,7 +41864,7 @@
               <a:t>,</a:t>
             </a:r>
             <a:r>
-              <a:rPr sz="1600" b="0" i="0" dirty="0" smtClean="0">
+              <a:rPr sz="1600" b="0" i="0" dirty="0">
                 <a:solidFill>
                   <a:srgbClr val="262626"/>
                 </a:solidFill>
@@ -40326,19 +41906,10 @@
                 </a:solidFill>
                 <a:latin typeface="Times New Roman"/>
               </a:rPr>
-              <a:t> </a:t>
-            </a:r>
-            <a:r>
-              <a:rPr sz="1600" b="0" i="0" dirty="0" smtClean="0">
-                <a:solidFill>
-                  <a:srgbClr val="262626"/>
-                </a:solidFill>
-                <a:latin typeface="Times New Roman"/>
-              </a:rPr>
-              <a:t>model</a:t>
-            </a:r>
-            <a:r>
-              <a:rPr lang="en-US" sz="1600" b="0" i="0" dirty="0" smtClean="0">
+              <a:t> model</a:t>
+            </a:r>
+            <a:r>
+              <a:rPr lang="en-US" sz="1600" b="0" i="0" dirty="0">
                 <a:solidFill>
                   <a:srgbClr val="262626"/>
                 </a:solidFill>
@@ -40347,7 +41918,7 @@
               <a:t>, </a:t>
             </a:r>
             <a:r>
-              <a:rPr sz="1600" b="0" i="0" dirty="0" smtClean="0">
+              <a:rPr sz="1600" b="0" i="0" dirty="0">
                 <a:solidFill>
                   <a:srgbClr val="262626"/>
                 </a:solidFill>
@@ -40356,7 +41927,7 @@
               <a:t>dashboard </a:t>
             </a:r>
             <a:r>
-              <a:rPr lang="en-US" sz="1600" b="0" i="0" dirty="0" smtClean="0">
+              <a:rPr lang="en-US" sz="1600" b="0" i="0" dirty="0">
                 <a:solidFill>
                   <a:srgbClr val="262626"/>
                 </a:solidFill>
@@ -40365,7 +41936,7 @@
               <a:t>,</a:t>
             </a:r>
             <a:r>
-              <a:rPr sz="1600" b="0" i="0" dirty="0" smtClean="0">
+              <a:rPr sz="1600" b="0" i="0" dirty="0">
                 <a:solidFill>
                   <a:srgbClr val="262626"/>
                 </a:solidFill>
@@ -40830,7 +42401,7 @@
               <a:t>tiếp</a:t>
             </a:r>
             <a:r>
-              <a:rPr sz="1600" b="0" i="0" dirty="0" smtClean="0">
+              <a:rPr sz="1600" b="0" i="0" dirty="0">
                 <a:solidFill>
                   <a:srgbClr val="262626"/>
                 </a:solidFill>
@@ -40838,12 +42409,6 @@
               </a:rPr>
               <a:t>.</a:t>
             </a:r>
-            <a:endParaRPr sz="1600" b="0" i="0" dirty="0">
-              <a:solidFill>
-                <a:srgbClr val="262626"/>
-              </a:solidFill>
-              <a:latin typeface="Times New Roman"/>
-            </a:endParaRPr>
           </a:p>
         </p:txBody>
       </p:sp>
@@ -41269,7 +42834,7 @@
           <a:p>
             <a:pPr algn="l"/>
             <a:r>
-              <a:rPr lang="en-US" sz="2000" b="0" i="0" dirty="0" err="1" smtClean="0">
+              <a:rPr lang="en-US" sz="2000" b="0" i="0" dirty="0" err="1">
                 <a:solidFill>
                   <a:srgbClr val="7F6000"/>
                 </a:solidFill>
@@ -41278,7 +42843,7 @@
               <a:t>Mục</a:t>
             </a:r>
             <a:r>
-              <a:rPr lang="en-US" sz="2000" b="0" i="0" dirty="0" smtClean="0">
+              <a:rPr lang="en-US" sz="2000" b="0" i="0" dirty="0">
                 <a:solidFill>
                   <a:srgbClr val="7F6000"/>
                 </a:solidFill>
@@ -41287,7 +42852,7 @@
               <a:t> </a:t>
             </a:r>
             <a:r>
-              <a:rPr lang="en-US" sz="2000" b="0" i="0" dirty="0" err="1" smtClean="0">
+              <a:rPr lang="en-US" sz="2000" b="0" i="0" dirty="0" err="1">
                 <a:solidFill>
                   <a:srgbClr val="7F6000"/>
                 </a:solidFill>
@@ -41296,7 +42861,7 @@
               <a:t>tiêu</a:t>
             </a:r>
             <a:r>
-              <a:rPr lang="en-US" sz="2000" b="0" i="0" dirty="0" smtClean="0">
+              <a:rPr lang="en-US" sz="2000" b="0" i="0" dirty="0">
                 <a:solidFill>
                   <a:srgbClr val="7F6000"/>
                 </a:solidFill>
@@ -41305,7 +42870,7 @@
               <a:t> </a:t>
             </a:r>
             <a:r>
-              <a:rPr lang="en-US" sz="2000" b="0" i="0" dirty="0" err="1" smtClean="0">
+              <a:rPr lang="en-US" sz="2000" b="0" i="0" dirty="0" err="1">
                 <a:solidFill>
                   <a:srgbClr val="7F6000"/>
                 </a:solidFill>
@@ -41314,7 +42879,7 @@
               <a:t>xây</a:t>
             </a:r>
             <a:r>
-              <a:rPr lang="en-US" sz="2000" b="0" i="0" dirty="0" smtClean="0">
+              <a:rPr lang="en-US" sz="2000" b="0" i="0" dirty="0">
                 <a:solidFill>
                   <a:srgbClr val="7F6000"/>
                 </a:solidFill>
@@ -41323,7 +42888,7 @@
               <a:t> </a:t>
             </a:r>
             <a:r>
-              <a:rPr lang="en-US" sz="2000" b="0" i="0" dirty="0" err="1" smtClean="0">
+              <a:rPr lang="en-US" sz="2000" b="0" i="0" dirty="0" err="1">
                 <a:solidFill>
                   <a:srgbClr val="7F6000"/>
                 </a:solidFill>
@@ -41332,7 +42897,7 @@
               <a:t>dựng</a:t>
             </a:r>
             <a:r>
-              <a:rPr lang="en-US" sz="2000" b="0" i="0" dirty="0" smtClean="0">
+              <a:rPr lang="en-US" sz="2000" b="0" i="0" dirty="0">
                 <a:solidFill>
                   <a:srgbClr val="7F6000"/>
                 </a:solidFill>
@@ -41341,7 +42906,7 @@
               <a:t> data pipeline </a:t>
             </a:r>
             <a:r>
-              <a:rPr lang="en-US" sz="2000" b="0" i="0" dirty="0" err="1" smtClean="0">
+              <a:rPr lang="en-US" sz="2000" b="0" i="0" dirty="0" err="1">
                 <a:solidFill>
                   <a:srgbClr val="7F6000"/>
                 </a:solidFill>
@@ -41350,7 +42915,7 @@
               <a:t>kết</a:t>
             </a:r>
             <a:r>
-              <a:rPr lang="en-US" sz="2000" b="0" i="0" dirty="0" smtClean="0">
+              <a:rPr lang="en-US" sz="2000" b="0" i="0" dirty="0">
                 <a:solidFill>
                   <a:srgbClr val="7F6000"/>
                 </a:solidFill>
@@ -41359,7 +42924,7 @@
               <a:t> </a:t>
             </a:r>
             <a:r>
-              <a:rPr lang="en-US" sz="2000" b="0" i="0" dirty="0" err="1" smtClean="0">
+              <a:rPr lang="en-US" sz="2000" b="0" i="0" dirty="0" err="1">
                 <a:solidFill>
                   <a:srgbClr val="7F6000"/>
                 </a:solidFill>
@@ -41368,7 +42933,7 @@
               <a:t>hợp</a:t>
             </a:r>
             <a:r>
-              <a:rPr lang="en-US" sz="2000" b="0" i="0" dirty="0" smtClean="0">
+              <a:rPr lang="en-US" sz="2000" b="0" i="0" dirty="0">
                 <a:solidFill>
                   <a:srgbClr val="7F6000"/>
                 </a:solidFill>
@@ -41377,7 +42942,7 @@
               <a:t> </a:t>
             </a:r>
             <a:r>
-              <a:rPr lang="en-US" sz="2000" b="0" i="0" dirty="0" err="1" smtClean="0">
+              <a:rPr lang="en-US" sz="2000" b="0" i="0" dirty="0" err="1">
                 <a:solidFill>
                   <a:srgbClr val="7F6000"/>
                 </a:solidFill>
@@ -41386,7 +42951,7 @@
               <a:t>mô</a:t>
             </a:r>
             <a:r>
-              <a:rPr lang="en-US" sz="2000" b="0" i="0" dirty="0" smtClean="0">
+              <a:rPr lang="en-US" sz="2000" b="0" i="0" dirty="0">
                 <a:solidFill>
                   <a:srgbClr val="7F6000"/>
                 </a:solidFill>
@@ -41395,7 +42960,7 @@
               <a:t> </a:t>
             </a:r>
             <a:r>
-              <a:rPr lang="en-US" sz="2000" b="0" i="0" dirty="0" err="1" smtClean="0">
+              <a:rPr lang="en-US" sz="2000" b="0" i="0" dirty="0" err="1">
                 <a:solidFill>
                   <a:srgbClr val="7F6000"/>
                 </a:solidFill>
@@ -41404,7 +42969,7 @@
               <a:t>hình</a:t>
             </a:r>
             <a:r>
-              <a:rPr lang="en-US" sz="2000" b="0" i="0" dirty="0" smtClean="0">
+              <a:rPr lang="en-US" sz="2000" b="0" i="0" dirty="0">
                 <a:solidFill>
                   <a:srgbClr val="7F6000"/>
                 </a:solidFill>
@@ -41413,7 +42978,7 @@
               <a:t> </a:t>
             </a:r>
             <a:r>
-              <a:rPr lang="en-US" sz="2000" b="0" i="0" dirty="0" err="1" smtClean="0">
+              <a:rPr lang="en-US" sz="2000" b="0" i="0" dirty="0" err="1">
                 <a:solidFill>
                   <a:srgbClr val="7F6000"/>
                 </a:solidFill>
@@ -41422,7 +42987,7 @@
               <a:t>dự</a:t>
             </a:r>
             <a:r>
-              <a:rPr lang="en-US" sz="2000" b="0" i="0" dirty="0" smtClean="0">
+              <a:rPr lang="en-US" sz="2000" b="0" i="0" dirty="0">
                 <a:solidFill>
                   <a:srgbClr val="7F6000"/>
                 </a:solidFill>
@@ -41431,7 +42996,7 @@
               <a:t> </a:t>
             </a:r>
             <a:r>
-              <a:rPr lang="en-US" sz="2000" b="0" i="0" dirty="0" err="1" smtClean="0">
+              <a:rPr lang="en-US" sz="2000" b="0" i="0" dirty="0" err="1">
                 <a:solidFill>
                   <a:srgbClr val="7F6000"/>
                 </a:solidFill>
@@ -41440,7 +43005,7 @@
               <a:t>đoán</a:t>
             </a:r>
             <a:r>
-              <a:rPr lang="en-US" sz="2000" b="0" i="0" dirty="0" smtClean="0">
+              <a:rPr lang="en-US" sz="2000" b="0" i="0" dirty="0">
                 <a:solidFill>
                   <a:srgbClr val="7F6000"/>
                 </a:solidFill>
@@ -41449,7 +43014,7 @@
               <a:t> </a:t>
             </a:r>
             <a:r>
-              <a:rPr lang="en-US" sz="2000" b="0" i="0" dirty="0" err="1" smtClean="0">
+              <a:rPr lang="en-US" sz="2000" b="0" i="0" dirty="0" err="1">
                 <a:solidFill>
                   <a:srgbClr val="7F6000"/>
                 </a:solidFill>
@@ -41458,7 +43023,7 @@
               <a:t>nhầm</a:t>
             </a:r>
             <a:r>
-              <a:rPr lang="en-US" sz="2000" b="0" i="0" dirty="0" smtClean="0">
+              <a:rPr lang="en-US" sz="2000" b="0" i="0" dirty="0">
                 <a:solidFill>
                   <a:srgbClr val="7F6000"/>
                 </a:solidFill>
@@ -41467,7 +43032,7 @@
               <a:t> </a:t>
             </a:r>
             <a:r>
-              <a:rPr lang="en-US" sz="2000" b="0" i="0" dirty="0" err="1" smtClean="0">
+              <a:rPr lang="en-US" sz="2000" b="0" i="0" dirty="0" err="1">
                 <a:solidFill>
                   <a:srgbClr val="7F6000"/>
                 </a:solidFill>
@@ -41476,7 +43041,7 @@
               <a:t>đáp</a:t>
             </a:r>
             <a:r>
-              <a:rPr lang="en-US" sz="2000" b="0" i="0" dirty="0" smtClean="0">
+              <a:rPr lang="en-US" sz="2000" b="0" i="0" dirty="0">
                 <a:solidFill>
                   <a:srgbClr val="7F6000"/>
                 </a:solidFill>
@@ -41485,7 +43050,7 @@
               <a:t> </a:t>
             </a:r>
             <a:r>
-              <a:rPr lang="en-US" sz="2000" b="0" i="0" dirty="0" err="1" smtClean="0">
+              <a:rPr lang="en-US" sz="2000" b="0" i="0" dirty="0" err="1">
                 <a:solidFill>
                   <a:srgbClr val="7F6000"/>
                 </a:solidFill>
@@ -41494,7 +43059,7 @@
               <a:t>ứng</a:t>
             </a:r>
             <a:r>
-              <a:rPr lang="en-US" sz="2000" b="0" i="0" dirty="0" smtClean="0">
+              <a:rPr lang="en-US" sz="2000" b="0" i="0" dirty="0">
                 <a:solidFill>
                   <a:srgbClr val="7F6000"/>
                 </a:solidFill>
@@ -41503,7 +43068,7 @@
               <a:t> </a:t>
             </a:r>
             <a:r>
-              <a:rPr lang="en-US" sz="2000" b="0" i="0" dirty="0" err="1" smtClean="0">
+              <a:rPr lang="en-US" sz="2000" b="0" i="0" dirty="0" err="1">
                 <a:solidFill>
                   <a:srgbClr val="7F6000"/>
                 </a:solidFill>
@@ -41512,7 +43077,7 @@
               <a:t>nhu</a:t>
             </a:r>
             <a:r>
-              <a:rPr lang="en-US" sz="2000" b="0" i="0" dirty="0" smtClean="0">
+              <a:rPr lang="en-US" sz="2000" b="0" i="0" dirty="0">
                 <a:solidFill>
                   <a:srgbClr val="7F6000"/>
                 </a:solidFill>
@@ -41521,7 +43086,7 @@
               <a:t> </a:t>
             </a:r>
             <a:r>
-              <a:rPr lang="en-US" sz="2000" b="0" i="0" dirty="0" err="1" smtClean="0">
+              <a:rPr lang="en-US" sz="2000" b="0" i="0" dirty="0" err="1">
                 <a:solidFill>
                   <a:srgbClr val="7F6000"/>
                 </a:solidFill>
@@ -41530,7 +43095,7 @@
               <a:t>cầu</a:t>
             </a:r>
             <a:r>
-              <a:rPr lang="en-US" sz="2000" b="0" i="0" dirty="0" smtClean="0">
+              <a:rPr lang="en-US" sz="2000" b="0" i="0" dirty="0">
                 <a:solidFill>
                   <a:srgbClr val="7F6000"/>
                 </a:solidFill>
@@ -41539,7 +43104,7 @@
               <a:t> </a:t>
             </a:r>
             <a:r>
-              <a:rPr lang="en-US" sz="2000" b="0" i="0" dirty="0" err="1" smtClean="0">
+              <a:rPr lang="en-US" sz="2000" b="0" i="0" dirty="0" err="1">
                 <a:solidFill>
                   <a:srgbClr val="7F6000"/>
                 </a:solidFill>
@@ -41548,7 +43113,7 @@
               <a:t>kinh</a:t>
             </a:r>
             <a:r>
-              <a:rPr lang="en-US" sz="2000" b="0" i="0" dirty="0" smtClean="0">
+              <a:rPr lang="en-US" sz="2000" b="0" i="0" dirty="0">
                 <a:solidFill>
                   <a:srgbClr val="7F6000"/>
                 </a:solidFill>
@@ -41557,7 +43122,7 @@
               <a:t> </a:t>
             </a:r>
             <a:r>
-              <a:rPr lang="en-US" sz="2000" b="0" i="0" dirty="0" err="1" smtClean="0">
+              <a:rPr lang="en-US" sz="2000" b="0" i="0" dirty="0" err="1">
                 <a:solidFill>
                   <a:srgbClr val="7F6000"/>
                 </a:solidFill>
@@ -41566,7 +43131,7 @@
               <a:t>doanh</a:t>
             </a:r>
             <a:r>
-              <a:rPr lang="en-US" sz="2000" b="0" i="0" dirty="0" smtClean="0">
+              <a:rPr lang="en-US" sz="2000" b="0" i="0" dirty="0">
                 <a:solidFill>
                   <a:srgbClr val="7F6000"/>
                 </a:solidFill>
@@ -41575,7 +43140,7 @@
               <a:t> (</a:t>
             </a:r>
             <a:r>
-              <a:rPr lang="en-US" sz="2000" dirty="0" err="1" smtClean="0">
+              <a:rPr lang="en-US" sz="2000" dirty="0" err="1">
                 <a:solidFill>
                   <a:srgbClr val="7F6000"/>
                 </a:solidFill>
@@ -41584,7 +43149,7 @@
               <a:t>Bảo</a:t>
             </a:r>
             <a:r>
-              <a:rPr lang="en-US" sz="2000" dirty="0" smtClean="0">
+              <a:rPr lang="en-US" sz="2000" dirty="0">
                 <a:solidFill>
                   <a:srgbClr val="7F6000"/>
                 </a:solidFill>
@@ -41593,7 +43158,7 @@
               <a:t> </a:t>
             </a:r>
             <a:r>
-              <a:rPr lang="en-US" sz="2000" dirty="0" err="1" smtClean="0">
+              <a:rPr lang="en-US" sz="2000" dirty="0" err="1">
                 <a:solidFill>
                   <a:srgbClr val="7F6000"/>
                 </a:solidFill>
@@ -41602,7 +43167,7 @@
               <a:t>hiểm</a:t>
             </a:r>
             <a:r>
-              <a:rPr lang="en-US" sz="2000" dirty="0" smtClean="0">
+              <a:rPr lang="en-US" sz="2000" dirty="0">
                 <a:solidFill>
                   <a:srgbClr val="7F6000"/>
                 </a:solidFill>
@@ -41611,7 +43176,7 @@
               <a:t> </a:t>
             </a:r>
             <a:r>
-              <a:rPr lang="en-US" sz="2000" dirty="0" err="1" smtClean="0">
+              <a:rPr lang="en-US" sz="2000" dirty="0" err="1">
                 <a:solidFill>
                   <a:srgbClr val="7F6000"/>
                 </a:solidFill>
@@ -41620,7 +43185,7 @@
               <a:t>số</a:t>
             </a:r>
             <a:r>
-              <a:rPr lang="en-US" sz="2000" dirty="0" smtClean="0">
+              <a:rPr lang="en-US" sz="2000" dirty="0">
                 <a:solidFill>
                   <a:srgbClr val="7F6000"/>
                 </a:solidFill>
@@ -41629,7 +43194,7 @@
               <a:t> - </a:t>
             </a:r>
             <a:r>
-              <a:rPr lang="en-US" sz="2000" dirty="0" err="1" smtClean="0">
+              <a:rPr lang="en-US" sz="2000" dirty="0" err="1">
                 <a:solidFill>
                   <a:srgbClr val="7F6000"/>
                 </a:solidFill>
@@ -41638,7 +43203,7 @@
               <a:t>Insurtech</a:t>
             </a:r>
             <a:r>
-              <a:rPr lang="en-US" sz="2000" dirty="0" smtClean="0">
+              <a:rPr lang="en-US" sz="2000" dirty="0">
                 <a:solidFill>
                   <a:srgbClr val="7F6000"/>
                 </a:solidFill>
@@ -41647,7 +43212,7 @@
               <a:t>) </a:t>
             </a:r>
             <a:r>
-              <a:rPr lang="en-US" sz="2000" dirty="0" err="1" smtClean="0">
+              <a:rPr lang="en-US" sz="2000" dirty="0" err="1">
                 <a:solidFill>
                   <a:srgbClr val="7F6000"/>
                 </a:solidFill>
@@ -41656,7 +43221,7 @@
               <a:t>mà</a:t>
             </a:r>
             <a:r>
-              <a:rPr lang="en-US" sz="2000" dirty="0" smtClean="0">
+              <a:rPr lang="en-US" sz="2000" dirty="0">
                 <a:solidFill>
                   <a:srgbClr val="7F6000"/>
                 </a:solidFill>
@@ -41665,7 +43230,7 @@
               <a:t> </a:t>
             </a:r>
             <a:r>
-              <a:rPr lang="en-US" sz="2000" dirty="0" err="1" smtClean="0">
+              <a:rPr lang="en-US" sz="2000" dirty="0" err="1">
                 <a:solidFill>
                   <a:srgbClr val="7F6000"/>
                 </a:solidFill>
@@ -41674,7 +43239,7 @@
               <a:t>không</a:t>
             </a:r>
             <a:r>
-              <a:rPr lang="en-US" sz="2000" dirty="0" smtClean="0">
+              <a:rPr lang="en-US" sz="2000" dirty="0">
                 <a:solidFill>
                   <a:srgbClr val="7F6000"/>
                 </a:solidFill>
@@ -41683,7 +43248,7 @@
               <a:t> </a:t>
             </a:r>
             <a:r>
-              <a:rPr lang="en-US" sz="2000" dirty="0" err="1" smtClean="0">
+              <a:rPr lang="en-US" sz="2000" dirty="0" err="1">
                 <a:solidFill>
                   <a:srgbClr val="7F6000"/>
                 </a:solidFill>
@@ -41692,7 +43257,7 @@
               <a:t>còn</a:t>
             </a:r>
             <a:r>
-              <a:rPr lang="en-US" sz="2000" dirty="0" smtClean="0">
+              <a:rPr lang="en-US" sz="2000" dirty="0">
                 <a:solidFill>
                   <a:srgbClr val="7F6000"/>
                 </a:solidFill>
@@ -41701,7 +43266,7 @@
               <a:t> </a:t>
             </a:r>
             <a:r>
-              <a:rPr lang="en-US" sz="2000" dirty="0" err="1" smtClean="0">
+              <a:rPr lang="en-US" sz="2000" dirty="0" err="1">
                 <a:solidFill>
                   <a:srgbClr val="7F6000"/>
                 </a:solidFill>
@@ -41710,7 +43275,7 @@
               <a:t>sự</a:t>
             </a:r>
             <a:r>
-              <a:rPr lang="en-US" sz="2000" dirty="0" smtClean="0">
+              <a:rPr lang="en-US" sz="2000" dirty="0">
                 <a:solidFill>
                   <a:srgbClr val="7F6000"/>
                 </a:solidFill>
@@ -41719,7 +43284,7 @@
               <a:t> </a:t>
             </a:r>
             <a:r>
-              <a:rPr lang="en-US" sz="2000" dirty="0" err="1" smtClean="0">
+              <a:rPr lang="en-US" sz="2000" dirty="0" err="1">
                 <a:solidFill>
                   <a:srgbClr val="7F6000"/>
                 </a:solidFill>
@@ -41728,7 +43293,7 @@
               <a:t>tham</a:t>
             </a:r>
             <a:r>
-              <a:rPr lang="en-US" sz="2000" dirty="0" smtClean="0">
+              <a:rPr lang="en-US" sz="2000" dirty="0">
                 <a:solidFill>
                   <a:srgbClr val="7F6000"/>
                 </a:solidFill>
@@ -41737,7 +43302,7 @@
               <a:t> </a:t>
             </a:r>
             <a:r>
-              <a:rPr lang="en-US" sz="2000" dirty="0" err="1" smtClean="0">
+              <a:rPr lang="en-US" sz="2000" dirty="0" err="1">
                 <a:solidFill>
                   <a:srgbClr val="7F6000"/>
                 </a:solidFill>
@@ -41746,7 +43311,7 @@
               <a:t>gia</a:t>
             </a:r>
             <a:r>
-              <a:rPr lang="en-US" sz="2000" dirty="0" smtClean="0">
+              <a:rPr lang="en-US" sz="2000" dirty="0">
                 <a:solidFill>
                   <a:srgbClr val="7F6000"/>
                 </a:solidFill>
@@ -41755,7 +43320,7 @@
               <a:t> </a:t>
             </a:r>
             <a:r>
-              <a:rPr lang="en-US" sz="2000" dirty="0" err="1" smtClean="0">
+              <a:rPr lang="en-US" sz="2000" dirty="0" err="1">
                 <a:solidFill>
                   <a:srgbClr val="7F6000"/>
                 </a:solidFill>
@@ -41764,7 +43329,7 @@
               <a:t>của</a:t>
             </a:r>
             <a:r>
-              <a:rPr lang="en-US" sz="2000" dirty="0" smtClean="0">
+              <a:rPr lang="en-US" sz="2000" dirty="0">
                 <a:solidFill>
                   <a:srgbClr val="7F6000"/>
                 </a:solidFill>
@@ -41773,7 +43338,7 @@
               <a:t> </a:t>
             </a:r>
             <a:r>
-              <a:rPr lang="en-US" sz="2000" dirty="0" err="1" smtClean="0">
+              <a:rPr lang="en-US" sz="2000" dirty="0" err="1">
                 <a:solidFill>
                   <a:srgbClr val="7F6000"/>
                 </a:solidFill>
@@ -41782,7 +43347,7 @@
               <a:t>thẩm</a:t>
             </a:r>
             <a:r>
-              <a:rPr lang="en-US" sz="2000" dirty="0" smtClean="0">
+              <a:rPr lang="en-US" sz="2000" dirty="0">
                 <a:solidFill>
                   <a:srgbClr val="7F6000"/>
                 </a:solidFill>
@@ -41791,7 +43356,7 @@
               <a:t> </a:t>
             </a:r>
             <a:r>
-              <a:rPr lang="en-US" sz="2000" dirty="0" err="1" smtClean="0">
+              <a:rPr lang="en-US" sz="2000" dirty="0" err="1">
                 <a:solidFill>
                   <a:srgbClr val="7F6000"/>
                 </a:solidFill>
@@ -41800,7 +43365,7 @@
               <a:t>định</a:t>
             </a:r>
             <a:r>
-              <a:rPr lang="en-US" sz="2000" dirty="0" smtClean="0">
+              <a:rPr lang="en-US" sz="2000" dirty="0">
                 <a:solidFill>
                   <a:srgbClr val="7F6000"/>
                 </a:solidFill>
@@ -41809,7 +43374,7 @@
               <a:t> </a:t>
             </a:r>
             <a:r>
-              <a:rPr lang="en-US" sz="2000" dirty="0" err="1" smtClean="0">
+              <a:rPr lang="en-US" sz="2000" dirty="0" err="1">
                 <a:solidFill>
                   <a:srgbClr val="7F6000"/>
                 </a:solidFill>
@@ -41818,7 +43383,7 @@
               <a:t>viên</a:t>
             </a:r>
             <a:r>
-              <a:rPr lang="en-US" sz="2000" dirty="0" smtClean="0">
+              <a:rPr lang="en-US" sz="2000" dirty="0">
                 <a:solidFill>
                   <a:srgbClr val="7F6000"/>
                 </a:solidFill>
@@ -41827,7 +43392,7 @@
               <a:t> </a:t>
             </a:r>
             <a:r>
-              <a:rPr lang="en-US" sz="2000" dirty="0" err="1" smtClean="0">
+              <a:rPr lang="en-US" sz="2000" dirty="0" err="1">
                 <a:solidFill>
                   <a:srgbClr val="7F6000"/>
                 </a:solidFill>
@@ -41836,7 +43401,7 @@
               <a:t>vào</a:t>
             </a:r>
             <a:r>
-              <a:rPr lang="en-US" sz="2000" dirty="0" smtClean="0">
+              <a:rPr lang="en-US" sz="2000" dirty="0">
                 <a:solidFill>
                   <a:srgbClr val="7F6000"/>
                 </a:solidFill>
@@ -41845,7 +43410,7 @@
               <a:t> </a:t>
             </a:r>
             <a:r>
-              <a:rPr lang="en-US" sz="2000" dirty="0" err="1" smtClean="0">
+              <a:rPr lang="en-US" sz="2000" dirty="0" err="1">
                 <a:solidFill>
                   <a:srgbClr val="7F6000"/>
                 </a:solidFill>
@@ -41854,7 +43419,7 @@
               <a:t>khâu</a:t>
             </a:r>
             <a:r>
-              <a:rPr lang="en-US" sz="2000" dirty="0" smtClean="0">
+              <a:rPr lang="en-US" sz="2000" dirty="0">
                 <a:solidFill>
                   <a:srgbClr val="7F6000"/>
                 </a:solidFill>
@@ -41863,7 +43428,7 @@
               <a:t> </a:t>
             </a:r>
             <a:r>
-              <a:rPr lang="en-US" sz="2000" dirty="0" err="1" smtClean="0">
+              <a:rPr lang="en-US" sz="2000" dirty="0" err="1">
                 <a:solidFill>
                   <a:srgbClr val="7F6000"/>
                 </a:solidFill>
@@ -41872,7 +43437,7 @@
               <a:t>cấp</a:t>
             </a:r>
             <a:r>
-              <a:rPr lang="en-US" sz="2000" dirty="0" smtClean="0">
+              <a:rPr lang="en-US" sz="2000" dirty="0">
                 <a:solidFill>
                   <a:srgbClr val="7F6000"/>
                 </a:solidFill>
@@ -41881,7 +43446,7 @@
               <a:t> </a:t>
             </a:r>
             <a:r>
-              <a:rPr lang="en-US" sz="2000" dirty="0" err="1" smtClean="0">
+              <a:rPr lang="en-US" sz="2000" dirty="0" err="1">
                 <a:solidFill>
                   <a:srgbClr val="7F6000"/>
                 </a:solidFill>
@@ -41896,16 +43461,7 @@
                 </a:solidFill>
                 <a:latin typeface="Times New Roman"/>
               </a:rPr>
-              <a:t> </a:t>
-            </a:r>
-            <a:r>
-              <a:rPr lang="en-US" sz="2000" dirty="0" smtClean="0">
-                <a:solidFill>
-                  <a:srgbClr val="7F6000"/>
-                </a:solidFill>
-                <a:latin typeface="Times New Roman"/>
-              </a:rPr>
-              <a:t>Online.</a:t>
+              <a:t> Online.</a:t>
             </a:r>
             <a:endParaRPr sz="2000" b="0" i="0" dirty="0">
               <a:solidFill>
@@ -42094,7 +43650,7 @@
               <a:t> </a:t>
             </a:r>
             <a:r>
-              <a:rPr sz="2600" b="0" i="0" dirty="0" err="1" smtClean="0">
+              <a:rPr sz="2600" b="0" i="0" dirty="0" err="1">
                 <a:solidFill>
                   <a:srgbClr val="C55A11"/>
                 </a:solidFill>
@@ -42248,7 +43804,7 @@
               <a:t> </a:t>
             </a:r>
             <a:r>
-              <a:rPr sz="3000" b="1" i="0" dirty="0" err="1" smtClean="0">
+              <a:rPr sz="3000" b="1" i="0" dirty="0" err="1">
                 <a:solidFill>
                   <a:srgbClr val="C55A11"/>
                 </a:solidFill>
@@ -42420,7 +43976,7 @@
               <a:t> </a:t>
             </a:r>
             <a:r>
-              <a:rPr sz="2600" b="0" i="0" dirty="0" err="1" smtClean="0">
+              <a:rPr sz="2600" b="0" i="0" dirty="0" err="1">
                 <a:solidFill>
                   <a:srgbClr val="C55A11"/>
                 </a:solidFill>
@@ -42592,7 +44148,7 @@
               <a:t> </a:t>
             </a:r>
             <a:r>
-              <a:rPr sz="2600" b="0" i="0" dirty="0" err="1" smtClean="0">
+              <a:rPr sz="2600" b="0" i="0" dirty="0" err="1">
                 <a:solidFill>
                   <a:srgbClr val="C55A11"/>
                 </a:solidFill>
@@ -43201,23 +44757,8 @@
                 </a:solidFill>
                 <a:latin typeface="Times New Roman"/>
               </a:rPr>
-              <a:t> </a:t>
-            </a:r>
-            <a:r>
-              <a:rPr sz="2000" b="1" i="0" dirty="0" smtClean="0">
-                <a:solidFill>
-                  <a:srgbClr val="0070C0"/>
-                </a:solidFill>
-                <a:latin typeface="Times New Roman"/>
-              </a:rPr>
-              <a:t>idempotent</a:t>
-            </a:r>
-            <a:endParaRPr sz="2000" b="1" i="0" dirty="0">
-              <a:solidFill>
-                <a:srgbClr val="0070C0"/>
-              </a:solidFill>
-              <a:latin typeface="Times New Roman"/>
-            </a:endParaRPr>
+              <a:t> idempotent</a:t>
+            </a:r>
           </a:p>
         </p:txBody>
       </p:sp>
@@ -43628,7 +45169,7 @@
               <a:t>đến</a:t>
             </a:r>
             <a:r>
-              <a:rPr sz="1600" b="0" i="0" dirty="0" smtClean="0">
+              <a:rPr sz="1600" b="0" i="0" dirty="0">
                 <a:solidFill>
                   <a:srgbClr val="262626"/>
                 </a:solidFill>
@@ -43636,7 +45177,7 @@
               </a:rPr>
               <a:t>.</a:t>
             </a:r>
-            <a:endParaRPr lang="en-US" sz="1600" b="0" i="0" dirty="0" smtClean="0">
+            <a:endParaRPr lang="en-US" sz="1600" b="0" i="0" dirty="0">
               <a:solidFill>
                 <a:srgbClr val="262626"/>
               </a:solidFill>
@@ -44226,7 +45767,7 @@
               <a:t>sổ</a:t>
             </a:r>
             <a:r>
-              <a:rPr sz="1600" b="0" i="0" dirty="0" smtClean="0">
+              <a:rPr sz="1600" b="0" i="0" dirty="0">
                 <a:solidFill>
                   <a:srgbClr val="262626"/>
                 </a:solidFill>
@@ -44234,7 +45775,7 @@
               </a:rPr>
               <a:t>.</a:t>
             </a:r>
-            <a:endParaRPr lang="en-US" sz="1600" b="0" i="0" dirty="0" smtClean="0">
+            <a:endParaRPr lang="en-US" sz="1600" b="0" i="0" dirty="0">
               <a:solidFill>
                 <a:srgbClr val="262626"/>
               </a:solidFill>
@@ -44698,7 +46239,7 @@
               <a:t>nhau</a:t>
             </a:r>
             <a:r>
-              <a:rPr sz="1600" b="0" i="0" dirty="0" smtClean="0">
+              <a:rPr sz="1600" b="0" i="0" dirty="0">
                 <a:solidFill>
                   <a:srgbClr val="262626"/>
                 </a:solidFill>
@@ -44706,7 +46247,7 @@
               </a:rPr>
               <a:t>.</a:t>
             </a:r>
-            <a:endParaRPr lang="en-US" sz="1600" b="0" i="0" dirty="0" smtClean="0">
+            <a:endParaRPr lang="en-US" sz="1600" b="0" i="0" dirty="0">
               <a:solidFill>
                 <a:srgbClr val="262626"/>
               </a:solidFill>
@@ -45115,7 +46656,7 @@
           <a:p>
             <a:pPr algn="l"/>
             <a:r>
-              <a:rPr sz="1400" b="0" i="0" dirty="0" smtClean="0">
+              <a:rPr sz="1400" b="0" i="0" dirty="0">
                 <a:solidFill>
                   <a:srgbClr val="262626"/>
                 </a:solidFill>
@@ -45412,7 +46953,7 @@
               <a:t> </a:t>
             </a:r>
             <a:r>
-              <a:rPr sz="1400" b="1" i="0" dirty="0" err="1" smtClean="0">
+              <a:rPr sz="1400" b="1" i="0" dirty="0" err="1">
                 <a:solidFill>
                   <a:srgbClr val="262626"/>
                 </a:solidFill>
@@ -45421,7 +46962,7 @@
               <a:t>soát</a:t>
             </a:r>
             <a:r>
-              <a:rPr lang="en-US" dirty="0" smtClean="0">
+              <a:rPr lang="en-US" dirty="0">
                 <a:solidFill>
                   <a:srgbClr val="262626"/>
                 </a:solidFill>
@@ -45430,7 +46971,7 @@
               <a:t>, </a:t>
             </a:r>
             <a:r>
-              <a:rPr sz="1400" b="0" i="0" dirty="0" err="1" smtClean="0">
+              <a:rPr sz="1400" b="0" i="0" dirty="0" err="1">
                 <a:solidFill>
                   <a:srgbClr val="262626"/>
                 </a:solidFill>
@@ -45439,7 +46980,7 @@
               <a:t>biết</a:t>
             </a:r>
             <a:r>
-              <a:rPr sz="1400" b="0" i="0" dirty="0" smtClean="0">
+              <a:rPr sz="1400" b="0" i="0" dirty="0">
                 <a:solidFill>
                   <a:srgbClr val="262626"/>
                 </a:solidFill>
@@ -45717,7 +47258,7 @@
               </a:rPr>
               <a:t>. </a:t>
             </a:r>
-            <a:endParaRPr lang="en-US" sz="1400" b="0" i="0" dirty="0" smtClean="0">
+            <a:endParaRPr lang="en-US" sz="1400" b="0" i="0" dirty="0">
               <a:solidFill>
                 <a:srgbClr val="262626"/>
               </a:solidFill>
@@ -45727,7 +47268,7 @@
           <a:p>
             <a:pPr algn="l"/>
             <a:r>
-              <a:rPr sz="1400" b="0" i="0" dirty="0" err="1" smtClean="0">
+              <a:rPr sz="1400" b="0" i="0" dirty="0" err="1">
                 <a:solidFill>
                   <a:srgbClr val="262626"/>
                 </a:solidFill>
@@ -45736,7 +47277,7 @@
               <a:t>Với</a:t>
             </a:r>
             <a:r>
-              <a:rPr sz="1400" b="0" i="0" dirty="0" smtClean="0">
+              <a:rPr sz="1400" b="0" i="0" dirty="0">
                 <a:solidFill>
                   <a:srgbClr val="262626"/>
                 </a:solidFill>
@@ -46048,23 +47589,8 @@
                 </a:solidFill>
                 <a:latin typeface="Times New Roman"/>
               </a:rPr>
-              <a:t> Bronze</a:t>
-            </a:r>
-            <a:r>
-              <a:rPr sz="1400" b="0" i="0" dirty="0" smtClean="0">
-                <a:solidFill>
-                  <a:srgbClr val="262626"/>
-                </a:solidFill>
-                <a:latin typeface="Times New Roman"/>
-              </a:rPr>
-              <a:t>.</a:t>
-            </a:r>
-            <a:endParaRPr sz="1400" b="0" i="0" dirty="0">
-              <a:solidFill>
-                <a:srgbClr val="262626"/>
-              </a:solidFill>
-              <a:latin typeface="Times New Roman"/>
-            </a:endParaRPr>
+              <a:t> Bronze.</a:t>
+            </a:r>
           </a:p>
         </p:txBody>
       </p:sp>
@@ -46166,19 +47692,10 @@
                 </a:solidFill>
                 <a:latin typeface="Times New Roman"/>
               </a:rPr>
-              <a:t>❖Data </a:t>
-            </a:r>
-            <a:r>
-              <a:rPr sz="2000" b="1" i="0" dirty="0" smtClean="0">
-                <a:solidFill>
-                  <a:srgbClr val="0070C0"/>
-                </a:solidFill>
-                <a:latin typeface="Times New Roman"/>
-              </a:rPr>
-              <a:t>contrac</a:t>
-            </a:r>
-            <a:r>
-              <a:rPr lang="en-US" sz="2000" b="1" i="0" dirty="0" smtClean="0">
+              <a:t>❖Data contrac</a:t>
+            </a:r>
+            <a:r>
+              <a:rPr lang="en-US" sz="2000" b="1" i="0" dirty="0">
                 <a:solidFill>
                   <a:srgbClr val="0070C0"/>
                 </a:solidFill>
@@ -46232,7 +47749,7 @@
               <a:t>• </a:t>
             </a:r>
             <a:r>
-              <a:rPr lang="en-US" sz="1600" b="0" i="0" dirty="0" smtClean="0">
+              <a:rPr lang="en-US" sz="1600" b="0" i="0" dirty="0">
                 <a:solidFill>
                   <a:srgbClr val="262626"/>
                 </a:solidFill>
@@ -46241,7 +47758,7 @@
               <a:t>Data </a:t>
             </a:r>
             <a:r>
-              <a:rPr sz="1600" b="0" i="0" dirty="0" smtClean="0">
+              <a:rPr sz="1600" b="0" i="0" dirty="0">
                 <a:solidFill>
                   <a:srgbClr val="262626"/>
                 </a:solidFill>
@@ -46250,7 +47767,7 @@
               <a:t>Contract </a:t>
             </a:r>
             <a:r>
-              <a:rPr lang="en-US" sz="1600" dirty="0" err="1" smtClean="0">
+              <a:rPr lang="en-US" sz="1600" dirty="0" err="1">
                 <a:solidFill>
                   <a:srgbClr val="262626"/>
                 </a:solidFill>
@@ -46259,7 +47776,7 @@
               <a:t>là</a:t>
             </a:r>
             <a:r>
-              <a:rPr lang="en-US" sz="1600" dirty="0" smtClean="0">
+              <a:rPr lang="en-US" sz="1600" dirty="0">
                 <a:solidFill>
                   <a:srgbClr val="262626"/>
                 </a:solidFill>
@@ -46481,19 +47998,10 @@
                 </a:solidFill>
                 <a:latin typeface="Times New Roman"/>
               </a:rPr>
-              <a:t> (</a:t>
-            </a:r>
-            <a:r>
-              <a:rPr lang="en-US" sz="1600" dirty="0" smtClean="0">
-                <a:solidFill>
-                  <a:srgbClr val="262626"/>
-                </a:solidFill>
-                <a:latin typeface="Times New Roman"/>
-              </a:rPr>
-              <a:t>consumer), </a:t>
-            </a:r>
-            <a:r>
-              <a:rPr sz="1600" b="0" i="0" dirty="0" err="1" smtClean="0">
+              <a:t> (consumer), </a:t>
+            </a:r>
+            <a:r>
+              <a:rPr sz="1600" b="0" i="0" dirty="0" err="1">
                 <a:solidFill>
                   <a:srgbClr val="262626"/>
                 </a:solidFill>
@@ -46502,7 +48010,7 @@
               <a:t>thoả</a:t>
             </a:r>
             <a:r>
-              <a:rPr sz="1600" b="0" i="0" dirty="0" smtClean="0">
+              <a:rPr sz="1600" b="0" i="0" dirty="0">
                 <a:solidFill>
                   <a:srgbClr val="262626"/>
                 </a:solidFill>
@@ -46700,7 +48208,7 @@
               <a:t>nhịp</a:t>
             </a:r>
             <a:r>
-              <a:rPr sz="1600" b="0" i="0" dirty="0" smtClean="0">
+              <a:rPr sz="1600" b="0" i="0" dirty="0">
                 <a:solidFill>
                   <a:srgbClr val="262626"/>
                 </a:solidFill>
@@ -46709,16 +48217,16 @@
               <a:t>,</a:t>
             </a:r>
             <a:r>
-              <a:rPr lang="en-US" sz="1600" b="0" i="0" dirty="0" smtClean="0">
-                <a:solidFill>
-                  <a:srgbClr val="262626"/>
-                </a:solidFill>
-                <a:latin typeface="Times New Roman"/>
-              </a:rPr>
-              <a:t> </a:t>
-            </a:r>
-            <a:r>
-              <a:rPr lang="en-US" sz="1600" b="0" i="0" dirty="0" err="1" smtClean="0">
+              <a:rPr lang="en-US" sz="1600" b="0" i="0" dirty="0">
+                <a:solidFill>
+                  <a:srgbClr val="262626"/>
+                </a:solidFill>
+                <a:latin typeface="Times New Roman"/>
+              </a:rPr>
+              <a:t> </a:t>
+            </a:r>
+            <a:r>
+              <a:rPr lang="en-US" sz="1600" b="0" i="0" dirty="0" err="1">
                 <a:solidFill>
                   <a:srgbClr val="262626"/>
                 </a:solidFill>
@@ -46727,16 +48235,16 @@
               <a:t>cập</a:t>
             </a:r>
             <a:r>
-              <a:rPr lang="en-US" sz="1600" b="0" i="0" dirty="0" smtClean="0">
-                <a:solidFill>
-                  <a:srgbClr val="262626"/>
-                </a:solidFill>
-                <a:latin typeface="Times New Roman"/>
-              </a:rPr>
-              <a:t> </a:t>
-            </a:r>
-            <a:r>
-              <a:rPr lang="en-US" sz="1600" b="0" i="0" dirty="0" err="1" smtClean="0">
+              <a:rPr lang="en-US" sz="1600" b="0" i="0" dirty="0">
+                <a:solidFill>
+                  <a:srgbClr val="262626"/>
+                </a:solidFill>
+                <a:latin typeface="Times New Roman"/>
+              </a:rPr>
+              <a:t> </a:t>
+            </a:r>
+            <a:r>
+              <a:rPr lang="en-US" sz="1600" b="0" i="0" dirty="0" err="1">
                 <a:solidFill>
                   <a:srgbClr val="262626"/>
                 </a:solidFill>
@@ -46745,16 +48253,16 @@
               <a:t>nhật</a:t>
             </a:r>
             <a:r>
-              <a:rPr lang="en-US" sz="1600" b="0" i="0" dirty="0" smtClean="0">
-                <a:solidFill>
-                  <a:srgbClr val="262626"/>
-                </a:solidFill>
-                <a:latin typeface="Times New Roman"/>
-              </a:rPr>
-              <a:t> </a:t>
-            </a:r>
-            <a:r>
-              <a:rPr lang="en-US" sz="1600" b="0" i="0" dirty="0" err="1" smtClean="0">
+              <a:rPr lang="en-US" sz="1600" b="0" i="0" dirty="0">
+                <a:solidFill>
+                  <a:srgbClr val="262626"/>
+                </a:solidFill>
+                <a:latin typeface="Times New Roman"/>
+              </a:rPr>
+              <a:t> </a:t>
+            </a:r>
+            <a:r>
+              <a:rPr lang="en-US" sz="1600" b="0" i="0" dirty="0" err="1">
                 <a:solidFill>
                   <a:srgbClr val="262626"/>
                 </a:solidFill>
@@ -46763,16 +48271,16 @@
               <a:t>dữ</a:t>
             </a:r>
             <a:r>
-              <a:rPr lang="en-US" sz="1600" b="0" i="0" dirty="0" smtClean="0">
-                <a:solidFill>
-                  <a:srgbClr val="262626"/>
-                </a:solidFill>
-                <a:latin typeface="Times New Roman"/>
-              </a:rPr>
-              <a:t> </a:t>
-            </a:r>
-            <a:r>
-              <a:rPr lang="en-US" sz="1600" b="0" i="0" dirty="0" err="1" smtClean="0">
+              <a:rPr lang="en-US" sz="1600" b="0" i="0" dirty="0">
+                <a:solidFill>
+                  <a:srgbClr val="262626"/>
+                </a:solidFill>
+                <a:latin typeface="Times New Roman"/>
+              </a:rPr>
+              <a:t> </a:t>
+            </a:r>
+            <a:r>
+              <a:rPr lang="en-US" sz="1600" b="0" i="0" dirty="0" err="1">
                 <a:solidFill>
                   <a:srgbClr val="262626"/>
                 </a:solidFill>
@@ -46814,8 +48322,20 @@
                 <a:tableStyleId>{5C22544A-7EE6-4342-B048-85BDC9FD1C3A}</a:tableStyleId>
               </a:tblPr>
               <a:tblGrid>
-                <a:gridCol w="1549400"/>
-                <a:gridCol w="4028440"/>
+                <a:gridCol w="1549400">
+                  <a:extLst>
+                    <a:ext uri="{9D8B030D-6E8A-4147-A177-3AD203B41FA5}">
+                      <a16:colId xmlns:a16="http://schemas.microsoft.com/office/drawing/2014/main" val="20000"/>
+                    </a:ext>
+                  </a:extLst>
+                </a:gridCol>
+                <a:gridCol w="4028440">
+                  <a:extLst>
+                    <a:ext uri="{9D8B030D-6E8A-4147-A177-3AD203B41FA5}">
+                      <a16:colId xmlns:a16="http://schemas.microsoft.com/office/drawing/2014/main" val="20001"/>
+                    </a:ext>
+                  </a:extLst>
+                </a:gridCol>
               </a:tblGrid>
               <a:tr h="502920">
                 <a:tc>
@@ -46886,6 +48406,11 @@
                     </a:solidFill>
                   </a:tcPr>
                 </a:tc>
+                <a:extLst>
+                  <a:ext uri="{0D108BD9-81ED-4DB2-BD59-A6C34878D82A}">
+                    <a16:rowId xmlns:a16="http://schemas.microsoft.com/office/drawing/2014/main" val="10000"/>
+                  </a:ext>
+                </a:extLst>
               </a:tr>
               <a:tr h="502920">
                 <a:tc>
@@ -46932,6 +48457,11 @@
                     </a:solidFill>
                   </a:tcPr>
                 </a:tc>
+                <a:extLst>
+                  <a:ext uri="{0D108BD9-81ED-4DB2-BD59-A6C34878D82A}">
+                    <a16:rowId xmlns:a16="http://schemas.microsoft.com/office/drawing/2014/main" val="10001"/>
+                  </a:ext>
+                </a:extLst>
               </a:tr>
               <a:tr h="502920">
                 <a:tc>
@@ -46978,6 +48508,11 @@
                     </a:solidFill>
                   </a:tcPr>
                 </a:tc>
+                <a:extLst>
+                  <a:ext uri="{0D108BD9-81ED-4DB2-BD59-A6C34878D82A}">
+                    <a16:rowId xmlns:a16="http://schemas.microsoft.com/office/drawing/2014/main" val="10002"/>
+                  </a:ext>
+                </a:extLst>
               </a:tr>
               <a:tr h="502920">
                 <a:tc>
@@ -47024,6 +48559,11 @@
                     </a:solidFill>
                   </a:tcPr>
                 </a:tc>
+                <a:extLst>
+                  <a:ext uri="{0D108BD9-81ED-4DB2-BD59-A6C34878D82A}">
+                    <a16:rowId xmlns:a16="http://schemas.microsoft.com/office/drawing/2014/main" val="10003"/>
+                  </a:ext>
+                </a:extLst>
               </a:tr>
               <a:tr h="502920">
                 <a:tc>
@@ -47070,6 +48610,11 @@
                     </a:solidFill>
                   </a:tcPr>
                 </a:tc>
+                <a:extLst>
+                  <a:ext uri="{0D108BD9-81ED-4DB2-BD59-A6C34878D82A}">
+                    <a16:rowId xmlns:a16="http://schemas.microsoft.com/office/drawing/2014/main" val="10004"/>
+                  </a:ext>
+                </a:extLst>
               </a:tr>
               <a:tr h="502920">
                 <a:tc>
@@ -47116,6 +48661,11 @@
                     </a:solidFill>
                   </a:tcPr>
                 </a:tc>
+                <a:extLst>
+                  <a:ext uri="{0D108BD9-81ED-4DB2-BD59-A6C34878D82A}">
+                    <a16:rowId xmlns:a16="http://schemas.microsoft.com/office/drawing/2014/main" val="10005"/>
+                  </a:ext>
+                </a:extLst>
               </a:tr>
               <a:tr h="502920">
                 <a:tc>
@@ -47124,7 +48674,7 @@
                     <a:lstStyle/>
                     <a:p>
                       <a:r>
-                        <a:rPr lang="en-US" sz="1300" b="1" i="0" dirty="0" err="1" smtClean="0">
+                        <a:rPr lang="en-US" sz="1300" b="1" i="0" dirty="0" err="1">
                           <a:solidFill>
                             <a:srgbClr val="262626"/>
                           </a:solidFill>
@@ -47133,7 +48683,7 @@
                         <a:t>Cập</a:t>
                       </a:r>
                       <a:r>
-                        <a:rPr lang="en-US" sz="1300" b="1" i="0" dirty="0" smtClean="0">
+                        <a:rPr lang="en-US" sz="1300" b="1" i="0" dirty="0">
                           <a:solidFill>
                             <a:srgbClr val="262626"/>
                           </a:solidFill>
@@ -47142,7 +48692,7 @@
                         <a:t> </a:t>
                       </a:r>
                       <a:r>
-                        <a:rPr lang="en-US" sz="1300" b="1" i="0" dirty="0" err="1" smtClean="0">
+                        <a:rPr lang="en-US" sz="1300" b="1" i="0" dirty="0" err="1">
                           <a:solidFill>
                             <a:srgbClr val="262626"/>
                           </a:solidFill>
@@ -47151,7 +48701,7 @@
                         <a:t>nhật</a:t>
                       </a:r>
                       <a:r>
-                        <a:rPr lang="en-US" sz="1300" b="1" i="0" baseline="0" dirty="0" smtClean="0">
+                        <a:rPr lang="en-US" sz="1300" b="1" i="0" baseline="0" dirty="0">
                           <a:solidFill>
                             <a:srgbClr val="262626"/>
                           </a:solidFill>
@@ -47160,7 +48710,7 @@
                         <a:t> </a:t>
                       </a:r>
                       <a:r>
-                        <a:rPr lang="en-US" sz="1300" b="1" i="0" baseline="0" dirty="0" err="1" smtClean="0">
+                        <a:rPr lang="en-US" sz="1300" b="1" i="0" baseline="0" dirty="0" err="1">
                           <a:solidFill>
                             <a:srgbClr val="262626"/>
                           </a:solidFill>
@@ -47169,7 +48719,7 @@
                         <a:t>dữ</a:t>
                       </a:r>
                       <a:r>
-                        <a:rPr lang="en-US" sz="1300" b="1" i="0" baseline="0" dirty="0" smtClean="0">
+                        <a:rPr lang="en-US" sz="1300" b="1" i="0" baseline="0" dirty="0">
                           <a:solidFill>
                             <a:srgbClr val="262626"/>
                           </a:solidFill>
@@ -47178,7 +48728,7 @@
                         <a:t> </a:t>
                       </a:r>
                       <a:r>
-                        <a:rPr lang="en-US" sz="1300" b="1" i="0" baseline="0" dirty="0" err="1" smtClean="0">
+                        <a:rPr lang="en-US" sz="1300" b="1" i="0" baseline="0" dirty="0" err="1">
                           <a:solidFill>
                             <a:srgbClr val="262626"/>
                           </a:solidFill>
@@ -47187,7 +48737,7 @@
                         <a:t>liệu</a:t>
                       </a:r>
                       <a:r>
-                        <a:rPr sz="1300" b="1" i="0" dirty="0" smtClean="0">
+                        <a:rPr sz="1300" b="1" i="0" dirty="0">
                           <a:solidFill>
                             <a:srgbClr val="262626"/>
                           </a:solidFill>
@@ -47195,12 +48745,6 @@
                         </a:rPr>
                         <a:t>?</a:t>
                       </a:r>
-                      <a:endParaRPr sz="1300" b="1" i="0" dirty="0">
-                        <a:solidFill>
-                          <a:srgbClr val="262626"/>
-                        </a:solidFill>
-                        <a:latin typeface="Times New Roman"/>
-                      </a:endParaRPr>
                     </a:p>
                   </a:txBody>
                   <a:tcPr marL="64008" marR="64008" marT="22860" marB="22860" anchor="ctr">
@@ -47384,6 +48928,11 @@
                     </a:solidFill>
                   </a:tcPr>
                 </a:tc>
+                <a:extLst>
+                  <a:ext uri="{0D108BD9-81ED-4DB2-BD59-A6C34878D82A}">
+                    <a16:rowId xmlns:a16="http://schemas.microsoft.com/office/drawing/2014/main" val="10006"/>
+                  </a:ext>
+                </a:extLst>
               </a:tr>
             </a:tbl>
           </a:graphicData>
@@ -47487,23 +49036,8 @@
                 </a:solidFill>
                 <a:latin typeface="Times New Roman"/>
               </a:rPr>
-              <a:t>❖</a:t>
-            </a:r>
-            <a:r>
-              <a:rPr sz="2000" b="1" i="0" dirty="0" smtClean="0">
-                <a:solidFill>
-                  <a:srgbClr val="0070C0"/>
-                </a:solidFill>
-                <a:latin typeface="Times New Roman"/>
-              </a:rPr>
-              <a:t>Medallion</a:t>
-            </a:r>
-            <a:endParaRPr sz="2000" b="1" i="0" dirty="0">
-              <a:solidFill>
-                <a:srgbClr val="0070C0"/>
-              </a:solidFill>
-              <a:latin typeface="Times New Roman"/>
-            </a:endParaRPr>
+              <a:t>❖Medallion</a:t>
+            </a:r>
           </a:p>
         </p:txBody>
       </p:sp>
@@ -47526,10 +49060,34 @@
                 <a:tableStyleId>{5C22544A-7EE6-4342-B048-85BDC9FD1C3A}</a:tableStyleId>
               </a:tblPr>
               <a:tblGrid>
-                <a:gridCol w="984226"/>
-                <a:gridCol w="2091482"/>
-                <a:gridCol w="984226"/>
-                <a:gridCol w="2706624"/>
+                <a:gridCol w="984226">
+                  <a:extLst>
+                    <a:ext uri="{9D8B030D-6E8A-4147-A177-3AD203B41FA5}">
+                      <a16:colId xmlns:a16="http://schemas.microsoft.com/office/drawing/2014/main" val="20000"/>
+                    </a:ext>
+                  </a:extLst>
+                </a:gridCol>
+                <a:gridCol w="2091482">
+                  <a:extLst>
+                    <a:ext uri="{9D8B030D-6E8A-4147-A177-3AD203B41FA5}">
+                      <a16:colId xmlns:a16="http://schemas.microsoft.com/office/drawing/2014/main" val="20001"/>
+                    </a:ext>
+                  </a:extLst>
+                </a:gridCol>
+                <a:gridCol w="984226">
+                  <a:extLst>
+                    <a:ext uri="{9D8B030D-6E8A-4147-A177-3AD203B41FA5}">
+                      <a16:colId xmlns:a16="http://schemas.microsoft.com/office/drawing/2014/main" val="20002"/>
+                    </a:ext>
+                  </a:extLst>
+                </a:gridCol>
+                <a:gridCol w="2706624">
+                  <a:extLst>
+                    <a:ext uri="{9D8B030D-6E8A-4147-A177-3AD203B41FA5}">
+                      <a16:colId xmlns:a16="http://schemas.microsoft.com/office/drawing/2014/main" val="20003"/>
+                    </a:ext>
+                  </a:extLst>
+                </a:gridCol>
               </a:tblGrid>
               <a:tr h="475488">
                 <a:tc>
@@ -47620,6 +49178,11 @@
                     </a:solidFill>
                   </a:tcPr>
                 </a:tc>
+                <a:extLst>
+                  <a:ext uri="{0D108BD9-81ED-4DB2-BD59-A6C34878D82A}">
+                    <a16:rowId xmlns:a16="http://schemas.microsoft.com/office/drawing/2014/main" val="10000"/>
+                  </a:ext>
+                </a:extLst>
               </a:tr>
               <a:tr h="475488">
                 <a:tc>
@@ -47710,6 +49273,11 @@
                     </a:solidFill>
                   </a:tcPr>
                 </a:tc>
+                <a:extLst>
+                  <a:ext uri="{0D108BD9-81ED-4DB2-BD59-A6C34878D82A}">
+                    <a16:rowId xmlns:a16="http://schemas.microsoft.com/office/drawing/2014/main" val="10001"/>
+                  </a:ext>
+                </a:extLst>
               </a:tr>
               <a:tr h="475488">
                 <a:tc>
@@ -47818,6 +49386,11 @@
                     </a:solidFill>
                   </a:tcPr>
                 </a:tc>
+                <a:extLst>
+                  <a:ext uri="{0D108BD9-81ED-4DB2-BD59-A6C34878D82A}">
+                    <a16:rowId xmlns:a16="http://schemas.microsoft.com/office/drawing/2014/main" val="10002"/>
+                  </a:ext>
+                </a:extLst>
               </a:tr>
               <a:tr h="475488">
                 <a:tc>
@@ -47926,6 +49499,11 @@
                     </a:solidFill>
                   </a:tcPr>
                 </a:tc>
+                <a:extLst>
+                  <a:ext uri="{0D108BD9-81ED-4DB2-BD59-A6C34878D82A}">
+                    <a16:rowId xmlns:a16="http://schemas.microsoft.com/office/drawing/2014/main" val="10003"/>
+                  </a:ext>
+                </a:extLst>
               </a:tr>
               <a:tr h="475488">
                 <a:tc>
@@ -48016,6 +49594,11 @@
                     </a:solidFill>
                   </a:tcPr>
                 </a:tc>
+                <a:extLst>
+                  <a:ext uri="{0D108BD9-81ED-4DB2-BD59-A6C34878D82A}">
+                    <a16:rowId xmlns:a16="http://schemas.microsoft.com/office/drawing/2014/main" val="10004"/>
+                  </a:ext>
+                </a:extLst>
               </a:tr>
             </a:tbl>
           </a:graphicData>
@@ -48517,7 +50100,7 @@
               <a:t> </a:t>
             </a:r>
             <a:r>
-              <a:rPr sz="1400" b="1" i="0" dirty="0" err="1" smtClean="0">
+              <a:rPr sz="1400" b="1" i="0" dirty="0" err="1">
                 <a:solidFill>
                   <a:srgbClr val="262626"/>
                 </a:solidFill>
@@ -48526,7 +50109,7 @@
               <a:t>thô</a:t>
             </a:r>
             <a:r>
-              <a:rPr sz="1400" b="0" i="0" dirty="0" smtClean="0">
+              <a:rPr sz="1400" b="0" i="0" dirty="0">
                 <a:solidFill>
                   <a:srgbClr val="262626"/>
                 </a:solidFill>
@@ -48602,7 +50185,7 @@
               <a:t>CSV + manifest </a:t>
             </a:r>
             <a:r>
-              <a:rPr lang="en-US" sz="1300" b="0" i="0" dirty="0" smtClean="0">
+              <a:rPr lang="en-US" sz="1300" b="0" i="0" dirty="0">
                 <a:solidFill>
                   <a:srgbClr val="262626"/>
                 </a:solidFill>
@@ -48611,7 +50194,7 @@
               <a:t>,</a:t>
             </a:r>
             <a:r>
-              <a:rPr sz="1300" b="0" i="0" dirty="0" smtClean="0">
+              <a:rPr sz="1300" b="0" i="0" dirty="0">
                 <a:solidFill>
                   <a:srgbClr val="262626"/>
                 </a:solidFill>
@@ -48747,7 +50330,7 @@
           <a:p>
             <a:pPr algn="ctr"/>
             <a:r>
-              <a:rPr sz="1300" b="0" i="0" dirty="0" smtClean="0">
+              <a:rPr sz="1300" b="0" i="0" dirty="0">
                 <a:solidFill>
                   <a:srgbClr val="FFFFFF"/>
                 </a:solidFill>
@@ -48895,7 +50478,7 @@
               <a:t>star schema </a:t>
             </a:r>
             <a:r>
-              <a:rPr lang="en-US" sz="1300" b="0" i="0" dirty="0" smtClean="0">
+              <a:rPr lang="en-US" sz="1300" b="0" i="0" dirty="0">
                 <a:solidFill>
                   <a:srgbClr val="262626"/>
                 </a:solidFill>
@@ -48904,22 +50487,13 @@
               <a:t>,</a:t>
             </a:r>
             <a:r>
-              <a:rPr sz="1300" b="0" i="0" dirty="0" smtClean="0">
-                <a:solidFill>
-                  <a:srgbClr val="262626"/>
-                </a:solidFill>
-                <a:latin typeface="Times New Roman"/>
-              </a:rPr>
-              <a:t> </a:t>
-            </a:r>
-            <a:r>
               <a:rPr sz="1300" b="0" i="0" dirty="0">
                 <a:solidFill>
                   <a:srgbClr val="262626"/>
                 </a:solidFill>
                 <a:latin typeface="Times New Roman"/>
               </a:rPr>
-              <a:t>overwrite</a:t>
+              <a:t> overwrite</a:t>
             </a:r>
           </a:p>
         </p:txBody>
